--- a/entregaveis/Trabalho1_PLN.pptx
+++ b/entregaveis/Trabalho1_PLN.pptx
@@ -90,13 +90,13 @@
         </a:solidFill>
         <a:effectLst/>
         <a:uFillTx/>
-        <a:latin typeface="+mj-lt"/>
-        <a:ea typeface="+mj-ea"/>
-        <a:cs typeface="+mj-cs"/>
-        <a:sym typeface="Calibri"/>
+        <a:latin typeface="+mn-lt"/>
+        <a:ea typeface="+mn-ea"/>
+        <a:cs typeface="+mn-cs"/>
+        <a:sym typeface="Helvetica"/>
       </a:defRPr>
     </a:lvl1pPr>
-    <a:lvl2pPr marL="0" marR="0" indent="457200" algn="l" defTabSz="914400" rtl="0" fontAlgn="auto" latinLnBrk="0" hangingPunct="0">
+    <a:lvl2pPr marL="0" marR="0" indent="0" algn="l" defTabSz="914400" rtl="0" fontAlgn="auto" latinLnBrk="0" hangingPunct="0">
       <a:lnSpc>
         <a:spcPct val="100000"/>
       </a:lnSpc>
@@ -120,13 +120,13 @@
         </a:solidFill>
         <a:effectLst/>
         <a:uFillTx/>
-        <a:latin typeface="+mj-lt"/>
-        <a:ea typeface="+mj-ea"/>
-        <a:cs typeface="+mj-cs"/>
-        <a:sym typeface="Calibri"/>
+        <a:latin typeface="+mn-lt"/>
+        <a:ea typeface="+mn-ea"/>
+        <a:cs typeface="+mn-cs"/>
+        <a:sym typeface="Helvetica"/>
       </a:defRPr>
     </a:lvl2pPr>
-    <a:lvl3pPr marL="0" marR="0" indent="914400" algn="l" defTabSz="914400" rtl="0" fontAlgn="auto" latinLnBrk="0" hangingPunct="0">
+    <a:lvl3pPr marL="0" marR="0" indent="0" algn="l" defTabSz="914400" rtl="0" fontAlgn="auto" latinLnBrk="0" hangingPunct="0">
       <a:lnSpc>
         <a:spcPct val="100000"/>
       </a:lnSpc>
@@ -150,13 +150,13 @@
         </a:solidFill>
         <a:effectLst/>
         <a:uFillTx/>
-        <a:latin typeface="+mj-lt"/>
-        <a:ea typeface="+mj-ea"/>
-        <a:cs typeface="+mj-cs"/>
-        <a:sym typeface="Calibri"/>
+        <a:latin typeface="+mn-lt"/>
+        <a:ea typeface="+mn-ea"/>
+        <a:cs typeface="+mn-cs"/>
+        <a:sym typeface="Helvetica"/>
       </a:defRPr>
     </a:lvl3pPr>
-    <a:lvl4pPr marL="0" marR="0" indent="1371600" algn="l" defTabSz="914400" rtl="0" fontAlgn="auto" latinLnBrk="0" hangingPunct="0">
+    <a:lvl4pPr marL="0" marR="0" indent="0" algn="l" defTabSz="914400" rtl="0" fontAlgn="auto" latinLnBrk="0" hangingPunct="0">
       <a:lnSpc>
         <a:spcPct val="100000"/>
       </a:lnSpc>
@@ -180,13 +180,13 @@
         </a:solidFill>
         <a:effectLst/>
         <a:uFillTx/>
-        <a:latin typeface="+mj-lt"/>
-        <a:ea typeface="+mj-ea"/>
-        <a:cs typeface="+mj-cs"/>
-        <a:sym typeface="Calibri"/>
+        <a:latin typeface="+mn-lt"/>
+        <a:ea typeface="+mn-ea"/>
+        <a:cs typeface="+mn-cs"/>
+        <a:sym typeface="Helvetica"/>
       </a:defRPr>
     </a:lvl4pPr>
-    <a:lvl5pPr marL="0" marR="0" indent="1828800" algn="l" defTabSz="914400" rtl="0" fontAlgn="auto" latinLnBrk="0" hangingPunct="0">
+    <a:lvl5pPr marL="0" marR="0" indent="0" algn="l" defTabSz="914400" rtl="0" fontAlgn="auto" latinLnBrk="0" hangingPunct="0">
       <a:lnSpc>
         <a:spcPct val="100000"/>
       </a:lnSpc>
@@ -210,13 +210,13 @@
         </a:solidFill>
         <a:effectLst/>
         <a:uFillTx/>
-        <a:latin typeface="+mj-lt"/>
-        <a:ea typeface="+mj-ea"/>
-        <a:cs typeface="+mj-cs"/>
-        <a:sym typeface="Calibri"/>
+        <a:latin typeface="+mn-lt"/>
+        <a:ea typeface="+mn-ea"/>
+        <a:cs typeface="+mn-cs"/>
+        <a:sym typeface="Helvetica"/>
       </a:defRPr>
     </a:lvl5pPr>
-    <a:lvl6pPr marL="0" marR="0" indent="2286000" algn="l" defTabSz="914400" rtl="0" fontAlgn="auto" latinLnBrk="0" hangingPunct="0">
+    <a:lvl6pPr marL="0" marR="0" indent="0" algn="l" defTabSz="914400" rtl="0" fontAlgn="auto" latinLnBrk="0" hangingPunct="0">
       <a:lnSpc>
         <a:spcPct val="100000"/>
       </a:lnSpc>
@@ -240,13 +240,13 @@
         </a:solidFill>
         <a:effectLst/>
         <a:uFillTx/>
-        <a:latin typeface="+mj-lt"/>
-        <a:ea typeface="+mj-ea"/>
-        <a:cs typeface="+mj-cs"/>
-        <a:sym typeface="Calibri"/>
+        <a:latin typeface="+mn-lt"/>
+        <a:ea typeface="+mn-ea"/>
+        <a:cs typeface="+mn-cs"/>
+        <a:sym typeface="Helvetica"/>
       </a:defRPr>
     </a:lvl6pPr>
-    <a:lvl7pPr marL="0" marR="0" indent="2743200" algn="l" defTabSz="914400" rtl="0" fontAlgn="auto" latinLnBrk="0" hangingPunct="0">
+    <a:lvl7pPr marL="0" marR="0" indent="0" algn="l" defTabSz="914400" rtl="0" fontAlgn="auto" latinLnBrk="0" hangingPunct="0">
       <a:lnSpc>
         <a:spcPct val="100000"/>
       </a:lnSpc>
@@ -270,13 +270,13 @@
         </a:solidFill>
         <a:effectLst/>
         <a:uFillTx/>
-        <a:latin typeface="+mj-lt"/>
-        <a:ea typeface="+mj-ea"/>
-        <a:cs typeface="+mj-cs"/>
-        <a:sym typeface="Calibri"/>
+        <a:latin typeface="+mn-lt"/>
+        <a:ea typeface="+mn-ea"/>
+        <a:cs typeface="+mn-cs"/>
+        <a:sym typeface="Helvetica"/>
       </a:defRPr>
     </a:lvl7pPr>
-    <a:lvl8pPr marL="0" marR="0" indent="3200400" algn="l" defTabSz="914400" rtl="0" fontAlgn="auto" latinLnBrk="0" hangingPunct="0">
+    <a:lvl8pPr marL="0" marR="0" indent="0" algn="l" defTabSz="914400" rtl="0" fontAlgn="auto" latinLnBrk="0" hangingPunct="0">
       <a:lnSpc>
         <a:spcPct val="100000"/>
       </a:lnSpc>
@@ -300,13 +300,13 @@
         </a:solidFill>
         <a:effectLst/>
         <a:uFillTx/>
-        <a:latin typeface="+mj-lt"/>
-        <a:ea typeface="+mj-ea"/>
-        <a:cs typeface="+mj-cs"/>
-        <a:sym typeface="Calibri"/>
+        <a:latin typeface="+mn-lt"/>
+        <a:ea typeface="+mn-ea"/>
+        <a:cs typeface="+mn-cs"/>
+        <a:sym typeface="Helvetica"/>
       </a:defRPr>
     </a:lvl8pPr>
-    <a:lvl9pPr marL="0" marR="0" indent="3657600" algn="l" defTabSz="914400" rtl="0" fontAlgn="auto" latinLnBrk="0" hangingPunct="0">
+    <a:lvl9pPr marL="0" marR="0" indent="0" algn="l" defTabSz="914400" rtl="0" fontAlgn="auto" latinLnBrk="0" hangingPunct="0">
       <a:lnSpc>
         <a:spcPct val="100000"/>
       </a:lnSpc>
@@ -330,10 +330,10 @@
         </a:solidFill>
         <a:effectLst/>
         <a:uFillTx/>
-        <a:latin typeface="+mj-lt"/>
-        <a:ea typeface="+mj-ea"/>
-        <a:cs typeface="+mj-cs"/>
-        <a:sym typeface="Calibri"/>
+        <a:latin typeface="+mn-lt"/>
+        <a:ea typeface="+mn-ea"/>
+        <a:cs typeface="+mn-cs"/>
+        <a:sym typeface="Helvetica"/>
       </a:defRPr>
     </a:lvl9pPr>
   </p:defaultTextStyle>
@@ -573,8 +573,8 @@
         </p:nvSpPr>
         <p:spPr>
           <a:xfrm>
-            <a:off x="457200" y="69056"/>
-            <a:ext cx="8229600" cy="1131094"/>
+            <a:off x="1370012" y="577453"/>
+            <a:ext cx="7315201" cy="1251347"/>
           </a:xfrm>
           <a:prstGeom prst="rect">
             <a:avLst/>
@@ -589,7 +589,7 @@
           </a:extLst>
         </p:spPr>
         <p:txBody>
-          <a:bodyPr lIns="45719" rIns="45719" anchor="ctr"/>
+          <a:bodyPr lIns="45718" tIns="45718" rIns="45718" bIns="45718" anchor="ctr"/>
           <a:lstStyle/>
           <a:p>
             <a:pPr/>
@@ -609,8 +609,8 @@
         </p:nvSpPr>
         <p:spPr>
           <a:xfrm>
-            <a:off x="457200" y="1200150"/>
-            <a:ext cx="8229600" cy="3943350"/>
+            <a:off x="5103812" y="1828800"/>
+            <a:ext cx="3581401" cy="3314700"/>
           </a:xfrm>
           <a:prstGeom prst="rect">
             <a:avLst/>
@@ -625,7 +625,7 @@
           </a:extLst>
         </p:spPr>
         <p:txBody>
-          <a:bodyPr lIns="45719" rIns="45719"/>
+          <a:bodyPr lIns="45718" tIns="45718" rIns="45718" bIns="45718"/>
           <a:lstStyle/>
           <a:p>
             <a:pPr/>
@@ -669,8 +669,8 @@
         </p:nvSpPr>
         <p:spPr>
           <a:xfrm>
-            <a:off x="4419600" y="4627562"/>
-            <a:ext cx="2133600" cy="279401"/>
+            <a:off x="6294578" y="4643111"/>
+            <a:ext cx="258623" cy="248304"/>
           </a:xfrm>
           <a:prstGeom prst="rect">
             <a:avLst/>
@@ -680,12 +680,17 @@
           </a:ln>
         </p:spPr>
         <p:txBody>
-          <a:bodyPr wrap="none" lIns="45719" rIns="45719" anchor="ctr">
+          <a:bodyPr wrap="none" lIns="45718" tIns="45718" rIns="45718" bIns="45718" anchor="ctr">
             <a:spAutoFit/>
           </a:bodyPr>
           <a:lstStyle>
             <a:lvl1pPr algn="r">
-              <a:defRPr sz="1200"/>
+              <a:defRPr sz="1200">
+                <a:latin typeface="+mj-lt"/>
+                <a:ea typeface="+mj-ea"/>
+                <a:cs typeface="+mj-cs"/>
+                <a:sym typeface="Calibri"/>
+              </a:defRPr>
             </a:lvl1pPr>
           </a:lstStyle>
           <a:p>
@@ -1201,7 +1206,7 @@
           <a:sym typeface="Calibri"/>
         </a:defRPr>
       </a:lvl1pPr>
-      <a:lvl2pPr marL="0" marR="0" indent="457200" algn="r" defTabSz="914400" rtl="0" latinLnBrk="0">
+      <a:lvl2pPr marL="0" marR="0" indent="0" algn="r" defTabSz="914400" rtl="0" latinLnBrk="0">
         <a:lnSpc>
           <a:spcPct val="100000"/>
         </a:lnSpc>
@@ -1227,7 +1232,7 @@
           <a:sym typeface="Calibri"/>
         </a:defRPr>
       </a:lvl2pPr>
-      <a:lvl3pPr marL="0" marR="0" indent="914400" algn="r" defTabSz="914400" rtl="0" latinLnBrk="0">
+      <a:lvl3pPr marL="0" marR="0" indent="0" algn="r" defTabSz="914400" rtl="0" latinLnBrk="0">
         <a:lnSpc>
           <a:spcPct val="100000"/>
         </a:lnSpc>
@@ -1253,7 +1258,7 @@
           <a:sym typeface="Calibri"/>
         </a:defRPr>
       </a:lvl3pPr>
-      <a:lvl4pPr marL="0" marR="0" indent="1371600" algn="r" defTabSz="914400" rtl="0" latinLnBrk="0">
+      <a:lvl4pPr marL="0" marR="0" indent="0" algn="r" defTabSz="914400" rtl="0" latinLnBrk="0">
         <a:lnSpc>
           <a:spcPct val="100000"/>
         </a:lnSpc>
@@ -1279,7 +1284,7 @@
           <a:sym typeface="Calibri"/>
         </a:defRPr>
       </a:lvl4pPr>
-      <a:lvl5pPr marL="0" marR="0" indent="1828800" algn="r" defTabSz="914400" rtl="0" latinLnBrk="0">
+      <a:lvl5pPr marL="0" marR="0" indent="0" algn="r" defTabSz="914400" rtl="0" latinLnBrk="0">
         <a:lnSpc>
           <a:spcPct val="100000"/>
         </a:lnSpc>
@@ -1305,7 +1310,7 @@
           <a:sym typeface="Calibri"/>
         </a:defRPr>
       </a:lvl5pPr>
-      <a:lvl6pPr marL="0" marR="0" indent="2286000" algn="r" defTabSz="914400" rtl="0" latinLnBrk="0">
+      <a:lvl6pPr marL="0" marR="0" indent="0" algn="r" defTabSz="914400" rtl="0" latinLnBrk="0">
         <a:lnSpc>
           <a:spcPct val="100000"/>
         </a:lnSpc>
@@ -1331,7 +1336,7 @@
           <a:sym typeface="Calibri"/>
         </a:defRPr>
       </a:lvl6pPr>
-      <a:lvl7pPr marL="0" marR="0" indent="2743200" algn="r" defTabSz="914400" rtl="0" latinLnBrk="0">
+      <a:lvl7pPr marL="0" marR="0" indent="0" algn="r" defTabSz="914400" rtl="0" latinLnBrk="0">
         <a:lnSpc>
           <a:spcPct val="100000"/>
         </a:lnSpc>
@@ -1357,7 +1362,7 @@
           <a:sym typeface="Calibri"/>
         </a:defRPr>
       </a:lvl7pPr>
-      <a:lvl8pPr marL="0" marR="0" indent="3200400" algn="r" defTabSz="914400" rtl="0" latinLnBrk="0">
+      <a:lvl8pPr marL="0" marR="0" indent="0" algn="r" defTabSz="914400" rtl="0" latinLnBrk="0">
         <a:lnSpc>
           <a:spcPct val="100000"/>
         </a:lnSpc>
@@ -1383,7 +1388,7 @@
           <a:sym typeface="Calibri"/>
         </a:defRPr>
       </a:lvl8pPr>
-      <a:lvl9pPr marL="0" marR="0" indent="3657600" algn="r" defTabSz="914400" rtl="0" latinLnBrk="0">
+      <a:lvl9pPr marL="0" marR="0" indent="0" algn="r" defTabSz="914400" rtl="0" latinLnBrk="0">
         <a:lnSpc>
           <a:spcPct val="100000"/>
         </a:lnSpc>
@@ -1508,7 +1513,7 @@
         </p:nvSpPr>
         <p:spPr>
           <a:xfrm>
-            <a:off x="424191" y="3197264"/>
+            <a:off x="424191" y="3197263"/>
             <a:ext cx="8321041" cy="241301"/>
           </a:xfrm>
           <a:prstGeom prst="rect">
@@ -1631,14 +1636,14 @@
       </p:grpSpPr>
       <p:sp>
         <p:nvSpPr>
-          <p:cNvPr id="97" name="Text 0"/>
+          <p:cNvPr id="89" name="Text 0"/>
           <p:cNvSpPr txBox="1"/>
           <p:nvPr/>
         </p:nvSpPr>
         <p:spPr>
           <a:xfrm>
-            <a:off x="457200" y="381000"/>
-            <a:ext cx="8229600" cy="609601"/>
+            <a:off x="457200" y="499666"/>
+            <a:ext cx="8229600" cy="762001"/>
           </a:xfrm>
           <a:prstGeom prst="rect">
             <a:avLst/>
@@ -1658,7 +1663,7 @@
           </a:bodyPr>
           <a:lstStyle>
             <a:lvl1pPr algn="ctr">
-              <a:defRPr sz="4000">
+              <a:defRPr sz="5000">
                 <a:solidFill>
                   <a:srgbClr val="142B47"/>
                 </a:solidFill>
@@ -1679,14 +1684,14 @@
       </p:sp>
       <p:sp>
         <p:nvSpPr>
-          <p:cNvPr id="98" name="Shape 1"/>
+          <p:cNvPr id="90" name="Shape 1"/>
           <p:cNvSpPr/>
           <p:nvPr/>
         </p:nvSpPr>
         <p:spPr>
           <a:xfrm>
-            <a:off x="731519" y="1325880"/>
-            <a:ext cx="2377441" cy="1234440"/>
+            <a:off x="731520" y="1596820"/>
+            <a:ext cx="2377442" cy="1234441"/>
           </a:xfrm>
           <a:prstGeom prst="roundRect">
             <a:avLst>
@@ -1703,23 +1708,30 @@
           </a:ln>
         </p:spPr>
         <p:txBody>
-          <a:bodyPr lIns="45719" rIns="45719"/>
+          <a:bodyPr lIns="45718" tIns="45718" rIns="45718" bIns="45718"/>
           <a:lstStyle/>
           <a:p>
-            <a:pPr/>
-          </a:p>
-        </p:txBody>
-      </p:sp>
-      <p:sp>
-        <p:nvSpPr>
-          <p:cNvPr id="99" name="Text 2"/>
+            <a:pPr>
+              <a:defRPr>
+                <a:latin typeface="+mj-lt"/>
+                <a:ea typeface="+mj-ea"/>
+                <a:cs typeface="+mj-cs"/>
+                <a:sym typeface="Calibri"/>
+              </a:defRPr>
+            </a:pPr>
+          </a:p>
+        </p:txBody>
+      </p:sp>
+      <p:sp>
+        <p:nvSpPr>
+          <p:cNvPr id="91" name="Text 2"/>
           <p:cNvSpPr txBox="1"/>
           <p:nvPr/>
         </p:nvSpPr>
         <p:spPr>
           <a:xfrm>
-            <a:off x="822960" y="1686305"/>
-            <a:ext cx="2194561" cy="304801"/>
+            <a:off x="822960" y="1703372"/>
+            <a:ext cx="2194562" cy="431801"/>
           </a:xfrm>
           <a:prstGeom prst="rect">
             <a:avLst/>
@@ -1739,7 +1751,7 @@
           </a:bodyPr>
           <a:lstStyle>
             <a:lvl1pPr algn="ctr">
-              <a:defRPr sz="2000">
+              <a:defRPr sz="2800">
                 <a:solidFill>
                   <a:srgbClr val="FFFFFF"/>
                 </a:solidFill>
@@ -1760,14 +1772,14 @@
       </p:sp>
       <p:sp>
         <p:nvSpPr>
-          <p:cNvPr id="100" name="Text 3"/>
+          <p:cNvPr id="92" name="Text 3"/>
           <p:cNvSpPr txBox="1"/>
           <p:nvPr/>
         </p:nvSpPr>
         <p:spPr>
           <a:xfrm>
-            <a:off x="822960" y="2004822"/>
-            <a:ext cx="2194561" cy="381001"/>
+            <a:off x="822960" y="2148888"/>
+            <a:ext cx="2194562" cy="508001"/>
           </a:xfrm>
           <a:prstGeom prst="rect">
             <a:avLst/>
@@ -1787,7 +1799,7 @@
           </a:bodyPr>
           <a:lstStyle>
             <a:lvl1pPr algn="ctr">
-              <a:defRPr sz="1300">
+              <a:defRPr sz="1700">
                 <a:solidFill>
                   <a:srgbClr val="B9D3EE"/>
                 </a:solidFill>
@@ -1808,14 +1820,14 @@
       </p:sp>
       <p:sp>
         <p:nvSpPr>
-          <p:cNvPr id="101" name="Shape 4"/>
+          <p:cNvPr id="93" name="Shape 4"/>
           <p:cNvSpPr/>
           <p:nvPr/>
         </p:nvSpPr>
         <p:spPr>
           <a:xfrm>
-            <a:off x="3383279" y="1325880"/>
-            <a:ext cx="2377441" cy="1234440"/>
+            <a:off x="3383279" y="1596820"/>
+            <a:ext cx="2377442" cy="1234441"/>
           </a:xfrm>
           <a:prstGeom prst="roundRect">
             <a:avLst>
@@ -1832,23 +1844,30 @@
           </a:ln>
         </p:spPr>
         <p:txBody>
-          <a:bodyPr lIns="45719" rIns="45719"/>
+          <a:bodyPr lIns="45718" tIns="45718" rIns="45718" bIns="45718"/>
           <a:lstStyle/>
           <a:p>
-            <a:pPr/>
-          </a:p>
-        </p:txBody>
-      </p:sp>
-      <p:sp>
-        <p:nvSpPr>
-          <p:cNvPr id="102" name="Text 5"/>
+            <a:pPr>
+              <a:defRPr>
+                <a:latin typeface="+mj-lt"/>
+                <a:ea typeface="+mj-ea"/>
+                <a:cs typeface="+mj-cs"/>
+                <a:sym typeface="Calibri"/>
+              </a:defRPr>
+            </a:pPr>
+          </a:p>
+        </p:txBody>
+      </p:sp>
+      <p:sp>
+        <p:nvSpPr>
+          <p:cNvPr id="94" name="Text 5"/>
           <p:cNvSpPr txBox="1"/>
           <p:nvPr/>
         </p:nvSpPr>
         <p:spPr>
           <a:xfrm>
-            <a:off x="3474720" y="1686305"/>
-            <a:ext cx="2194561" cy="304801"/>
+            <a:off x="3474720" y="1703372"/>
+            <a:ext cx="2194562" cy="431801"/>
           </a:xfrm>
           <a:prstGeom prst="rect">
             <a:avLst/>
@@ -1868,7 +1887,7 @@
           </a:bodyPr>
           <a:lstStyle>
             <a:lvl1pPr algn="ctr">
-              <a:defRPr sz="2000">
+              <a:defRPr sz="2800">
                 <a:solidFill>
                   <a:srgbClr val="FFFFFF"/>
                 </a:solidFill>
@@ -1889,14 +1908,14 @@
       </p:sp>
       <p:sp>
         <p:nvSpPr>
-          <p:cNvPr id="103" name="Text 6"/>
+          <p:cNvPr id="95" name="Text 6"/>
           <p:cNvSpPr txBox="1"/>
           <p:nvPr/>
         </p:nvSpPr>
         <p:spPr>
           <a:xfrm>
-            <a:off x="3474720" y="2004822"/>
-            <a:ext cx="2194561" cy="381001"/>
+            <a:off x="3474718" y="2161588"/>
+            <a:ext cx="2194562" cy="482601"/>
           </a:xfrm>
           <a:prstGeom prst="rect">
             <a:avLst/>
@@ -1916,7 +1935,7 @@
           </a:bodyPr>
           <a:lstStyle>
             <a:lvl1pPr algn="ctr">
-              <a:defRPr sz="1300">
+              <a:defRPr sz="1600">
                 <a:solidFill>
                   <a:srgbClr val="B9D3EE"/>
                 </a:solidFill>
@@ -1937,14 +1956,14 @@
       </p:sp>
       <p:sp>
         <p:nvSpPr>
-          <p:cNvPr id="104" name="Shape 7"/>
+          <p:cNvPr id="96" name="Shape 7"/>
           <p:cNvSpPr/>
           <p:nvPr/>
         </p:nvSpPr>
         <p:spPr>
           <a:xfrm>
-            <a:off x="6035040" y="1325880"/>
-            <a:ext cx="2377441" cy="1234440"/>
+            <a:off x="6035039" y="1596820"/>
+            <a:ext cx="2377442" cy="1234441"/>
           </a:xfrm>
           <a:prstGeom prst="roundRect">
             <a:avLst>
@@ -1961,23 +1980,30 @@
           </a:ln>
         </p:spPr>
         <p:txBody>
-          <a:bodyPr lIns="45719" rIns="45719"/>
+          <a:bodyPr lIns="45718" tIns="45718" rIns="45718" bIns="45718"/>
           <a:lstStyle/>
           <a:p>
-            <a:pPr/>
-          </a:p>
-        </p:txBody>
-      </p:sp>
-      <p:sp>
-        <p:nvSpPr>
-          <p:cNvPr id="105" name="Text 8"/>
+            <a:pPr>
+              <a:defRPr>
+                <a:latin typeface="+mj-lt"/>
+                <a:ea typeface="+mj-ea"/>
+                <a:cs typeface="+mj-cs"/>
+                <a:sym typeface="Calibri"/>
+              </a:defRPr>
+            </a:pPr>
+          </a:p>
+        </p:txBody>
+      </p:sp>
+      <p:sp>
+        <p:nvSpPr>
+          <p:cNvPr id="97" name="Text 8"/>
           <p:cNvSpPr txBox="1"/>
           <p:nvPr/>
         </p:nvSpPr>
         <p:spPr>
           <a:xfrm>
-            <a:off x="6126479" y="1686305"/>
-            <a:ext cx="2194561" cy="304801"/>
+            <a:off x="6126479" y="1703372"/>
+            <a:ext cx="2194562" cy="431801"/>
           </a:xfrm>
           <a:prstGeom prst="rect">
             <a:avLst/>
@@ -1997,7 +2023,7 @@
           </a:bodyPr>
           <a:lstStyle>
             <a:lvl1pPr algn="ctr">
-              <a:defRPr sz="2000">
+              <a:defRPr sz="2800">
                 <a:solidFill>
                   <a:srgbClr val="FFFFFF"/>
                 </a:solidFill>
@@ -2018,14 +2044,14 @@
       </p:sp>
       <p:sp>
         <p:nvSpPr>
-          <p:cNvPr id="106" name="Text 9"/>
+          <p:cNvPr id="98" name="Text 9"/>
           <p:cNvSpPr txBox="1"/>
           <p:nvPr/>
         </p:nvSpPr>
         <p:spPr>
           <a:xfrm>
-            <a:off x="6126479" y="2004822"/>
-            <a:ext cx="2194561" cy="381001"/>
+            <a:off x="6126478" y="2161588"/>
+            <a:ext cx="2194562" cy="482601"/>
           </a:xfrm>
           <a:prstGeom prst="rect">
             <a:avLst/>
@@ -2045,7 +2071,7 @@
           </a:bodyPr>
           <a:lstStyle>
             <a:lvl1pPr algn="ctr">
-              <a:defRPr sz="1300">
+              <a:defRPr sz="1600">
                 <a:solidFill>
                   <a:srgbClr val="B9D3EE"/>
                 </a:solidFill>
@@ -2066,14 +2092,14 @@
       </p:sp>
       <p:sp>
         <p:nvSpPr>
-          <p:cNvPr id="107" name="Shape 10"/>
+          <p:cNvPr id="99" name="Shape 10"/>
           <p:cNvSpPr/>
           <p:nvPr/>
         </p:nvSpPr>
         <p:spPr>
           <a:xfrm>
-            <a:off x="731519" y="2788920"/>
-            <a:ext cx="2377441" cy="1234441"/>
+            <a:off x="1994221" y="3017731"/>
+            <a:ext cx="2377442" cy="1234442"/>
           </a:xfrm>
           <a:prstGeom prst="roundRect">
             <a:avLst>
@@ -2090,23 +2116,30 @@
           </a:ln>
         </p:spPr>
         <p:txBody>
-          <a:bodyPr lIns="45719" rIns="45719"/>
+          <a:bodyPr lIns="45718" tIns="45718" rIns="45718" bIns="45718"/>
           <a:lstStyle/>
           <a:p>
-            <a:pPr/>
-          </a:p>
-        </p:txBody>
-      </p:sp>
-      <p:sp>
-        <p:nvSpPr>
-          <p:cNvPr id="108" name="Text 11"/>
+            <a:pPr>
+              <a:defRPr>
+                <a:latin typeface="+mj-lt"/>
+                <a:ea typeface="+mj-ea"/>
+                <a:cs typeface="+mj-cs"/>
+                <a:sym typeface="Calibri"/>
+              </a:defRPr>
+            </a:pPr>
+          </a:p>
+        </p:txBody>
+      </p:sp>
+      <p:sp>
+        <p:nvSpPr>
+          <p:cNvPr id="100" name="Text 11"/>
           <p:cNvSpPr txBox="1"/>
           <p:nvPr/>
         </p:nvSpPr>
         <p:spPr>
           <a:xfrm>
-            <a:off x="822960" y="3149346"/>
-            <a:ext cx="2194561" cy="304801"/>
+            <a:off x="2085662" y="3166413"/>
+            <a:ext cx="2194562" cy="431801"/>
           </a:xfrm>
           <a:prstGeom prst="rect">
             <a:avLst/>
@@ -2126,7 +2159,7 @@
           </a:bodyPr>
           <a:lstStyle>
             <a:lvl1pPr algn="ctr">
-              <a:defRPr sz="2000">
+              <a:defRPr sz="2800">
                 <a:solidFill>
                   <a:srgbClr val="FFFFFF"/>
                 </a:solidFill>
@@ -2147,14 +2180,14 @@
       </p:sp>
       <p:sp>
         <p:nvSpPr>
-          <p:cNvPr id="109" name="Text 12"/>
+          <p:cNvPr id="101" name="Text 12"/>
           <p:cNvSpPr txBox="1"/>
           <p:nvPr/>
         </p:nvSpPr>
         <p:spPr>
           <a:xfrm>
-            <a:off x="822960" y="3467861"/>
-            <a:ext cx="2194561" cy="381001"/>
+            <a:off x="2085662" y="3611927"/>
+            <a:ext cx="2194562" cy="482601"/>
           </a:xfrm>
           <a:prstGeom prst="rect">
             <a:avLst/>
@@ -2174,7 +2207,7 @@
           </a:bodyPr>
           <a:lstStyle>
             <a:lvl1pPr algn="ctr">
-              <a:defRPr sz="1300">
+              <a:defRPr sz="1600">
                 <a:solidFill>
                   <a:srgbClr val="B9D3EE"/>
                 </a:solidFill>
@@ -2195,14 +2228,14 @@
       </p:sp>
       <p:sp>
         <p:nvSpPr>
-          <p:cNvPr id="110" name="Shape 13"/>
+          <p:cNvPr id="102" name="Shape 16"/>
           <p:cNvSpPr/>
           <p:nvPr/>
         </p:nvSpPr>
         <p:spPr>
           <a:xfrm>
-            <a:off x="3383279" y="2788920"/>
-            <a:ext cx="2377441" cy="1234441"/>
+            <a:off x="4662168" y="3017731"/>
+            <a:ext cx="2377442" cy="1234442"/>
           </a:xfrm>
           <a:prstGeom prst="roundRect">
             <a:avLst>
@@ -2219,23 +2252,30 @@
           </a:ln>
         </p:spPr>
         <p:txBody>
-          <a:bodyPr lIns="45719" rIns="45719"/>
+          <a:bodyPr lIns="45718" tIns="45718" rIns="45718" bIns="45718"/>
           <a:lstStyle/>
           <a:p>
-            <a:pPr/>
-          </a:p>
-        </p:txBody>
-      </p:sp>
-      <p:sp>
-        <p:nvSpPr>
-          <p:cNvPr id="111" name="Text 14"/>
+            <a:pPr>
+              <a:defRPr>
+                <a:latin typeface="+mj-lt"/>
+                <a:ea typeface="+mj-ea"/>
+                <a:cs typeface="+mj-cs"/>
+                <a:sym typeface="Calibri"/>
+              </a:defRPr>
+            </a:pPr>
+          </a:p>
+        </p:txBody>
+      </p:sp>
+      <p:sp>
+        <p:nvSpPr>
+          <p:cNvPr id="103" name="Text 17"/>
           <p:cNvSpPr txBox="1"/>
           <p:nvPr/>
         </p:nvSpPr>
         <p:spPr>
           <a:xfrm>
-            <a:off x="3474720" y="3149346"/>
-            <a:ext cx="2194561" cy="304801"/>
+            <a:off x="4753607" y="3166413"/>
+            <a:ext cx="2194562" cy="431801"/>
           </a:xfrm>
           <a:prstGeom prst="rect">
             <a:avLst/>
@@ -2255,7 +2295,7 @@
           </a:bodyPr>
           <a:lstStyle>
             <a:lvl1pPr algn="ctr">
-              <a:defRPr sz="2000">
+              <a:defRPr sz="2800">
                 <a:solidFill>
                   <a:srgbClr val="FFFFFF"/>
                 </a:solidFill>
@@ -2269,21 +2309,21 @@
           <a:p>
             <a:pPr/>
             <a:r>
-              <a:t>Limitações</a:t>
-            </a:r>
-          </a:p>
-        </p:txBody>
-      </p:sp>
-      <p:sp>
-        <p:nvSpPr>
-          <p:cNvPr id="112" name="Text 15"/>
+              <a:t>Qualidade</a:t>
+            </a:r>
+          </a:p>
+        </p:txBody>
+      </p:sp>
+      <p:sp>
+        <p:nvSpPr>
+          <p:cNvPr id="104" name="Text 18"/>
           <p:cNvSpPr txBox="1"/>
           <p:nvPr/>
         </p:nvSpPr>
         <p:spPr>
           <a:xfrm>
-            <a:off x="3474720" y="3467861"/>
-            <a:ext cx="2194561" cy="381001"/>
+            <a:off x="4753607" y="3611927"/>
+            <a:ext cx="2194562" cy="482601"/>
           </a:xfrm>
           <a:prstGeom prst="rect">
             <a:avLst/>
@@ -2303,136 +2343,7 @@
           </a:bodyPr>
           <a:lstStyle>
             <a:lvl1pPr algn="ctr">
-              <a:defRPr sz="1300">
-                <a:solidFill>
-                  <a:srgbClr val="B9D3EE"/>
-                </a:solidFill>
-                <a:latin typeface="SF Pro Regular"/>
-                <a:ea typeface="SF Pro Regular"/>
-                <a:cs typeface="SF Pro Regular"/>
-                <a:sym typeface="SF Pro Regular"/>
-              </a:defRPr>
-            </a:lvl1pPr>
-          </a:lstStyle>
-          <a:p>
-            <a:pPr/>
-            <a:r>
-              <a:t>Governança só com 139; ~3% com subárea errada</a:t>
-            </a:r>
-          </a:p>
-        </p:txBody>
-      </p:sp>
-      <p:sp>
-        <p:nvSpPr>
-          <p:cNvPr id="113" name="Shape 16"/>
-          <p:cNvSpPr/>
-          <p:nvPr/>
-        </p:nvSpPr>
-        <p:spPr>
-          <a:xfrm>
-            <a:off x="6035040" y="2788920"/>
-            <a:ext cx="2377441" cy="1234441"/>
-          </a:xfrm>
-          <a:prstGeom prst="roundRect">
-            <a:avLst>
-              <a:gd name="adj" fmla="val 11111"/>
-            </a:avLst>
-          </a:prstGeom>
-          <a:solidFill>
-            <a:srgbClr val="142B47"/>
-          </a:solidFill>
-          <a:ln w="12700">
-            <a:solidFill>
-              <a:srgbClr val="142B47"/>
-            </a:solidFill>
-          </a:ln>
-        </p:spPr>
-        <p:txBody>
-          <a:bodyPr lIns="45719" rIns="45719"/>
-          <a:lstStyle/>
-          <a:p>
-            <a:pPr/>
-          </a:p>
-        </p:txBody>
-      </p:sp>
-      <p:sp>
-        <p:nvSpPr>
-          <p:cNvPr id="114" name="Text 17"/>
-          <p:cNvSpPr txBox="1"/>
-          <p:nvPr/>
-        </p:nvSpPr>
-        <p:spPr>
-          <a:xfrm>
-            <a:off x="6126479" y="3149346"/>
-            <a:ext cx="2194561" cy="304801"/>
-          </a:xfrm>
-          <a:prstGeom prst="rect">
-            <a:avLst/>
-          </a:prstGeom>
-          <a:ln w="12700">
-            <a:miter lim="400000"/>
-          </a:ln>
-          <a:extLst>
-            <a:ext uri="{C572A759-6A51-4108-AA02-DFA0A04FC94B}">
-              <ma14:wrappingTextBoxFlag xmlns:ma14="http://schemas.microsoft.com/office/mac/drawingml/2011/main" val="1"/>
-            </a:ext>
-          </a:extLst>
-        </p:spPr>
-        <p:txBody>
-          <a:bodyPr lIns="0" tIns="0" rIns="0" bIns="0" anchor="b">
-            <a:spAutoFit/>
-          </a:bodyPr>
-          <a:lstStyle>
-            <a:lvl1pPr algn="ctr">
-              <a:defRPr sz="2000">
-                <a:solidFill>
-                  <a:srgbClr val="FFFFFF"/>
-                </a:solidFill>
-                <a:latin typeface="SF Pro Bold"/>
-                <a:ea typeface="SF Pro Bold"/>
-                <a:cs typeface="SF Pro Bold"/>
-                <a:sym typeface="SF Pro Bold"/>
-              </a:defRPr>
-            </a:lvl1pPr>
-          </a:lstStyle>
-          <a:p>
-            <a:pPr/>
-            <a:r>
-              <a:t>Qualidade</a:t>
-            </a:r>
-          </a:p>
-        </p:txBody>
-      </p:sp>
-      <p:sp>
-        <p:nvSpPr>
-          <p:cNvPr id="115" name="Text 18"/>
-          <p:cNvSpPr txBox="1"/>
-          <p:nvPr/>
-        </p:nvSpPr>
-        <p:spPr>
-          <a:xfrm>
-            <a:off x="6126479" y="3467861"/>
-            <a:ext cx="2194561" cy="381001"/>
-          </a:xfrm>
-          <a:prstGeom prst="rect">
-            <a:avLst/>
-          </a:prstGeom>
-          <a:ln w="12700">
-            <a:miter lim="400000"/>
-          </a:ln>
-          <a:extLst>
-            <a:ext uri="{C572A759-6A51-4108-AA02-DFA0A04FC94B}">
-              <ma14:wrappingTextBoxFlag xmlns:ma14="http://schemas.microsoft.com/office/mac/drawingml/2011/main" val="1"/>
-            </a:ext>
-          </a:extLst>
-        </p:spPr>
-        <p:txBody>
-          <a:bodyPr lIns="0" tIns="0" rIns="0" bIns="0">
-            <a:spAutoFit/>
-          </a:bodyPr>
-          <a:lstStyle>
-            <a:lvl1pPr algn="ctr">
-              <a:defRPr sz="1300">
+              <a:defRPr sz="1600">
                 <a:solidFill>
                   <a:srgbClr val="B9D3EE"/>
                 </a:solidFill>
@@ -2486,7 +2397,7 @@
       </p:grpSpPr>
       <p:sp>
         <p:nvSpPr>
-          <p:cNvPr id="117" name="Text 1"/>
+          <p:cNvPr id="106" name="Text 1"/>
           <p:cNvSpPr txBox="1"/>
           <p:nvPr/>
         </p:nvSpPr>
@@ -2567,14 +2478,14 @@
       </p:grpSpPr>
       <p:sp>
         <p:nvSpPr>
-          <p:cNvPr id="119" name="Text 0"/>
+          <p:cNvPr id="108" name="Text 0"/>
           <p:cNvSpPr txBox="1"/>
           <p:nvPr/>
         </p:nvSpPr>
         <p:spPr>
           <a:xfrm>
-            <a:off x="289613" y="872521"/>
-            <a:ext cx="8564774" cy="609601"/>
+            <a:off x="289612" y="872520"/>
+            <a:ext cx="8564776" cy="609601"/>
           </a:xfrm>
           <a:prstGeom prst="rect">
             <a:avLst/>
@@ -2615,7 +2526,7 @@
       </p:sp>
       <p:sp>
         <p:nvSpPr>
-          <p:cNvPr id="120" name="Text 25"/>
+          <p:cNvPr id="109" name="Text 25"/>
           <p:cNvSpPr txBox="1"/>
           <p:nvPr/>
         </p:nvSpPr>
@@ -2663,14 +2574,14 @@
       </p:sp>
       <p:sp>
         <p:nvSpPr>
-          <p:cNvPr id="121" name="Shape 1"/>
+          <p:cNvPr id="110" name="Shape 1"/>
           <p:cNvSpPr/>
           <p:nvPr/>
         </p:nvSpPr>
         <p:spPr>
           <a:xfrm>
-            <a:off x="457200" y="2282459"/>
-            <a:ext cx="777241" cy="777241"/>
+            <a:off x="457200" y="2282458"/>
+            <a:ext cx="777242" cy="777243"/>
           </a:xfrm>
           <a:prstGeom prst="ellipse">
             <a:avLst/>
@@ -2685,23 +2596,30 @@
           </a:ln>
         </p:spPr>
         <p:txBody>
-          <a:bodyPr lIns="45719" rIns="45719"/>
+          <a:bodyPr lIns="45718" tIns="45718" rIns="45718" bIns="45718"/>
           <a:lstStyle/>
           <a:p>
-            <a:pPr/>
-          </a:p>
-        </p:txBody>
-      </p:sp>
-      <p:sp>
-        <p:nvSpPr>
-          <p:cNvPr id="122" name="Text 2"/>
+            <a:pPr>
+              <a:defRPr>
+                <a:latin typeface="+mj-lt"/>
+                <a:ea typeface="+mj-ea"/>
+                <a:cs typeface="+mj-cs"/>
+                <a:sym typeface="Calibri"/>
+              </a:defRPr>
+            </a:pPr>
+          </a:p>
+        </p:txBody>
+      </p:sp>
+      <p:sp>
+        <p:nvSpPr>
+          <p:cNvPr id="111" name="Text 2"/>
           <p:cNvSpPr txBox="1"/>
           <p:nvPr/>
         </p:nvSpPr>
         <p:spPr>
           <a:xfrm>
-            <a:off x="457200" y="2594879"/>
-            <a:ext cx="777241" cy="152401"/>
+            <a:off x="457199" y="2594879"/>
+            <a:ext cx="777243" cy="152401"/>
           </a:xfrm>
           <a:prstGeom prst="rect">
             <a:avLst/>
@@ -2742,7 +2660,7 @@
       </p:sp>
       <p:sp>
         <p:nvSpPr>
-          <p:cNvPr id="123" name="Text 3"/>
+          <p:cNvPr id="112" name="Text 3"/>
           <p:cNvSpPr txBox="1"/>
           <p:nvPr/>
         </p:nvSpPr>
@@ -2790,14 +2708,14 @@
       </p:sp>
       <p:sp>
         <p:nvSpPr>
-          <p:cNvPr id="124" name="Shape 4"/>
+          <p:cNvPr id="113" name="Shape 4"/>
           <p:cNvSpPr/>
           <p:nvPr/>
         </p:nvSpPr>
         <p:spPr>
           <a:xfrm>
             <a:off x="1307591" y="2671079"/>
-            <a:ext cx="939548" cy="1"/>
+            <a:ext cx="939549" cy="2"/>
           </a:xfrm>
           <a:prstGeom prst="line">
             <a:avLst/>
@@ -2810,7 +2728,7 @@
           </a:ln>
         </p:spPr>
         <p:txBody>
-          <a:bodyPr lIns="45719" rIns="45719"/>
+          <a:bodyPr lIns="45718" tIns="45718" rIns="45718" bIns="45718"/>
           <a:lstStyle/>
           <a:p>
             <a:pPr/>
@@ -2819,14 +2737,14 @@
       </p:sp>
       <p:sp>
         <p:nvSpPr>
-          <p:cNvPr id="125" name="Shape 5"/>
+          <p:cNvPr id="114" name="Shape 5"/>
           <p:cNvSpPr/>
           <p:nvPr/>
         </p:nvSpPr>
         <p:spPr>
           <a:xfrm>
-            <a:off x="2320289" y="2282459"/>
-            <a:ext cx="777241" cy="777241"/>
+            <a:off x="2320288" y="2282458"/>
+            <a:ext cx="777243" cy="777243"/>
           </a:xfrm>
           <a:prstGeom prst="ellipse">
             <a:avLst/>
@@ -2841,23 +2759,30 @@
           </a:ln>
         </p:spPr>
         <p:txBody>
-          <a:bodyPr lIns="45719" rIns="45719"/>
+          <a:bodyPr lIns="45718" tIns="45718" rIns="45718" bIns="45718"/>
           <a:lstStyle/>
           <a:p>
-            <a:pPr/>
-          </a:p>
-        </p:txBody>
-      </p:sp>
-      <p:sp>
-        <p:nvSpPr>
-          <p:cNvPr id="126" name="Text 6"/>
+            <a:pPr>
+              <a:defRPr>
+                <a:latin typeface="+mj-lt"/>
+                <a:ea typeface="+mj-ea"/>
+                <a:cs typeface="+mj-cs"/>
+                <a:sym typeface="Calibri"/>
+              </a:defRPr>
+            </a:pPr>
+          </a:p>
+        </p:txBody>
+      </p:sp>
+      <p:sp>
+        <p:nvSpPr>
+          <p:cNvPr id="115" name="Text 6"/>
           <p:cNvSpPr txBox="1"/>
           <p:nvPr/>
         </p:nvSpPr>
         <p:spPr>
           <a:xfrm>
-            <a:off x="2320289" y="2594879"/>
-            <a:ext cx="777241" cy="152401"/>
+            <a:off x="2320288" y="2594879"/>
+            <a:ext cx="777243" cy="152401"/>
           </a:xfrm>
           <a:prstGeom prst="rect">
             <a:avLst/>
@@ -2898,7 +2823,7 @@
       </p:sp>
       <p:sp>
         <p:nvSpPr>
-          <p:cNvPr id="127" name="Text 7"/>
+          <p:cNvPr id="116" name="Text 7"/>
           <p:cNvSpPr txBox="1"/>
           <p:nvPr/>
         </p:nvSpPr>
@@ -2946,14 +2871,14 @@
       </p:sp>
       <p:sp>
         <p:nvSpPr>
-          <p:cNvPr id="128" name="Shape 8"/>
+          <p:cNvPr id="117" name="Shape 8"/>
           <p:cNvSpPr/>
           <p:nvPr/>
         </p:nvSpPr>
         <p:spPr>
           <a:xfrm>
             <a:off x="3170682" y="2671079"/>
-            <a:ext cx="939547" cy="1"/>
+            <a:ext cx="939548" cy="2"/>
           </a:xfrm>
           <a:prstGeom prst="line">
             <a:avLst/>
@@ -2966,7 +2891,7 @@
           </a:ln>
         </p:spPr>
         <p:txBody>
-          <a:bodyPr lIns="45719" rIns="45719"/>
+          <a:bodyPr lIns="45718" tIns="45718" rIns="45718" bIns="45718"/>
           <a:lstStyle/>
           <a:p>
             <a:pPr/>
@@ -2975,14 +2900,14 @@
       </p:sp>
       <p:sp>
         <p:nvSpPr>
-          <p:cNvPr id="129" name="Shape 9"/>
+          <p:cNvPr id="118" name="Shape 9"/>
           <p:cNvSpPr/>
           <p:nvPr/>
         </p:nvSpPr>
         <p:spPr>
           <a:xfrm>
-            <a:off x="4183379" y="2282459"/>
-            <a:ext cx="777241" cy="777241"/>
+            <a:off x="4183379" y="2282458"/>
+            <a:ext cx="777243" cy="777243"/>
           </a:xfrm>
           <a:prstGeom prst="ellipse">
             <a:avLst/>
@@ -2997,23 +2922,30 @@
           </a:ln>
         </p:spPr>
         <p:txBody>
-          <a:bodyPr lIns="45719" rIns="45719"/>
+          <a:bodyPr lIns="45718" tIns="45718" rIns="45718" bIns="45718"/>
           <a:lstStyle/>
           <a:p>
-            <a:pPr/>
-          </a:p>
-        </p:txBody>
-      </p:sp>
-      <p:sp>
-        <p:nvSpPr>
-          <p:cNvPr id="130" name="Text 10"/>
+            <a:pPr>
+              <a:defRPr>
+                <a:latin typeface="+mj-lt"/>
+                <a:ea typeface="+mj-ea"/>
+                <a:cs typeface="+mj-cs"/>
+                <a:sym typeface="Calibri"/>
+              </a:defRPr>
+            </a:pPr>
+          </a:p>
+        </p:txBody>
+      </p:sp>
+      <p:sp>
+        <p:nvSpPr>
+          <p:cNvPr id="119" name="Text 10"/>
           <p:cNvSpPr txBox="1"/>
           <p:nvPr/>
         </p:nvSpPr>
         <p:spPr>
           <a:xfrm>
             <a:off x="4183379" y="2594879"/>
-            <a:ext cx="777241" cy="152401"/>
+            <a:ext cx="777242" cy="152401"/>
           </a:xfrm>
           <a:prstGeom prst="rect">
             <a:avLst/>
@@ -3054,14 +2986,14 @@
       </p:sp>
       <p:sp>
         <p:nvSpPr>
-          <p:cNvPr id="131" name="Text 11"/>
+          <p:cNvPr id="120" name="Text 11"/>
           <p:cNvSpPr txBox="1"/>
           <p:nvPr/>
         </p:nvSpPr>
         <p:spPr>
           <a:xfrm>
             <a:off x="3863340" y="3132851"/>
-            <a:ext cx="1417321" cy="355601"/>
+            <a:ext cx="1417322" cy="355601"/>
           </a:xfrm>
           <a:prstGeom prst="rect">
             <a:avLst/>
@@ -3102,14 +3034,14 @@
       </p:sp>
       <p:sp>
         <p:nvSpPr>
-          <p:cNvPr id="132" name="Shape 12"/>
+          <p:cNvPr id="121" name="Shape 12"/>
           <p:cNvSpPr/>
           <p:nvPr/>
         </p:nvSpPr>
         <p:spPr>
           <a:xfrm>
             <a:off x="5033771" y="2671079"/>
-            <a:ext cx="939547" cy="1"/>
+            <a:ext cx="939548" cy="2"/>
           </a:xfrm>
           <a:prstGeom prst="line">
             <a:avLst/>
@@ -3122,7 +3054,7 @@
           </a:ln>
         </p:spPr>
         <p:txBody>
-          <a:bodyPr lIns="45719" rIns="45719"/>
+          <a:bodyPr lIns="45718" tIns="45718" rIns="45718" bIns="45718"/>
           <a:lstStyle/>
           <a:p>
             <a:pPr/>
@@ -3131,14 +3063,14 @@
       </p:sp>
       <p:sp>
         <p:nvSpPr>
-          <p:cNvPr id="133" name="Shape 13"/>
+          <p:cNvPr id="122" name="Shape 13"/>
           <p:cNvSpPr/>
           <p:nvPr/>
         </p:nvSpPr>
         <p:spPr>
           <a:xfrm>
-            <a:off x="6046470" y="2282459"/>
-            <a:ext cx="777241" cy="777241"/>
+            <a:off x="6046470" y="2282458"/>
+            <a:ext cx="777243" cy="777243"/>
           </a:xfrm>
           <a:prstGeom prst="ellipse">
             <a:avLst/>
@@ -3153,23 +3085,30 @@
           </a:ln>
         </p:spPr>
         <p:txBody>
-          <a:bodyPr lIns="45719" rIns="45719"/>
+          <a:bodyPr lIns="45718" tIns="45718" rIns="45718" bIns="45718"/>
           <a:lstStyle/>
           <a:p>
-            <a:pPr/>
-          </a:p>
-        </p:txBody>
-      </p:sp>
-      <p:sp>
-        <p:nvSpPr>
-          <p:cNvPr id="134" name="Text 14"/>
+            <a:pPr>
+              <a:defRPr>
+                <a:latin typeface="+mj-lt"/>
+                <a:ea typeface="+mj-ea"/>
+                <a:cs typeface="+mj-cs"/>
+                <a:sym typeface="Calibri"/>
+              </a:defRPr>
+            </a:pPr>
+          </a:p>
+        </p:txBody>
+      </p:sp>
+      <p:sp>
+        <p:nvSpPr>
+          <p:cNvPr id="123" name="Text 14"/>
           <p:cNvSpPr txBox="1"/>
           <p:nvPr/>
         </p:nvSpPr>
         <p:spPr>
           <a:xfrm>
             <a:off x="6046470" y="2594879"/>
-            <a:ext cx="777241" cy="152401"/>
+            <a:ext cx="777242" cy="152401"/>
           </a:xfrm>
           <a:prstGeom prst="rect">
             <a:avLst/>
@@ -3210,14 +3149,14 @@
       </p:sp>
       <p:sp>
         <p:nvSpPr>
-          <p:cNvPr id="135" name="Text 15"/>
+          <p:cNvPr id="124" name="Text 15"/>
           <p:cNvSpPr txBox="1"/>
           <p:nvPr/>
         </p:nvSpPr>
         <p:spPr>
           <a:xfrm>
             <a:off x="5726429" y="3132851"/>
-            <a:ext cx="1417321" cy="355601"/>
+            <a:ext cx="1417322" cy="355601"/>
           </a:xfrm>
           <a:prstGeom prst="rect">
             <a:avLst/>
@@ -3258,14 +3197,14 @@
       </p:sp>
       <p:sp>
         <p:nvSpPr>
-          <p:cNvPr id="136" name="Shape 16"/>
+          <p:cNvPr id="125" name="Shape 16"/>
           <p:cNvSpPr/>
           <p:nvPr/>
         </p:nvSpPr>
         <p:spPr>
           <a:xfrm>
             <a:off x="6896861" y="2671079"/>
-            <a:ext cx="939548" cy="1"/>
+            <a:ext cx="939549" cy="2"/>
           </a:xfrm>
           <a:prstGeom prst="line">
             <a:avLst/>
@@ -3278,7 +3217,7 @@
           </a:ln>
         </p:spPr>
         <p:txBody>
-          <a:bodyPr lIns="45719" rIns="45719"/>
+          <a:bodyPr lIns="45718" tIns="45718" rIns="45718" bIns="45718"/>
           <a:lstStyle/>
           <a:p>
             <a:pPr/>
@@ -3287,14 +3226,14 @@
       </p:sp>
       <p:sp>
         <p:nvSpPr>
-          <p:cNvPr id="137" name="Shape 17"/>
+          <p:cNvPr id="126" name="Shape 17"/>
           <p:cNvSpPr/>
           <p:nvPr/>
         </p:nvSpPr>
         <p:spPr>
           <a:xfrm>
-            <a:off x="7909559" y="2282459"/>
-            <a:ext cx="777241" cy="777241"/>
+            <a:off x="7909559" y="2282458"/>
+            <a:ext cx="777243" cy="777243"/>
           </a:xfrm>
           <a:prstGeom prst="ellipse">
             <a:avLst/>
@@ -3309,23 +3248,30 @@
           </a:ln>
         </p:spPr>
         <p:txBody>
-          <a:bodyPr lIns="45719" rIns="45719"/>
+          <a:bodyPr lIns="45718" tIns="45718" rIns="45718" bIns="45718"/>
           <a:lstStyle/>
           <a:p>
-            <a:pPr/>
-          </a:p>
-        </p:txBody>
-      </p:sp>
-      <p:sp>
-        <p:nvSpPr>
-          <p:cNvPr id="138" name="Text 18"/>
+            <a:pPr>
+              <a:defRPr>
+                <a:latin typeface="+mj-lt"/>
+                <a:ea typeface="+mj-ea"/>
+                <a:cs typeface="+mj-cs"/>
+                <a:sym typeface="Calibri"/>
+              </a:defRPr>
+            </a:pPr>
+          </a:p>
+        </p:txBody>
+      </p:sp>
+      <p:sp>
+        <p:nvSpPr>
+          <p:cNvPr id="127" name="Text 18"/>
           <p:cNvSpPr txBox="1"/>
           <p:nvPr/>
         </p:nvSpPr>
         <p:spPr>
           <a:xfrm>
             <a:off x="7909559" y="2594879"/>
-            <a:ext cx="777241" cy="152401"/>
+            <a:ext cx="777242" cy="152401"/>
           </a:xfrm>
           <a:prstGeom prst="rect">
             <a:avLst/>
@@ -3366,14 +3312,14 @@
       </p:sp>
       <p:sp>
         <p:nvSpPr>
-          <p:cNvPr id="139" name="Text 19"/>
+          <p:cNvPr id="128" name="Text 19"/>
           <p:cNvSpPr txBox="1"/>
           <p:nvPr/>
         </p:nvSpPr>
         <p:spPr>
           <a:xfrm>
-            <a:off x="7589519" y="3132851"/>
-            <a:ext cx="1417321" cy="355601"/>
+            <a:off x="7589518" y="3132851"/>
+            <a:ext cx="1417322" cy="355601"/>
           </a:xfrm>
           <a:prstGeom prst="rect">
             <a:avLst/>
@@ -3447,13 +3393,13 @@
       </p:grpSpPr>
       <p:sp>
         <p:nvSpPr>
-          <p:cNvPr id="141" name="Text 0"/>
+          <p:cNvPr id="130" name="Text 0"/>
           <p:cNvSpPr txBox="1"/>
           <p:nvPr/>
         </p:nvSpPr>
         <p:spPr>
           <a:xfrm>
-            <a:off x="457200" y="660400"/>
+            <a:off x="457200" y="660399"/>
             <a:ext cx="8229600" cy="609601"/>
           </a:xfrm>
           <a:prstGeom prst="rect">
@@ -3495,13 +3441,13 @@
       </p:sp>
       <p:graphicFrame>
         <p:nvGraphicFramePr>
-          <p:cNvPr id="142" name="Table 0"/>
+          <p:cNvPr id="131" name="Table 0"/>
           <p:cNvGraphicFramePr/>
           <p:nvPr/>
         </p:nvGraphicFramePr>
         <p:xfrm>
           <a:off x="914400" y="1422400"/>
-          <a:ext cx="7315200" cy="2057400"/>
+          <a:ext cx="7315200" cy="2743200"/>
         </p:xfrm>
         <a:graphic xmlns:a="http://schemas.openxmlformats.org/drawingml/2006/main">
           <a:graphicData uri="http://schemas.openxmlformats.org/drawingml/2006/table">
@@ -4429,13 +4375,93 @@
       </p:grpSpPr>
       <p:sp>
         <p:nvSpPr>
-          <p:cNvPr id="144" name="Text 0"/>
+          <p:cNvPr id="133" name="Shape 2"/>
+          <p:cNvSpPr/>
+          <p:nvPr/>
+        </p:nvSpPr>
+        <p:spPr>
+          <a:xfrm>
+            <a:off x="5168315" y="1732252"/>
+            <a:ext cx="2647849" cy="2037450"/>
+          </a:xfrm>
+          <a:prstGeom prst="roundRect">
+            <a:avLst>
+              <a:gd name="adj" fmla="val 7583"/>
+            </a:avLst>
+          </a:prstGeom>
+          <a:solidFill>
+            <a:srgbClr val="142B47"/>
+          </a:solidFill>
+          <a:ln w="12700">
+            <a:solidFill>
+              <a:srgbClr val="142B47"/>
+            </a:solidFill>
+          </a:ln>
+        </p:spPr>
+        <p:txBody>
+          <a:bodyPr lIns="45718" tIns="45718" rIns="45718" bIns="45718"/>
+          <a:lstStyle/>
+          <a:p>
+            <a:pPr>
+              <a:defRPr>
+                <a:latin typeface="+mj-lt"/>
+                <a:ea typeface="+mj-ea"/>
+                <a:cs typeface="+mj-cs"/>
+                <a:sym typeface="Calibri"/>
+              </a:defRPr>
+            </a:pPr>
+          </a:p>
+        </p:txBody>
+      </p:sp>
+      <p:sp>
+        <p:nvSpPr>
+          <p:cNvPr id="134" name="Shape 2"/>
+          <p:cNvSpPr/>
+          <p:nvPr/>
+        </p:nvSpPr>
+        <p:spPr>
+          <a:xfrm>
+            <a:off x="1327836" y="1732252"/>
+            <a:ext cx="2647849" cy="2037450"/>
+          </a:xfrm>
+          <a:prstGeom prst="roundRect">
+            <a:avLst>
+              <a:gd name="adj" fmla="val 7583"/>
+            </a:avLst>
+          </a:prstGeom>
+          <a:solidFill>
+            <a:srgbClr val="142B47"/>
+          </a:solidFill>
+          <a:ln w="12700">
+            <a:solidFill>
+              <a:srgbClr val="142B47"/>
+            </a:solidFill>
+          </a:ln>
+        </p:spPr>
+        <p:txBody>
+          <a:bodyPr lIns="45718" tIns="45718" rIns="45718" bIns="45718"/>
+          <a:lstStyle/>
+          <a:p>
+            <a:pPr>
+              <a:defRPr>
+                <a:latin typeface="+mj-lt"/>
+                <a:ea typeface="+mj-ea"/>
+                <a:cs typeface="+mj-cs"/>
+                <a:sym typeface="Calibri"/>
+              </a:defRPr>
+            </a:pPr>
+          </a:p>
+        </p:txBody>
+      </p:sp>
+      <p:sp>
+        <p:nvSpPr>
+          <p:cNvPr id="135" name="Text 0"/>
           <p:cNvSpPr txBox="1"/>
           <p:nvPr/>
         </p:nvSpPr>
         <p:spPr>
           <a:xfrm>
-            <a:off x="457200" y="660658"/>
+            <a:off x="457200" y="660657"/>
             <a:ext cx="8229600" cy="609601"/>
           </a:xfrm>
           <a:prstGeom prst="rect">
@@ -4477,13 +4503,13 @@
       </p:sp>
       <p:sp>
         <p:nvSpPr>
-          <p:cNvPr id="145" name="Text 1"/>
+          <p:cNvPr id="136" name="Text 1"/>
           <p:cNvSpPr txBox="1"/>
           <p:nvPr/>
         </p:nvSpPr>
         <p:spPr>
           <a:xfrm>
-            <a:off x="457200" y="1279148"/>
+            <a:off x="457200" y="1279147"/>
             <a:ext cx="8229600" cy="241301"/>
           </a:xfrm>
           <a:prstGeom prst="rect">
@@ -4525,13 +4551,13 @@
       </p:sp>
       <p:sp>
         <p:nvSpPr>
-          <p:cNvPr id="146" name="Text 2"/>
+          <p:cNvPr id="137" name="Text 2"/>
           <p:cNvSpPr txBox="1"/>
           <p:nvPr/>
         </p:nvSpPr>
         <p:spPr>
           <a:xfrm>
-            <a:off x="914400" y="1976755"/>
+            <a:off x="914400" y="1977417"/>
             <a:ext cx="3474721" cy="850901"/>
           </a:xfrm>
           <a:prstGeom prst="rect">
@@ -4554,7 +4580,7 @@
             <a:lvl1pPr algn="ctr">
               <a:defRPr sz="5600">
                 <a:solidFill>
-                  <a:srgbClr val="142B47"/>
+                  <a:srgbClr val="B3DDFF"/>
                 </a:solidFill>
                 <a:latin typeface="SF Pro Bold"/>
                 <a:ea typeface="SF Pro Bold"/>
@@ -4573,14 +4599,14 @@
       </p:sp>
       <p:sp>
         <p:nvSpPr>
-          <p:cNvPr id="147" name="Text 3"/>
+          <p:cNvPr id="138" name="Text 3"/>
           <p:cNvSpPr txBox="1"/>
           <p:nvPr/>
         </p:nvSpPr>
         <p:spPr>
           <a:xfrm>
-            <a:off x="914400" y="2944495"/>
-            <a:ext cx="3474721" cy="241301"/>
+            <a:off x="1363466" y="2875472"/>
+            <a:ext cx="2576589" cy="736601"/>
           </a:xfrm>
           <a:prstGeom prst="rect">
             <a:avLst/>
@@ -4600,9 +4626,9 @@
           </a:bodyPr>
           <a:lstStyle>
             <a:lvl1pPr algn="ctr">
-              <a:defRPr sz="1600">
+              <a:defRPr sz="2400">
                 <a:solidFill>
-                  <a:srgbClr val="1B3A60"/>
+                  <a:srgbClr val="C24F80"/>
                 </a:solidFill>
                 <a:latin typeface="SF Pro Regular"/>
                 <a:ea typeface="SF Pro Regular"/>
@@ -4621,13 +4647,13 @@
       </p:sp>
       <p:sp>
         <p:nvSpPr>
-          <p:cNvPr id="148" name="Text 4"/>
+          <p:cNvPr id="139" name="Text 4"/>
           <p:cNvSpPr txBox="1"/>
           <p:nvPr/>
         </p:nvSpPr>
         <p:spPr>
           <a:xfrm>
-            <a:off x="4754879" y="1976755"/>
+            <a:off x="4754879" y="1977417"/>
             <a:ext cx="3474721" cy="850901"/>
           </a:xfrm>
           <a:prstGeom prst="rect">
@@ -4650,7 +4676,7 @@
             <a:lvl1pPr algn="ctr">
               <a:defRPr sz="5600">
                 <a:solidFill>
-                  <a:srgbClr val="142B47"/>
+                  <a:srgbClr val="B3DDFF"/>
                 </a:solidFill>
                 <a:latin typeface="SF Pro Bold"/>
                 <a:ea typeface="SF Pro Bold"/>
@@ -4669,14 +4695,14 @@
       </p:sp>
       <p:sp>
         <p:nvSpPr>
-          <p:cNvPr id="149" name="Text 5"/>
+          <p:cNvPr id="140" name="Text 5"/>
           <p:cNvSpPr txBox="1"/>
           <p:nvPr/>
         </p:nvSpPr>
         <p:spPr>
           <a:xfrm>
-            <a:off x="4754879" y="2944495"/>
-            <a:ext cx="3474721" cy="241301"/>
+            <a:off x="4943040" y="2875472"/>
+            <a:ext cx="3098399" cy="736601"/>
           </a:xfrm>
           <a:prstGeom prst="rect">
             <a:avLst/>
@@ -4696,9 +4722,9 @@
           </a:bodyPr>
           <a:lstStyle>
             <a:lvl1pPr algn="ctr">
-              <a:defRPr sz="1600">
+              <a:defRPr sz="2400">
                 <a:solidFill>
-                  <a:srgbClr val="1B3A60"/>
+                  <a:srgbClr val="C24F80"/>
                 </a:solidFill>
                 <a:latin typeface="SF Pro Regular"/>
                 <a:ea typeface="SF Pro Regular"/>
@@ -4717,14 +4743,14 @@
       </p:sp>
       <p:sp>
         <p:nvSpPr>
-          <p:cNvPr id="150" name="Text 6"/>
+          <p:cNvPr id="141" name="Text 6"/>
           <p:cNvSpPr txBox="1"/>
           <p:nvPr/>
         </p:nvSpPr>
         <p:spPr>
           <a:xfrm>
-            <a:off x="457200" y="3980179"/>
-            <a:ext cx="8229600" cy="406401"/>
+            <a:off x="457199" y="4231694"/>
+            <a:ext cx="8229601" cy="406401"/>
           </a:xfrm>
           <a:prstGeom prst="rect">
             <a:avLst/>
@@ -4798,14 +4824,14 @@
       </p:grpSpPr>
       <p:sp>
         <p:nvSpPr>
-          <p:cNvPr id="152" name="Text 0"/>
+          <p:cNvPr id="143" name="Text 0"/>
           <p:cNvSpPr txBox="1"/>
           <p:nvPr/>
         </p:nvSpPr>
         <p:spPr>
           <a:xfrm>
-            <a:off x="457200" y="1016588"/>
-            <a:ext cx="8229600" cy="609601"/>
+            <a:off x="457200" y="618285"/>
+            <a:ext cx="8229601" cy="609601"/>
           </a:xfrm>
           <a:prstGeom prst="rect">
             <a:avLst/>
@@ -4846,18 +4872,18 @@
       </p:sp>
       <p:sp>
         <p:nvSpPr>
-          <p:cNvPr id="153" name="Shape 1"/>
+          <p:cNvPr id="144" name="Shape 1"/>
           <p:cNvSpPr/>
           <p:nvPr/>
         </p:nvSpPr>
         <p:spPr>
           <a:xfrm>
-            <a:off x="1371600" y="1840230"/>
-            <a:ext cx="6400800" cy="1463041"/>
+            <a:off x="1371599" y="1471526"/>
+            <a:ext cx="6400801" cy="2886793"/>
           </a:xfrm>
           <a:prstGeom prst="roundRect">
             <a:avLst>
-              <a:gd name="adj" fmla="val 5000"/>
+              <a:gd name="adj" fmla="val 2534"/>
             </a:avLst>
           </a:prstGeom>
           <a:solidFill>
@@ -4870,23 +4896,30 @@
           </a:ln>
         </p:spPr>
         <p:txBody>
-          <a:bodyPr lIns="45719" rIns="45719"/>
+          <a:bodyPr lIns="45718" tIns="45718" rIns="45718" bIns="45718"/>
           <a:lstStyle/>
           <a:p>
-            <a:pPr/>
-          </a:p>
-        </p:txBody>
-      </p:sp>
-      <p:sp>
-        <p:nvSpPr>
-          <p:cNvPr id="154" name="Text 2"/>
+            <a:pPr>
+              <a:defRPr>
+                <a:latin typeface="+mj-lt"/>
+                <a:ea typeface="+mj-ea"/>
+                <a:cs typeface="+mj-cs"/>
+                <a:sym typeface="Calibri"/>
+              </a:defRPr>
+            </a:pPr>
+          </a:p>
+        </p:txBody>
+      </p:sp>
+      <p:sp>
+        <p:nvSpPr>
+          <p:cNvPr id="145" name="Text 2"/>
           <p:cNvSpPr txBox="1"/>
           <p:nvPr/>
         </p:nvSpPr>
         <p:spPr>
           <a:xfrm>
-            <a:off x="1554479" y="1949958"/>
-            <a:ext cx="6035042" cy="1066801"/>
+            <a:off x="1554478" y="1695722"/>
+            <a:ext cx="6035043" cy="2438401"/>
           </a:xfrm>
           <a:prstGeom prst="rect">
             <a:avLst/>
@@ -4907,7 +4940,7 @@
           <a:lstStyle/>
           <a:p>
             <a:pPr>
-              <a:defRPr sz="1200">
+              <a:defRPr sz="2000">
                 <a:solidFill>
                   <a:srgbClr val="E6F1FA"/>
                 </a:solidFill>
@@ -4923,7 +4956,7 @@
           </a:p>
           <a:p>
             <a:pPr>
-              <a:defRPr sz="1200">
+              <a:defRPr sz="2000">
                 <a:solidFill>
                   <a:srgbClr val="E6F1FA"/>
                 </a:solidFill>
@@ -4939,7 +4972,7 @@
           </a:p>
           <a:p>
             <a:pPr>
-              <a:defRPr sz="1200">
+              <a:defRPr sz="2000">
                 <a:solidFill>
                   <a:srgbClr val="E6F1FA"/>
                 </a:solidFill>
@@ -4955,7 +4988,7 @@
           </a:p>
           <a:p>
             <a:pPr>
-              <a:defRPr sz="1200">
+              <a:defRPr sz="2000">
                 <a:solidFill>
                   <a:srgbClr val="E6F1FA"/>
                 </a:solidFill>
@@ -4971,7 +5004,7 @@
           </a:p>
           <a:p>
             <a:pPr>
-              <a:defRPr sz="1200">
+              <a:defRPr sz="2000">
                 <a:solidFill>
                   <a:srgbClr val="E6F1FA"/>
                 </a:solidFill>
@@ -4987,7 +5020,7 @@
           </a:p>
           <a:p>
             <a:pPr>
-              <a:defRPr sz="1200">
+              <a:defRPr sz="2000">
                 <a:solidFill>
                   <a:srgbClr val="E6F1FA"/>
                 </a:solidFill>
@@ -5038,14 +5071,14 @@
       </p:grpSpPr>
       <p:sp>
         <p:nvSpPr>
-          <p:cNvPr id="156" name="Text 0"/>
+          <p:cNvPr id="147" name="Text 0"/>
           <p:cNvSpPr txBox="1"/>
           <p:nvPr/>
         </p:nvSpPr>
         <p:spPr>
           <a:xfrm>
-            <a:off x="457200" y="381000"/>
-            <a:ext cx="8229600" cy="609601"/>
+            <a:off x="457200" y="541876"/>
+            <a:ext cx="8229601" cy="609601"/>
           </a:xfrm>
           <a:prstGeom prst="rect">
             <a:avLst/>
@@ -5086,14 +5119,14 @@
       </p:sp>
       <p:sp>
         <p:nvSpPr>
-          <p:cNvPr id="157" name="Shape 1"/>
+          <p:cNvPr id="148" name="Shape 1"/>
           <p:cNvSpPr/>
           <p:nvPr/>
         </p:nvSpPr>
         <p:spPr>
           <a:xfrm>
-            <a:off x="731519" y="1325880"/>
-            <a:ext cx="2377441" cy="1234440"/>
+            <a:off x="731520" y="1554447"/>
+            <a:ext cx="2377441" cy="1234441"/>
           </a:xfrm>
           <a:prstGeom prst="roundRect">
             <a:avLst>
@@ -5110,23 +5143,30 @@
           </a:ln>
         </p:spPr>
         <p:txBody>
-          <a:bodyPr lIns="45719" rIns="45719"/>
+          <a:bodyPr lIns="45718" tIns="45718" rIns="45718" bIns="45718"/>
           <a:lstStyle/>
           <a:p>
-            <a:pPr/>
-          </a:p>
-        </p:txBody>
-      </p:sp>
-      <p:sp>
-        <p:nvSpPr>
-          <p:cNvPr id="158" name="Text 2"/>
+            <a:pPr>
+              <a:defRPr>
+                <a:latin typeface="+mj-lt"/>
+                <a:ea typeface="+mj-ea"/>
+                <a:cs typeface="+mj-cs"/>
+                <a:sym typeface="Calibri"/>
+              </a:defRPr>
+            </a:pPr>
+          </a:p>
+        </p:txBody>
+      </p:sp>
+      <p:sp>
+        <p:nvSpPr>
+          <p:cNvPr id="149" name="Text 2"/>
           <p:cNvSpPr txBox="1"/>
           <p:nvPr/>
         </p:nvSpPr>
         <p:spPr>
           <a:xfrm>
-            <a:off x="822960" y="1686305"/>
-            <a:ext cx="2194561" cy="304801"/>
+            <a:off x="822960" y="1648300"/>
+            <a:ext cx="2194562" cy="444501"/>
           </a:xfrm>
           <a:prstGeom prst="rect">
             <a:avLst/>
@@ -5146,7 +5186,7 @@
           </a:bodyPr>
           <a:lstStyle>
             <a:lvl1pPr algn="ctr">
-              <a:defRPr sz="2000">
+              <a:defRPr sz="2900">
                 <a:solidFill>
                   <a:srgbClr val="FFFFFF"/>
                 </a:solidFill>
@@ -5167,14 +5207,14 @@
       </p:sp>
       <p:sp>
         <p:nvSpPr>
-          <p:cNvPr id="159" name="Text 3"/>
+          <p:cNvPr id="150" name="Text 3"/>
           <p:cNvSpPr txBox="1"/>
           <p:nvPr/>
         </p:nvSpPr>
         <p:spPr>
           <a:xfrm>
-            <a:off x="822960" y="2004822"/>
-            <a:ext cx="2194561" cy="381001"/>
+            <a:off x="822960" y="2106516"/>
+            <a:ext cx="2194562" cy="508001"/>
           </a:xfrm>
           <a:prstGeom prst="rect">
             <a:avLst/>
@@ -5194,7 +5234,7 @@
           </a:bodyPr>
           <a:lstStyle>
             <a:lvl1pPr algn="ctr">
-              <a:defRPr sz="1300">
+              <a:defRPr sz="1700">
                 <a:solidFill>
                   <a:srgbClr val="B9D3EE"/>
                 </a:solidFill>
@@ -5215,14 +5255,14 @@
       </p:sp>
       <p:sp>
         <p:nvSpPr>
-          <p:cNvPr id="160" name="Shape 4"/>
+          <p:cNvPr id="151" name="Shape 4"/>
           <p:cNvSpPr/>
           <p:nvPr/>
         </p:nvSpPr>
         <p:spPr>
           <a:xfrm>
-            <a:off x="3383279" y="1325880"/>
-            <a:ext cx="2377441" cy="1234440"/>
+            <a:off x="3383279" y="1554447"/>
+            <a:ext cx="2377442" cy="1234441"/>
           </a:xfrm>
           <a:prstGeom prst="roundRect">
             <a:avLst>
@@ -5239,23 +5279,30 @@
           </a:ln>
         </p:spPr>
         <p:txBody>
-          <a:bodyPr lIns="45719" rIns="45719"/>
+          <a:bodyPr lIns="45718" tIns="45718" rIns="45718" bIns="45718"/>
           <a:lstStyle/>
           <a:p>
-            <a:pPr/>
-          </a:p>
-        </p:txBody>
-      </p:sp>
-      <p:sp>
-        <p:nvSpPr>
-          <p:cNvPr id="161" name="Text 5"/>
+            <a:pPr>
+              <a:defRPr>
+                <a:latin typeface="+mj-lt"/>
+                <a:ea typeface="+mj-ea"/>
+                <a:cs typeface="+mj-cs"/>
+                <a:sym typeface="Calibri"/>
+              </a:defRPr>
+            </a:pPr>
+          </a:p>
+        </p:txBody>
+      </p:sp>
+      <p:sp>
+        <p:nvSpPr>
+          <p:cNvPr id="152" name="Text 5"/>
           <p:cNvSpPr txBox="1"/>
           <p:nvPr/>
         </p:nvSpPr>
         <p:spPr>
           <a:xfrm>
-            <a:off x="3474720" y="1686305"/>
-            <a:ext cx="2194561" cy="304801"/>
+            <a:off x="3474720" y="1648300"/>
+            <a:ext cx="2194562" cy="444501"/>
           </a:xfrm>
           <a:prstGeom prst="rect">
             <a:avLst/>
@@ -5275,7 +5322,7 @@
           </a:bodyPr>
           <a:lstStyle>
             <a:lvl1pPr algn="ctr">
-              <a:defRPr sz="2000">
+              <a:defRPr sz="2900">
                 <a:solidFill>
                   <a:srgbClr val="FFFFFF"/>
                 </a:solidFill>
@@ -5296,14 +5343,14 @@
       </p:sp>
       <p:sp>
         <p:nvSpPr>
-          <p:cNvPr id="162" name="Text 6"/>
+          <p:cNvPr id="153" name="Text 6"/>
           <p:cNvSpPr txBox="1"/>
           <p:nvPr/>
         </p:nvSpPr>
         <p:spPr>
           <a:xfrm>
-            <a:off x="3474720" y="2004822"/>
-            <a:ext cx="2194561" cy="190501"/>
+            <a:off x="3474720" y="2106516"/>
+            <a:ext cx="2194562" cy="508001"/>
           </a:xfrm>
           <a:prstGeom prst="rect">
             <a:avLst/>
@@ -5323,7 +5370,7 @@
           </a:bodyPr>
           <a:lstStyle>
             <a:lvl1pPr algn="ctr">
-              <a:defRPr sz="1300">
+              <a:defRPr sz="1700">
                 <a:solidFill>
                   <a:srgbClr val="B9D3EE"/>
                 </a:solidFill>
@@ -5344,14 +5391,14 @@
       </p:sp>
       <p:sp>
         <p:nvSpPr>
-          <p:cNvPr id="163" name="Shape 7"/>
+          <p:cNvPr id="154" name="Shape 7"/>
           <p:cNvSpPr/>
           <p:nvPr/>
         </p:nvSpPr>
         <p:spPr>
           <a:xfrm>
-            <a:off x="6035040" y="1325880"/>
-            <a:ext cx="2377441" cy="1234440"/>
+            <a:off x="6035040" y="1554447"/>
+            <a:ext cx="2377442" cy="1234441"/>
           </a:xfrm>
           <a:prstGeom prst="roundRect">
             <a:avLst>
@@ -5368,23 +5415,30 @@
           </a:ln>
         </p:spPr>
         <p:txBody>
-          <a:bodyPr lIns="45719" rIns="45719"/>
+          <a:bodyPr lIns="45718" tIns="45718" rIns="45718" bIns="45718"/>
           <a:lstStyle/>
           <a:p>
-            <a:pPr/>
-          </a:p>
-        </p:txBody>
-      </p:sp>
-      <p:sp>
-        <p:nvSpPr>
-          <p:cNvPr id="164" name="Text 8"/>
+            <a:pPr>
+              <a:defRPr>
+                <a:latin typeface="+mj-lt"/>
+                <a:ea typeface="+mj-ea"/>
+                <a:cs typeface="+mj-cs"/>
+                <a:sym typeface="Calibri"/>
+              </a:defRPr>
+            </a:pPr>
+          </a:p>
+        </p:txBody>
+      </p:sp>
+      <p:sp>
+        <p:nvSpPr>
+          <p:cNvPr id="155" name="Text 8"/>
           <p:cNvSpPr txBox="1"/>
           <p:nvPr/>
         </p:nvSpPr>
         <p:spPr>
           <a:xfrm>
-            <a:off x="6126479" y="1686305"/>
-            <a:ext cx="2194561" cy="304801"/>
+            <a:off x="6126479" y="1648300"/>
+            <a:ext cx="2194562" cy="444501"/>
           </a:xfrm>
           <a:prstGeom prst="rect">
             <a:avLst/>
@@ -5404,7 +5458,7 @@
           </a:bodyPr>
           <a:lstStyle>
             <a:lvl1pPr algn="ctr">
-              <a:defRPr sz="2000">
+              <a:defRPr sz="2900">
                 <a:solidFill>
                   <a:srgbClr val="FFFFFF"/>
                 </a:solidFill>
@@ -5425,14 +5479,14 @@
       </p:sp>
       <p:sp>
         <p:nvSpPr>
-          <p:cNvPr id="165" name="Text 9"/>
+          <p:cNvPr id="156" name="Text 9"/>
           <p:cNvSpPr txBox="1"/>
           <p:nvPr/>
         </p:nvSpPr>
         <p:spPr>
           <a:xfrm>
-            <a:off x="6126479" y="2004822"/>
-            <a:ext cx="2194561" cy="381001"/>
+            <a:off x="6126479" y="2106516"/>
+            <a:ext cx="2194562" cy="508001"/>
           </a:xfrm>
           <a:prstGeom prst="rect">
             <a:avLst/>
@@ -5452,7 +5506,7 @@
           </a:bodyPr>
           <a:lstStyle>
             <a:lvl1pPr algn="ctr">
-              <a:defRPr sz="1300">
+              <a:defRPr sz="1700">
                 <a:solidFill>
                   <a:srgbClr val="B9D3EE"/>
                 </a:solidFill>
@@ -5473,14 +5527,14 @@
       </p:sp>
       <p:sp>
         <p:nvSpPr>
-          <p:cNvPr id="166" name="Shape 10"/>
+          <p:cNvPr id="157" name="Shape 10"/>
           <p:cNvSpPr/>
           <p:nvPr/>
         </p:nvSpPr>
         <p:spPr>
           <a:xfrm>
-            <a:off x="731519" y="2788920"/>
-            <a:ext cx="2377441" cy="1234441"/>
+            <a:off x="731520" y="2992308"/>
+            <a:ext cx="2377441" cy="1234442"/>
           </a:xfrm>
           <a:prstGeom prst="roundRect">
             <a:avLst>
@@ -5497,23 +5551,30 @@
           </a:ln>
         </p:spPr>
         <p:txBody>
-          <a:bodyPr lIns="45719" rIns="45719"/>
+          <a:bodyPr lIns="45718" tIns="45718" rIns="45718" bIns="45718"/>
           <a:lstStyle/>
           <a:p>
-            <a:pPr/>
-          </a:p>
-        </p:txBody>
-      </p:sp>
-      <p:sp>
-        <p:nvSpPr>
-          <p:cNvPr id="167" name="Text 11"/>
+            <a:pPr>
+              <a:defRPr>
+                <a:latin typeface="+mj-lt"/>
+                <a:ea typeface="+mj-ea"/>
+                <a:cs typeface="+mj-cs"/>
+                <a:sym typeface="Calibri"/>
+              </a:defRPr>
+            </a:pPr>
+          </a:p>
+        </p:txBody>
+      </p:sp>
+      <p:sp>
+        <p:nvSpPr>
+          <p:cNvPr id="158" name="Text 11"/>
           <p:cNvSpPr txBox="1"/>
           <p:nvPr/>
         </p:nvSpPr>
         <p:spPr>
           <a:xfrm>
-            <a:off x="822960" y="3149346"/>
-            <a:ext cx="2194561" cy="304801"/>
+            <a:off x="822960" y="3111341"/>
+            <a:ext cx="2194562" cy="444501"/>
           </a:xfrm>
           <a:prstGeom prst="rect">
             <a:avLst/>
@@ -5533,7 +5594,7 @@
           </a:bodyPr>
           <a:lstStyle>
             <a:lvl1pPr algn="ctr">
-              <a:defRPr sz="2000">
+              <a:defRPr sz="2900">
                 <a:solidFill>
                   <a:srgbClr val="FFFFFF"/>
                 </a:solidFill>
@@ -5554,14 +5615,14 @@
       </p:sp>
       <p:sp>
         <p:nvSpPr>
-          <p:cNvPr id="168" name="Text 12"/>
+          <p:cNvPr id="159" name="Text 12"/>
           <p:cNvSpPr txBox="1"/>
           <p:nvPr/>
         </p:nvSpPr>
         <p:spPr>
           <a:xfrm>
-            <a:off x="822960" y="3467861"/>
-            <a:ext cx="2194561" cy="381001"/>
+            <a:off x="774065" y="3569554"/>
+            <a:ext cx="2292351" cy="508001"/>
           </a:xfrm>
           <a:prstGeom prst="rect">
             <a:avLst/>
@@ -5581,7 +5642,7 @@
           </a:bodyPr>
           <a:lstStyle>
             <a:lvl1pPr algn="ctr">
-              <a:defRPr sz="1300">
+              <a:defRPr sz="1700">
                 <a:solidFill>
                   <a:srgbClr val="B9D3EE"/>
                 </a:solidFill>
@@ -5602,14 +5663,14 @@
       </p:sp>
       <p:sp>
         <p:nvSpPr>
-          <p:cNvPr id="169" name="Shape 13"/>
+          <p:cNvPr id="160" name="Shape 13"/>
           <p:cNvSpPr/>
           <p:nvPr/>
         </p:nvSpPr>
         <p:spPr>
           <a:xfrm>
-            <a:off x="3383279" y="2788920"/>
-            <a:ext cx="2377441" cy="1234441"/>
+            <a:off x="3383279" y="2992308"/>
+            <a:ext cx="2377442" cy="1234442"/>
           </a:xfrm>
           <a:prstGeom prst="roundRect">
             <a:avLst>
@@ -5626,23 +5687,30 @@
           </a:ln>
         </p:spPr>
         <p:txBody>
-          <a:bodyPr lIns="45719" rIns="45719"/>
+          <a:bodyPr lIns="45718" tIns="45718" rIns="45718" bIns="45718"/>
           <a:lstStyle/>
           <a:p>
-            <a:pPr/>
-          </a:p>
-        </p:txBody>
-      </p:sp>
-      <p:sp>
-        <p:nvSpPr>
-          <p:cNvPr id="170" name="Text 14"/>
+            <a:pPr>
+              <a:defRPr>
+                <a:latin typeface="+mj-lt"/>
+                <a:ea typeface="+mj-ea"/>
+                <a:cs typeface="+mj-cs"/>
+                <a:sym typeface="Calibri"/>
+              </a:defRPr>
+            </a:pPr>
+          </a:p>
+        </p:txBody>
+      </p:sp>
+      <p:sp>
+        <p:nvSpPr>
+          <p:cNvPr id="161" name="Text 14"/>
           <p:cNvSpPr txBox="1"/>
           <p:nvPr/>
         </p:nvSpPr>
         <p:spPr>
           <a:xfrm>
-            <a:off x="3474720" y="3149346"/>
-            <a:ext cx="2194561" cy="304801"/>
+            <a:off x="3474720" y="3111341"/>
+            <a:ext cx="2194562" cy="444501"/>
           </a:xfrm>
           <a:prstGeom prst="rect">
             <a:avLst/>
@@ -5662,7 +5730,7 @@
           </a:bodyPr>
           <a:lstStyle>
             <a:lvl1pPr algn="ctr">
-              <a:defRPr sz="2000">
+              <a:defRPr sz="2900">
                 <a:solidFill>
                   <a:srgbClr val="FFFFFF"/>
                 </a:solidFill>
@@ -5683,14 +5751,14 @@
       </p:sp>
       <p:sp>
         <p:nvSpPr>
-          <p:cNvPr id="171" name="Text 15"/>
+          <p:cNvPr id="162" name="Text 15"/>
           <p:cNvSpPr txBox="1"/>
           <p:nvPr/>
         </p:nvSpPr>
         <p:spPr>
           <a:xfrm>
-            <a:off x="3474720" y="3467861"/>
-            <a:ext cx="2194561" cy="381001"/>
+            <a:off x="3474720" y="3569554"/>
+            <a:ext cx="2194562" cy="508001"/>
           </a:xfrm>
           <a:prstGeom prst="rect">
             <a:avLst/>
@@ -5710,7 +5778,7 @@
           </a:bodyPr>
           <a:lstStyle>
             <a:lvl1pPr algn="ctr">
-              <a:defRPr sz="1300">
+              <a:defRPr sz="1700">
                 <a:solidFill>
                   <a:srgbClr val="B9D3EE"/>
                 </a:solidFill>
@@ -5731,14 +5799,14 @@
       </p:sp>
       <p:sp>
         <p:nvSpPr>
-          <p:cNvPr id="172" name="Shape 16"/>
+          <p:cNvPr id="163" name="Shape 16"/>
           <p:cNvSpPr/>
           <p:nvPr/>
         </p:nvSpPr>
         <p:spPr>
           <a:xfrm>
-            <a:off x="6035040" y="2788920"/>
-            <a:ext cx="2377441" cy="1234441"/>
+            <a:off x="6035039" y="2992308"/>
+            <a:ext cx="2377442" cy="1234442"/>
           </a:xfrm>
           <a:prstGeom prst="roundRect">
             <a:avLst>
@@ -5755,23 +5823,30 @@
           </a:ln>
         </p:spPr>
         <p:txBody>
-          <a:bodyPr lIns="45719" rIns="45719"/>
+          <a:bodyPr lIns="45718" tIns="45718" rIns="45718" bIns="45718"/>
           <a:lstStyle/>
           <a:p>
-            <a:pPr/>
-          </a:p>
-        </p:txBody>
-      </p:sp>
-      <p:sp>
-        <p:nvSpPr>
-          <p:cNvPr id="173" name="Text 17"/>
+            <a:pPr>
+              <a:defRPr>
+                <a:latin typeface="+mj-lt"/>
+                <a:ea typeface="+mj-ea"/>
+                <a:cs typeface="+mj-cs"/>
+                <a:sym typeface="Calibri"/>
+              </a:defRPr>
+            </a:pPr>
+          </a:p>
+        </p:txBody>
+      </p:sp>
+      <p:sp>
+        <p:nvSpPr>
+          <p:cNvPr id="164" name="Text 17"/>
           <p:cNvSpPr txBox="1"/>
           <p:nvPr/>
         </p:nvSpPr>
         <p:spPr>
           <a:xfrm>
-            <a:off x="6126479" y="3149346"/>
-            <a:ext cx="2194561" cy="304801"/>
+            <a:off x="6126479" y="3111341"/>
+            <a:ext cx="2194562" cy="444501"/>
           </a:xfrm>
           <a:prstGeom prst="rect">
             <a:avLst/>
@@ -5791,7 +5866,7 @@
           </a:bodyPr>
           <a:lstStyle>
             <a:lvl1pPr algn="ctr">
-              <a:defRPr sz="2000">
+              <a:defRPr sz="2900">
                 <a:solidFill>
                   <a:srgbClr val="FFFFFF"/>
                 </a:solidFill>
@@ -5812,14 +5887,14 @@
       </p:sp>
       <p:sp>
         <p:nvSpPr>
-          <p:cNvPr id="174" name="Text 18"/>
+          <p:cNvPr id="165" name="Text 18"/>
           <p:cNvSpPr txBox="1"/>
           <p:nvPr/>
         </p:nvSpPr>
         <p:spPr>
           <a:xfrm>
-            <a:off x="6126479" y="3467861"/>
-            <a:ext cx="2194561" cy="381001"/>
+            <a:off x="6126479" y="3569554"/>
+            <a:ext cx="2194562" cy="508001"/>
           </a:xfrm>
           <a:prstGeom prst="rect">
             <a:avLst/>
@@ -5839,7 +5914,7 @@
           </a:bodyPr>
           <a:lstStyle>
             <a:lvl1pPr algn="ctr">
-              <a:defRPr sz="1300">
+              <a:defRPr sz="1700">
                 <a:solidFill>
                   <a:srgbClr val="B9D3EE"/>
                 </a:solidFill>
@@ -5893,7 +5968,7 @@
       </p:grpSpPr>
       <p:sp>
         <p:nvSpPr>
-          <p:cNvPr id="176" name="Text 1"/>
+          <p:cNvPr id="167" name="Text 1"/>
           <p:cNvSpPr txBox="1"/>
           <p:nvPr/>
         </p:nvSpPr>
@@ -5974,7 +6049,7 @@
       </p:grpSpPr>
       <p:sp>
         <p:nvSpPr>
-          <p:cNvPr id="178" name="Text 0"/>
+          <p:cNvPr id="169" name="Text 0"/>
           <p:cNvSpPr txBox="1"/>
           <p:nvPr/>
         </p:nvSpPr>
@@ -6022,13 +6097,13 @@
       </p:sp>
       <p:sp>
         <p:nvSpPr>
-          <p:cNvPr id="179" name="Text 1"/>
+          <p:cNvPr id="170" name="Text 1"/>
           <p:cNvSpPr txBox="1"/>
           <p:nvPr/>
         </p:nvSpPr>
         <p:spPr>
           <a:xfrm>
-            <a:off x="457200" y="1071535"/>
+            <a:off x="457200" y="1071534"/>
             <a:ext cx="8229600" cy="266701"/>
           </a:xfrm>
           <a:prstGeom prst="rect">
@@ -6070,14 +6145,14 @@
       </p:sp>
       <p:sp>
         <p:nvSpPr>
-          <p:cNvPr id="180" name="Shape 2"/>
+          <p:cNvPr id="171" name="Shape 2"/>
           <p:cNvSpPr/>
           <p:nvPr/>
         </p:nvSpPr>
         <p:spPr>
           <a:xfrm>
-            <a:off x="731519" y="1554480"/>
-            <a:ext cx="2377441" cy="1920240"/>
+            <a:off x="731520" y="1718772"/>
+            <a:ext cx="2377442" cy="1920241"/>
           </a:xfrm>
           <a:prstGeom prst="roundRect">
             <a:avLst>
@@ -6094,23 +6169,30 @@
           </a:ln>
         </p:spPr>
         <p:txBody>
-          <a:bodyPr lIns="45719" rIns="45719"/>
+          <a:bodyPr lIns="45718" tIns="45718" rIns="45718" bIns="45718"/>
           <a:lstStyle/>
           <a:p>
-            <a:pPr/>
-          </a:p>
-        </p:txBody>
-      </p:sp>
-      <p:sp>
-        <p:nvSpPr>
-          <p:cNvPr id="181" name="Text 3"/>
+            <a:pPr>
+              <a:defRPr>
+                <a:latin typeface="+mj-lt"/>
+                <a:ea typeface="+mj-ea"/>
+                <a:cs typeface="+mj-cs"/>
+                <a:sym typeface="Calibri"/>
+              </a:defRPr>
+            </a:pPr>
+          </a:p>
+        </p:txBody>
+      </p:sp>
+      <p:sp>
+        <p:nvSpPr>
+          <p:cNvPr id="172" name="Text 3"/>
           <p:cNvSpPr txBox="1"/>
           <p:nvPr/>
         </p:nvSpPr>
         <p:spPr>
           <a:xfrm>
-            <a:off x="822960" y="2223515"/>
-            <a:ext cx="2194561" cy="304801"/>
+            <a:off x="822960" y="2134616"/>
+            <a:ext cx="2194562" cy="393701"/>
           </a:xfrm>
           <a:prstGeom prst="rect">
             <a:avLst/>
@@ -6130,7 +6212,7 @@
           </a:bodyPr>
           <a:lstStyle>
             <a:lvl1pPr algn="ctr">
-              <a:defRPr sz="2000">
+              <a:defRPr sz="2600">
                 <a:solidFill>
                   <a:srgbClr val="FFFFFF"/>
                 </a:solidFill>
@@ -6151,14 +6233,14 @@
       </p:sp>
       <p:sp>
         <p:nvSpPr>
-          <p:cNvPr id="182" name="Text 4"/>
+          <p:cNvPr id="173" name="Text 4"/>
           <p:cNvSpPr txBox="1"/>
           <p:nvPr/>
         </p:nvSpPr>
         <p:spPr>
           <a:xfrm>
-            <a:off x="822960" y="2610611"/>
-            <a:ext cx="2194561" cy="381001"/>
+            <a:off x="822960" y="2610610"/>
+            <a:ext cx="2194562" cy="800101"/>
           </a:xfrm>
           <a:prstGeom prst="rect">
             <a:avLst/>
@@ -6178,7 +6260,7 @@
           </a:bodyPr>
           <a:lstStyle>
             <a:lvl1pPr algn="ctr">
-              <a:defRPr sz="1300">
+              <a:defRPr>
                 <a:solidFill>
                   <a:srgbClr val="B9D3EE"/>
                 </a:solidFill>
@@ -6199,14 +6281,14 @@
       </p:sp>
       <p:sp>
         <p:nvSpPr>
-          <p:cNvPr id="183" name="Shape 5"/>
+          <p:cNvPr id="174" name="Shape 5"/>
           <p:cNvSpPr/>
           <p:nvPr/>
         </p:nvSpPr>
         <p:spPr>
           <a:xfrm>
-            <a:off x="3383279" y="1554480"/>
-            <a:ext cx="2377441" cy="1920240"/>
+            <a:off x="3383279" y="1718772"/>
+            <a:ext cx="2377442" cy="1920241"/>
           </a:xfrm>
           <a:prstGeom prst="roundRect">
             <a:avLst>
@@ -6223,23 +6305,30 @@
           </a:ln>
         </p:spPr>
         <p:txBody>
-          <a:bodyPr lIns="45719" rIns="45719"/>
+          <a:bodyPr lIns="45718" tIns="45718" rIns="45718" bIns="45718"/>
           <a:lstStyle/>
           <a:p>
-            <a:pPr/>
-          </a:p>
-        </p:txBody>
-      </p:sp>
-      <p:sp>
-        <p:nvSpPr>
-          <p:cNvPr id="184" name="Text 6"/>
+            <a:pPr>
+              <a:defRPr>
+                <a:latin typeface="+mj-lt"/>
+                <a:ea typeface="+mj-ea"/>
+                <a:cs typeface="+mj-cs"/>
+                <a:sym typeface="Calibri"/>
+              </a:defRPr>
+            </a:pPr>
+          </a:p>
+        </p:txBody>
+      </p:sp>
+      <p:sp>
+        <p:nvSpPr>
+          <p:cNvPr id="175" name="Text 6"/>
           <p:cNvSpPr txBox="1"/>
           <p:nvPr/>
         </p:nvSpPr>
         <p:spPr>
           <a:xfrm>
-            <a:off x="3474720" y="2223515"/>
-            <a:ext cx="2194561" cy="304801"/>
+            <a:off x="3474720" y="2134616"/>
+            <a:ext cx="2194562" cy="393701"/>
           </a:xfrm>
           <a:prstGeom prst="rect">
             <a:avLst/>
@@ -6259,7 +6348,7 @@
           </a:bodyPr>
           <a:lstStyle>
             <a:lvl1pPr algn="ctr">
-              <a:defRPr sz="2000">
+              <a:defRPr sz="2600">
                 <a:solidFill>
                   <a:srgbClr val="FFFFFF"/>
                 </a:solidFill>
@@ -6280,14 +6369,14 @@
       </p:sp>
       <p:sp>
         <p:nvSpPr>
-          <p:cNvPr id="185" name="Text 7"/>
+          <p:cNvPr id="176" name="Text 7"/>
           <p:cNvSpPr txBox="1"/>
           <p:nvPr/>
         </p:nvSpPr>
         <p:spPr>
           <a:xfrm>
-            <a:off x="3474720" y="2610611"/>
-            <a:ext cx="2194561" cy="571501"/>
+            <a:off x="3474720" y="2610610"/>
+            <a:ext cx="2194562" cy="800101"/>
           </a:xfrm>
           <a:prstGeom prst="rect">
             <a:avLst/>
@@ -6308,7 +6397,7 @@
           <a:lstStyle/>
           <a:p>
             <a:pPr algn="ctr">
-              <a:defRPr sz="1300">
+              <a:defRPr>
                 <a:solidFill>
                   <a:srgbClr val="B9D3EE"/>
                 </a:solidFill>
@@ -6324,7 +6413,7 @@
           </a:p>
           <a:p>
             <a:pPr algn="ctr">
-              <a:defRPr sz="1300">
+              <a:defRPr>
                 <a:solidFill>
                   <a:srgbClr val="B9D3EE"/>
                 </a:solidFill>
@@ -6342,14 +6431,14 @@
       </p:sp>
       <p:sp>
         <p:nvSpPr>
-          <p:cNvPr id="186" name="Shape 8"/>
+          <p:cNvPr id="177" name="Shape 8"/>
           <p:cNvSpPr/>
           <p:nvPr/>
         </p:nvSpPr>
         <p:spPr>
           <a:xfrm>
-            <a:off x="6035040" y="1554480"/>
-            <a:ext cx="2377441" cy="1920240"/>
+            <a:off x="6035038" y="1718772"/>
+            <a:ext cx="2377442" cy="1920241"/>
           </a:xfrm>
           <a:prstGeom prst="roundRect">
             <a:avLst>
@@ -6366,23 +6455,30 @@
           </a:ln>
         </p:spPr>
         <p:txBody>
-          <a:bodyPr lIns="45719" rIns="45719"/>
+          <a:bodyPr lIns="45718" tIns="45718" rIns="45718" bIns="45718"/>
           <a:lstStyle/>
           <a:p>
-            <a:pPr/>
-          </a:p>
-        </p:txBody>
-      </p:sp>
-      <p:sp>
-        <p:nvSpPr>
-          <p:cNvPr id="187" name="Text 9"/>
+            <a:pPr>
+              <a:defRPr>
+                <a:latin typeface="+mj-lt"/>
+                <a:ea typeface="+mj-ea"/>
+                <a:cs typeface="+mj-cs"/>
+                <a:sym typeface="Calibri"/>
+              </a:defRPr>
+            </a:pPr>
+          </a:p>
+        </p:txBody>
+      </p:sp>
+      <p:sp>
+        <p:nvSpPr>
+          <p:cNvPr id="178" name="Text 9"/>
           <p:cNvSpPr txBox="1"/>
           <p:nvPr/>
         </p:nvSpPr>
         <p:spPr>
           <a:xfrm>
-            <a:off x="6126479" y="2223515"/>
-            <a:ext cx="2194561" cy="304801"/>
+            <a:off x="6126479" y="2134616"/>
+            <a:ext cx="2194562" cy="393701"/>
           </a:xfrm>
           <a:prstGeom prst="rect">
             <a:avLst/>
@@ -6402,7 +6498,7 @@
           </a:bodyPr>
           <a:lstStyle>
             <a:lvl1pPr algn="ctr">
-              <a:defRPr sz="2000">
+              <a:defRPr sz="2600">
                 <a:solidFill>
                   <a:srgbClr val="FFFFFF"/>
                 </a:solidFill>
@@ -6423,14 +6519,14 @@
       </p:sp>
       <p:sp>
         <p:nvSpPr>
-          <p:cNvPr id="188" name="Text 10"/>
+          <p:cNvPr id="179" name="Text 10"/>
           <p:cNvSpPr txBox="1"/>
           <p:nvPr/>
         </p:nvSpPr>
         <p:spPr>
           <a:xfrm>
-            <a:off x="6126479" y="2610611"/>
-            <a:ext cx="2194561" cy="571501"/>
+            <a:off x="6126479" y="2610610"/>
+            <a:ext cx="2194562" cy="800101"/>
           </a:xfrm>
           <a:prstGeom prst="rect">
             <a:avLst/>
@@ -6451,7 +6547,7 @@
           <a:lstStyle/>
           <a:p>
             <a:pPr algn="ctr">
-              <a:defRPr sz="1300">
+              <a:defRPr>
                 <a:solidFill>
                   <a:srgbClr val="B9D3EE"/>
                 </a:solidFill>
@@ -6462,12 +6558,12 @@
               </a:defRPr>
             </a:pPr>
             <a:r>
-              <a:t>BERTimbau (português)</a:t>
+              <a:t>BERTimbau</a:t>
             </a:r>
           </a:p>
           <a:p>
             <a:pPr algn="ctr">
-              <a:defRPr sz="1300">
+              <a:defRPr>
                 <a:solidFill>
                   <a:srgbClr val="B9D3EE"/>
                 </a:solidFill>
@@ -6485,13 +6581,13 @@
       </p:sp>
       <p:sp>
         <p:nvSpPr>
-          <p:cNvPr id="189" name="Text 11"/>
+          <p:cNvPr id="180" name="Text 11"/>
           <p:cNvSpPr txBox="1"/>
           <p:nvPr/>
         </p:nvSpPr>
         <p:spPr>
           <a:xfrm>
-            <a:off x="457200" y="4019549"/>
+            <a:off x="457200" y="4019548"/>
             <a:ext cx="8229600" cy="190501"/>
           </a:xfrm>
           <a:prstGeom prst="rect">
@@ -6566,7 +6662,7 @@
       </p:grpSpPr>
       <p:sp>
         <p:nvSpPr>
-          <p:cNvPr id="191" name="Text 0"/>
+          <p:cNvPr id="182" name="Text 0"/>
           <p:cNvSpPr txBox="1"/>
           <p:nvPr/>
         </p:nvSpPr>
@@ -6614,13 +6710,13 @@
       </p:sp>
       <p:graphicFrame>
         <p:nvGraphicFramePr>
-          <p:cNvPr id="192" name="Table 0"/>
+          <p:cNvPr id="183" name="Table 0"/>
           <p:cNvGraphicFramePr/>
           <p:nvPr/>
         </p:nvGraphicFramePr>
         <p:xfrm>
-          <a:off x="731519" y="1519269"/>
-          <a:ext cx="7680961" cy="2633473"/>
+          <a:off x="731519" y="1519268"/>
+          <a:ext cx="7680961" cy="2633474"/>
         </p:xfrm>
         <a:graphic xmlns:a="http://schemas.openxmlformats.org/drawingml/2006/main">
           <a:graphicData uri="http://schemas.openxmlformats.org/drawingml/2006/table">
@@ -7554,8 +7650,8 @@
         </p:nvSpPr>
         <p:spPr>
           <a:xfrm>
-            <a:off x="914400" y="1369103"/>
-            <a:ext cx="7315200" cy="304801"/>
+            <a:off x="914400" y="1356403"/>
+            <a:ext cx="7315200" cy="330201"/>
           </a:xfrm>
           <a:prstGeom prst="rect">
             <a:avLst/>
@@ -7575,7 +7671,7 @@
           </a:bodyPr>
           <a:lstStyle>
             <a:lvl1pPr algn="ctr">
-              <a:defRPr i="1" sz="2000">
+              <a:defRPr i="1" sz="2200">
                 <a:solidFill>
                   <a:srgbClr val="C24F80"/>
                 </a:solidFill>
@@ -7602,7 +7698,7 @@
         </p:nvSpPr>
         <p:spPr>
           <a:xfrm>
-            <a:off x="565322" y="1773131"/>
+            <a:off x="565322" y="1773130"/>
             <a:ext cx="8013356" cy="2032001"/>
           </a:xfrm>
           <a:prstGeom prst="rect">
@@ -7754,7 +7850,7 @@
       </p:grpSpPr>
       <p:sp>
         <p:nvSpPr>
-          <p:cNvPr id="194" name="Text 0"/>
+          <p:cNvPr id="185" name="Text 0"/>
           <p:cNvSpPr txBox="1"/>
           <p:nvPr/>
         </p:nvSpPr>
@@ -7802,13 +7898,13 @@
       </p:sp>
       <p:sp>
         <p:nvSpPr>
-          <p:cNvPr id="195" name="Text 1"/>
+          <p:cNvPr id="186" name="Text 1"/>
           <p:cNvSpPr txBox="1"/>
           <p:nvPr/>
         </p:nvSpPr>
         <p:spPr>
           <a:xfrm>
-            <a:off x="457200" y="1480140"/>
+            <a:off x="457200" y="1480139"/>
             <a:ext cx="8229600" cy="241301"/>
           </a:xfrm>
           <a:prstGeom prst="rect">
@@ -7850,13 +7946,13 @@
       </p:sp>
       <p:graphicFrame>
         <p:nvGraphicFramePr>
-          <p:cNvPr id="196" name="Table 0"/>
+          <p:cNvPr id="187" name="Table 0"/>
           <p:cNvGraphicFramePr/>
           <p:nvPr/>
         </p:nvGraphicFramePr>
         <p:xfrm>
-          <a:off x="1188719" y="1897970"/>
-          <a:ext cx="6766561" cy="1828801"/>
+          <a:off x="921353" y="1906444"/>
+          <a:ext cx="7313994" cy="2364010"/>
         </p:xfrm>
         <a:graphic xmlns:a="http://schemas.openxmlformats.org/drawingml/2006/main">
           <a:graphicData uri="http://schemas.openxmlformats.org/drawingml/2006/table">
@@ -7865,12 +7961,12 @@
                 <a:tableStyleId>{4C3C2611-4C71-4FC5-86AE-919BDF0F9419}</a:tableStyleId>
               </a:tblPr>
               <a:tblGrid>
-                <a:gridCol w="2743200"/>
-                <a:gridCol w="1280160"/>
-                <a:gridCol w="1280160"/>
-                <a:gridCol w="1463040"/>
+                <a:gridCol w="2959983"/>
+                <a:gridCol w="1381325"/>
+                <a:gridCol w="1381325"/>
+                <a:gridCol w="1578657"/>
               </a:tblGrid>
-              <a:tr h="457200">
+              <a:tr h="587827">
                 <a:tc>
                   <a:txBody>
                     <a:bodyPr/>
@@ -8064,7 +8160,7 @@
                   </a:tcPr>
                 </a:tc>
               </a:tr>
-              <a:tr h="457200">
+              <a:tr h="587827">
                 <a:tc>
                   <a:txBody>
                     <a:bodyPr/>
@@ -8258,7 +8354,7 @@
                   </a:tcPr>
                 </a:tc>
               </a:tr>
-              <a:tr h="457200">
+              <a:tr h="587827">
                 <a:tc>
                   <a:txBody>
                     <a:bodyPr/>
@@ -8452,7 +8548,7 @@
                   </a:tcPr>
                 </a:tc>
               </a:tr>
-              <a:tr h="457200">
+              <a:tr h="587827">
                 <a:tc>
                   <a:txBody>
                     <a:bodyPr/>
@@ -8685,13 +8781,13 @@
       </p:grpSpPr>
       <p:sp>
         <p:nvSpPr>
-          <p:cNvPr id="198" name="Text 0"/>
+          <p:cNvPr id="189" name="Text 0"/>
           <p:cNvSpPr txBox="1"/>
           <p:nvPr/>
         </p:nvSpPr>
         <p:spPr>
           <a:xfrm>
-            <a:off x="457200" y="289560"/>
+            <a:off x="457200" y="289559"/>
             <a:ext cx="8229600" cy="609601"/>
           </a:xfrm>
           <a:prstGeom prst="rect">
@@ -8733,14 +8829,14 @@
       </p:sp>
       <p:sp>
         <p:nvSpPr>
-          <p:cNvPr id="199" name="Text 1"/>
+          <p:cNvPr id="190" name="Text 1"/>
           <p:cNvSpPr txBox="1"/>
           <p:nvPr/>
         </p:nvSpPr>
         <p:spPr>
           <a:xfrm>
-            <a:off x="731519" y="1036319"/>
-            <a:ext cx="3657601" cy="304801"/>
+            <a:off x="731518" y="1023619"/>
+            <a:ext cx="3657603" cy="330201"/>
           </a:xfrm>
           <a:prstGeom prst="rect">
             <a:avLst/>
@@ -8760,7 +8856,7 @@
           </a:bodyPr>
           <a:lstStyle>
             <a:lvl1pPr algn="ctr">
-              <a:defRPr sz="2000">
+              <a:defRPr sz="2200">
                 <a:solidFill>
                   <a:srgbClr val="C24F80"/>
                 </a:solidFill>
@@ -8781,14 +8877,14 @@
       </p:sp>
       <p:sp>
         <p:nvSpPr>
-          <p:cNvPr id="200" name="Text 2"/>
+          <p:cNvPr id="191" name="Text 2"/>
           <p:cNvSpPr txBox="1"/>
           <p:nvPr/>
         </p:nvSpPr>
         <p:spPr>
           <a:xfrm>
-            <a:off x="4754879" y="1036319"/>
-            <a:ext cx="3657601" cy="304801"/>
+            <a:off x="4754879" y="1023619"/>
+            <a:ext cx="3657602" cy="330201"/>
           </a:xfrm>
           <a:prstGeom prst="rect">
             <a:avLst/>
@@ -8808,7 +8904,7 @@
           </a:bodyPr>
           <a:lstStyle>
             <a:lvl1pPr algn="ctr">
-              <a:defRPr sz="2000">
+              <a:defRPr sz="2200">
                 <a:solidFill>
                   <a:srgbClr val="C24F80"/>
                 </a:solidFill>
@@ -8829,14 +8925,14 @@
       </p:sp>
       <p:sp>
         <p:nvSpPr>
-          <p:cNvPr id="201" name="Shape 3"/>
+          <p:cNvPr id="192" name="Shape 3"/>
           <p:cNvSpPr/>
           <p:nvPr/>
         </p:nvSpPr>
         <p:spPr>
           <a:xfrm>
-            <a:off x="731519" y="1463039"/>
-            <a:ext cx="3657601" cy="2926081"/>
+            <a:off x="731519" y="1463038"/>
+            <a:ext cx="3657602" cy="2926083"/>
           </a:xfrm>
           <a:prstGeom prst="roundRect">
             <a:avLst>
@@ -8851,23 +8947,30 @@
           </a:ln>
         </p:spPr>
         <p:txBody>
-          <a:bodyPr lIns="45719" rIns="45719"/>
+          <a:bodyPr lIns="45718" tIns="45718" rIns="45718" bIns="45718"/>
           <a:lstStyle/>
           <a:p>
-            <a:pPr/>
-          </a:p>
-        </p:txBody>
-      </p:sp>
-      <p:sp>
-        <p:nvSpPr>
-          <p:cNvPr id="202" name="Text 4"/>
+            <a:pPr>
+              <a:defRPr>
+                <a:latin typeface="+mj-lt"/>
+                <a:ea typeface="+mj-ea"/>
+                <a:cs typeface="+mj-cs"/>
+                <a:sym typeface="Calibri"/>
+              </a:defRPr>
+            </a:pPr>
+          </a:p>
+        </p:txBody>
+      </p:sp>
+      <p:sp>
+        <p:nvSpPr>
+          <p:cNvPr id="193" name="Text 4"/>
           <p:cNvSpPr txBox="1"/>
           <p:nvPr/>
         </p:nvSpPr>
         <p:spPr>
           <a:xfrm>
-            <a:off x="960119" y="1691639"/>
-            <a:ext cx="3200401" cy="1371601"/>
+            <a:off x="856157" y="1935479"/>
+            <a:ext cx="3408325" cy="1981201"/>
           </a:xfrm>
           <a:prstGeom prst="rect">
             <a:avLst/>
@@ -8887,13 +8990,11 @@
           </a:bodyPr>
           <a:lstStyle/>
           <a:p>
-            <a:pPr marL="400050" indent="-400050">
+            <a:pPr algn="ctr">
               <a:spcBef>
                 <a:spcPts val="600"/>
               </a:spcBef>
-              <a:buSzPct val="100000"/>
-              <a:buChar char="•"/>
-              <a:defRPr sz="1400">
+              <a:defRPr sz="2000">
                 <a:solidFill>
                   <a:srgbClr val="E6F1FA"/>
                 </a:solidFill>
@@ -8908,13 +9009,11 @@
             </a:r>
           </a:p>
           <a:p>
-            <a:pPr marL="400050" indent="-400050">
+            <a:pPr algn="ctr">
               <a:spcBef>
                 <a:spcPts val="600"/>
               </a:spcBef>
-              <a:buSzPct val="100000"/>
-              <a:buChar char="•"/>
-              <a:defRPr sz="1400">
+              <a:defRPr sz="2000">
                 <a:solidFill>
                   <a:srgbClr val="E6F1FA"/>
                 </a:solidFill>
@@ -8929,13 +9028,11 @@
             </a:r>
           </a:p>
           <a:p>
-            <a:pPr marL="400050" indent="-400050">
+            <a:pPr algn="ctr">
               <a:spcBef>
                 <a:spcPts val="600"/>
               </a:spcBef>
-              <a:buSzPct val="100000"/>
-              <a:buChar char="•"/>
-              <a:defRPr sz="1400">
+              <a:defRPr sz="2000">
                 <a:solidFill>
                   <a:srgbClr val="E6F1FA"/>
                 </a:solidFill>
@@ -8953,14 +9050,14 @@
       </p:sp>
       <p:sp>
         <p:nvSpPr>
-          <p:cNvPr id="203" name="Shape 5"/>
+          <p:cNvPr id="194" name="Shape 5"/>
           <p:cNvSpPr/>
           <p:nvPr/>
         </p:nvSpPr>
         <p:spPr>
           <a:xfrm>
-            <a:off x="4754879" y="1463039"/>
-            <a:ext cx="3657601" cy="2926081"/>
+            <a:off x="4754879" y="1463038"/>
+            <a:ext cx="3657602" cy="2926083"/>
           </a:xfrm>
           <a:prstGeom prst="roundRect">
             <a:avLst>
@@ -8975,23 +9072,30 @@
           </a:ln>
         </p:spPr>
         <p:txBody>
-          <a:bodyPr lIns="45719" rIns="45719"/>
+          <a:bodyPr lIns="45718" tIns="45718" rIns="45718" bIns="45718"/>
           <a:lstStyle/>
           <a:p>
-            <a:pPr/>
-          </a:p>
-        </p:txBody>
-      </p:sp>
-      <p:sp>
-        <p:nvSpPr>
-          <p:cNvPr id="204" name="Text 6"/>
+            <a:pPr>
+              <a:defRPr>
+                <a:latin typeface="+mj-lt"/>
+                <a:ea typeface="+mj-ea"/>
+                <a:cs typeface="+mj-cs"/>
+                <a:sym typeface="Calibri"/>
+              </a:defRPr>
+            </a:pPr>
+          </a:p>
+        </p:txBody>
+      </p:sp>
+      <p:sp>
+        <p:nvSpPr>
+          <p:cNvPr id="195" name="Text 6"/>
           <p:cNvSpPr txBox="1"/>
           <p:nvPr/>
         </p:nvSpPr>
         <p:spPr>
           <a:xfrm>
-            <a:off x="4983479" y="1691639"/>
-            <a:ext cx="3200401" cy="1854201"/>
+            <a:off x="4822463" y="1744979"/>
+            <a:ext cx="3522433" cy="2362201"/>
           </a:xfrm>
           <a:prstGeom prst="rect">
             <a:avLst/>
@@ -9011,13 +9115,11 @@
           </a:bodyPr>
           <a:lstStyle/>
           <a:p>
-            <a:pPr marL="400050" indent="-400050">
+            <a:pPr algn="ctr">
               <a:spcBef>
                 <a:spcPts val="600"/>
               </a:spcBef>
-              <a:buSzPct val="100000"/>
-              <a:buChar char="•"/>
-              <a:defRPr sz="1400">
+              <a:defRPr sz="2000">
                 <a:solidFill>
                   <a:srgbClr val="E6F1FA"/>
                 </a:solidFill>
@@ -9032,13 +9134,11 @@
             </a:r>
           </a:p>
           <a:p>
-            <a:pPr marL="400050" indent="-400050">
+            <a:pPr algn="ctr">
               <a:spcBef>
                 <a:spcPts val="600"/>
               </a:spcBef>
-              <a:buSzPct val="100000"/>
-              <a:buChar char="•"/>
-              <a:defRPr sz="1400">
+              <a:defRPr sz="2000">
                 <a:solidFill>
                   <a:srgbClr val="E6F1FA"/>
                 </a:solidFill>
@@ -9049,17 +9149,15 @@
               </a:defRPr>
             </a:pPr>
             <a:r>
-              <a:t>k-NN com spaCy desaba (F1 0,43)</a:t>
-            </a:r>
-          </a:p>
-          <a:p>
-            <a:pPr marL="400050" indent="-400050">
+              <a:t>k-NN com spaCy desaba</a:t>
+            </a:r>
+          </a:p>
+          <a:p>
+            <a:pPr algn="ctr">
               <a:spcBef>
                 <a:spcPts val="600"/>
               </a:spcBef>
-              <a:buSzPct val="100000"/>
-              <a:buChar char="•"/>
-              <a:defRPr sz="1400">
+              <a:defRPr sz="2000">
                 <a:solidFill>
                   <a:srgbClr val="E6F1FA"/>
                 </a:solidFill>
@@ -9074,13 +9172,11 @@
             </a:r>
           </a:p>
           <a:p>
-            <a:pPr marL="400050" indent="-400050">
+            <a:pPr algn="ctr">
               <a:spcBef>
                 <a:spcPts val="600"/>
               </a:spcBef>
-              <a:buSzPct val="100000"/>
-              <a:buChar char="•"/>
-              <a:defRPr sz="1400">
+              <a:defRPr sz="2000">
                 <a:solidFill>
                   <a:srgbClr val="E6F1FA"/>
                 </a:solidFill>
@@ -9131,14 +9227,14 @@
       </p:grpSpPr>
       <p:sp>
         <p:nvSpPr>
-          <p:cNvPr id="206" name="Text 1"/>
+          <p:cNvPr id="197" name="Text 1"/>
           <p:cNvSpPr txBox="1"/>
           <p:nvPr/>
         </p:nvSpPr>
         <p:spPr>
           <a:xfrm>
-            <a:off x="290730" y="2133599"/>
-            <a:ext cx="8562540" cy="876301"/>
+            <a:off x="290729" y="2133599"/>
+            <a:ext cx="8562542" cy="876301"/>
           </a:xfrm>
           <a:prstGeom prst="rect">
             <a:avLst/>
@@ -9212,14 +9308,14 @@
       </p:grpSpPr>
       <p:sp>
         <p:nvSpPr>
-          <p:cNvPr id="208" name="Text 0"/>
+          <p:cNvPr id="199" name="Text 0"/>
           <p:cNvSpPr txBox="1"/>
           <p:nvPr/>
         </p:nvSpPr>
         <p:spPr>
           <a:xfrm>
-            <a:off x="457200" y="381000"/>
-            <a:ext cx="8229600" cy="609601"/>
+            <a:off x="457200" y="643709"/>
+            <a:ext cx="8229601" cy="609601"/>
           </a:xfrm>
           <a:prstGeom prst="rect">
             <a:avLst/>
@@ -9260,14 +9356,14 @@
       </p:sp>
       <p:sp>
         <p:nvSpPr>
-          <p:cNvPr id="209" name="Text 1"/>
+          <p:cNvPr id="200" name="Text 1"/>
           <p:cNvSpPr txBox="1"/>
           <p:nvPr/>
         </p:nvSpPr>
         <p:spPr>
           <a:xfrm>
-            <a:off x="457200" y="999489"/>
-            <a:ext cx="8229600" cy="241301"/>
+            <a:off x="457200" y="1262198"/>
+            <a:ext cx="8229601" cy="241301"/>
           </a:xfrm>
           <a:prstGeom prst="rect">
             <a:avLst/>
@@ -9308,14 +9404,14 @@
       </p:sp>
       <p:sp>
         <p:nvSpPr>
-          <p:cNvPr id="210" name="Shape 2"/>
+          <p:cNvPr id="201" name="Shape 2"/>
           <p:cNvSpPr/>
           <p:nvPr/>
         </p:nvSpPr>
         <p:spPr>
           <a:xfrm>
-            <a:off x="731519" y="1554480"/>
-            <a:ext cx="2377441" cy="1828801"/>
+            <a:off x="731520" y="1910522"/>
+            <a:ext cx="2377442" cy="1828802"/>
           </a:xfrm>
           <a:prstGeom prst="roundRect">
             <a:avLst>
@@ -9332,23 +9428,30 @@
           </a:ln>
         </p:spPr>
         <p:txBody>
-          <a:bodyPr lIns="45719" rIns="45719"/>
+          <a:bodyPr lIns="45718" tIns="45718" rIns="45718" bIns="45718"/>
           <a:lstStyle/>
           <a:p>
-            <a:pPr/>
-          </a:p>
-        </p:txBody>
-      </p:sp>
-      <p:sp>
-        <p:nvSpPr>
-          <p:cNvPr id="211" name="Text 3"/>
+            <a:pPr>
+              <a:defRPr>
+                <a:latin typeface="+mj-lt"/>
+                <a:ea typeface="+mj-ea"/>
+                <a:cs typeface="+mj-cs"/>
+                <a:sym typeface="Calibri"/>
+              </a:defRPr>
+            </a:pPr>
+          </a:p>
+        </p:txBody>
+      </p:sp>
+      <p:sp>
+        <p:nvSpPr>
+          <p:cNvPr id="202" name="Text 3"/>
           <p:cNvSpPr txBox="1"/>
           <p:nvPr/>
         </p:nvSpPr>
         <p:spPr>
           <a:xfrm>
-            <a:off x="822960" y="2182367"/>
-            <a:ext cx="2194561" cy="304801"/>
+            <a:off x="822960" y="2257740"/>
+            <a:ext cx="2194562" cy="482601"/>
           </a:xfrm>
           <a:prstGeom prst="rect">
             <a:avLst/>
@@ -9368,7 +9471,7 @@
           </a:bodyPr>
           <a:lstStyle>
             <a:lvl1pPr algn="ctr">
-              <a:defRPr sz="2000">
+              <a:defRPr sz="3200">
                 <a:solidFill>
                   <a:srgbClr val="FFFFFF"/>
                 </a:solidFill>
@@ -9389,14 +9492,14 @@
       </p:sp>
       <p:sp>
         <p:nvSpPr>
-          <p:cNvPr id="212" name="Text 4"/>
+          <p:cNvPr id="203" name="Text 4"/>
           <p:cNvSpPr txBox="1"/>
           <p:nvPr/>
         </p:nvSpPr>
         <p:spPr>
           <a:xfrm>
-            <a:off x="822960" y="2560320"/>
-            <a:ext cx="2194561" cy="381001"/>
+            <a:off x="822960" y="2813492"/>
+            <a:ext cx="2194562" cy="723901"/>
           </a:xfrm>
           <a:prstGeom prst="rect">
             <a:avLst/>
@@ -9416,7 +9519,7 @@
           </a:bodyPr>
           <a:lstStyle>
             <a:lvl1pPr algn="ctr">
-              <a:defRPr sz="1300">
+              <a:defRPr sz="1600">
                 <a:solidFill>
                   <a:srgbClr val="B9D3EE"/>
                 </a:solidFill>
@@ -9437,14 +9540,14 @@
       </p:sp>
       <p:sp>
         <p:nvSpPr>
-          <p:cNvPr id="213" name="Shape 5"/>
+          <p:cNvPr id="204" name="Shape 5"/>
           <p:cNvSpPr/>
           <p:nvPr/>
         </p:nvSpPr>
         <p:spPr>
           <a:xfrm>
-            <a:off x="3383279" y="1554480"/>
-            <a:ext cx="2377441" cy="1828801"/>
+            <a:off x="3383279" y="1910522"/>
+            <a:ext cx="2377442" cy="1828802"/>
           </a:xfrm>
           <a:prstGeom prst="roundRect">
             <a:avLst>
@@ -9461,23 +9564,30 @@
           </a:ln>
         </p:spPr>
         <p:txBody>
-          <a:bodyPr lIns="45719" rIns="45719"/>
+          <a:bodyPr lIns="45718" tIns="45718" rIns="45718" bIns="45718"/>
           <a:lstStyle/>
           <a:p>
-            <a:pPr/>
-          </a:p>
-        </p:txBody>
-      </p:sp>
-      <p:sp>
-        <p:nvSpPr>
-          <p:cNvPr id="214" name="Text 6"/>
+            <a:pPr>
+              <a:defRPr>
+                <a:latin typeface="+mj-lt"/>
+                <a:ea typeface="+mj-ea"/>
+                <a:cs typeface="+mj-cs"/>
+                <a:sym typeface="Calibri"/>
+              </a:defRPr>
+            </a:pPr>
+          </a:p>
+        </p:txBody>
+      </p:sp>
+      <p:sp>
+        <p:nvSpPr>
+          <p:cNvPr id="205" name="Text 6"/>
           <p:cNvSpPr txBox="1"/>
           <p:nvPr/>
         </p:nvSpPr>
         <p:spPr>
           <a:xfrm>
-            <a:off x="3474720" y="2182367"/>
-            <a:ext cx="2194561" cy="304801"/>
+            <a:off x="3474720" y="2257740"/>
+            <a:ext cx="2194562" cy="482601"/>
           </a:xfrm>
           <a:prstGeom prst="rect">
             <a:avLst/>
@@ -9497,7 +9607,7 @@
           </a:bodyPr>
           <a:lstStyle>
             <a:lvl1pPr algn="ctr">
-              <a:defRPr sz="2000">
+              <a:defRPr sz="3200">
                 <a:solidFill>
                   <a:srgbClr val="FFFFFF"/>
                 </a:solidFill>
@@ -9518,14 +9628,14 @@
       </p:sp>
       <p:sp>
         <p:nvSpPr>
-          <p:cNvPr id="215" name="Text 7"/>
+          <p:cNvPr id="206" name="Text 7"/>
           <p:cNvSpPr txBox="1"/>
           <p:nvPr/>
         </p:nvSpPr>
         <p:spPr>
           <a:xfrm>
-            <a:off x="3474720" y="2560320"/>
-            <a:ext cx="2194561" cy="571501"/>
+            <a:off x="3474720" y="2813492"/>
+            <a:ext cx="2194562" cy="723901"/>
           </a:xfrm>
           <a:prstGeom prst="rect">
             <a:avLst/>
@@ -9545,7 +9655,7 @@
           </a:bodyPr>
           <a:lstStyle>
             <a:lvl1pPr algn="ctr">
-              <a:defRPr sz="1300">
+              <a:defRPr sz="1600">
                 <a:solidFill>
                   <a:srgbClr val="B9D3EE"/>
                 </a:solidFill>
@@ -9566,14 +9676,14 @@
       </p:sp>
       <p:sp>
         <p:nvSpPr>
-          <p:cNvPr id="216" name="Shape 8"/>
+          <p:cNvPr id="207" name="Shape 8"/>
           <p:cNvSpPr/>
           <p:nvPr/>
         </p:nvSpPr>
         <p:spPr>
           <a:xfrm>
-            <a:off x="6035040" y="1554480"/>
-            <a:ext cx="2377441" cy="1828801"/>
+            <a:off x="6035038" y="1910522"/>
+            <a:ext cx="2377442" cy="1828802"/>
           </a:xfrm>
           <a:prstGeom prst="roundRect">
             <a:avLst>
@@ -9590,23 +9700,30 @@
           </a:ln>
         </p:spPr>
         <p:txBody>
-          <a:bodyPr lIns="45719" rIns="45719"/>
+          <a:bodyPr lIns="45718" tIns="45718" rIns="45718" bIns="45718"/>
           <a:lstStyle/>
           <a:p>
-            <a:pPr/>
-          </a:p>
-        </p:txBody>
-      </p:sp>
-      <p:sp>
-        <p:nvSpPr>
-          <p:cNvPr id="217" name="Text 9"/>
+            <a:pPr>
+              <a:defRPr>
+                <a:latin typeface="+mj-lt"/>
+                <a:ea typeface="+mj-ea"/>
+                <a:cs typeface="+mj-cs"/>
+                <a:sym typeface="Calibri"/>
+              </a:defRPr>
+            </a:pPr>
+          </a:p>
+        </p:txBody>
+      </p:sp>
+      <p:sp>
+        <p:nvSpPr>
+          <p:cNvPr id="208" name="Text 9"/>
           <p:cNvSpPr txBox="1"/>
           <p:nvPr/>
         </p:nvSpPr>
         <p:spPr>
           <a:xfrm>
-            <a:off x="6126479" y="2182367"/>
-            <a:ext cx="2194561" cy="304801"/>
+            <a:off x="6126479" y="2257740"/>
+            <a:ext cx="2194562" cy="482601"/>
           </a:xfrm>
           <a:prstGeom prst="rect">
             <a:avLst/>
@@ -9626,7 +9743,7 @@
           </a:bodyPr>
           <a:lstStyle>
             <a:lvl1pPr algn="ctr">
-              <a:defRPr sz="2000">
+              <a:defRPr sz="3200">
                 <a:solidFill>
                   <a:srgbClr val="FFFFFF"/>
                 </a:solidFill>
@@ -9647,14 +9764,14 @@
       </p:sp>
       <p:sp>
         <p:nvSpPr>
-          <p:cNvPr id="218" name="Text 10"/>
+          <p:cNvPr id="209" name="Text 10"/>
           <p:cNvSpPr txBox="1"/>
           <p:nvPr/>
         </p:nvSpPr>
         <p:spPr>
           <a:xfrm>
-            <a:off x="6126479" y="2560320"/>
-            <a:ext cx="2194561" cy="571501"/>
+            <a:off x="6126479" y="2813492"/>
+            <a:ext cx="2194562" cy="723901"/>
           </a:xfrm>
           <a:prstGeom prst="rect">
             <a:avLst/>
@@ -9674,7 +9791,7 @@
           </a:bodyPr>
           <a:lstStyle>
             <a:lvl1pPr algn="ctr">
-              <a:defRPr sz="1300">
+              <a:defRPr sz="1600">
                 <a:solidFill>
                   <a:srgbClr val="B9D3EE"/>
                 </a:solidFill>
@@ -9695,14 +9812,14 @@
       </p:sp>
       <p:sp>
         <p:nvSpPr>
-          <p:cNvPr id="219" name="Text 11"/>
+          <p:cNvPr id="210" name="Text 11"/>
           <p:cNvSpPr txBox="1"/>
           <p:nvPr/>
         </p:nvSpPr>
         <p:spPr>
           <a:xfrm>
-            <a:off x="457200" y="3909059"/>
-            <a:ext cx="8229600" cy="228601"/>
+            <a:off x="457199" y="4409055"/>
+            <a:ext cx="8229601" cy="228601"/>
           </a:xfrm>
           <a:prstGeom prst="rect">
             <a:avLst/>
@@ -9776,13 +9893,13 @@
       </p:grpSpPr>
       <p:sp>
         <p:nvSpPr>
-          <p:cNvPr id="221" name="Text 0"/>
+          <p:cNvPr id="212" name="Text 0"/>
           <p:cNvSpPr txBox="1"/>
           <p:nvPr/>
         </p:nvSpPr>
         <p:spPr>
           <a:xfrm>
-            <a:off x="457200" y="381000"/>
+            <a:off x="457200" y="380999"/>
             <a:ext cx="8229600" cy="609601"/>
           </a:xfrm>
           <a:prstGeom prst="rect">
@@ -9824,13 +9941,13 @@
       </p:sp>
       <p:sp>
         <p:nvSpPr>
-          <p:cNvPr id="222" name="Text 1"/>
+          <p:cNvPr id="213" name="Text 1"/>
           <p:cNvSpPr txBox="1"/>
           <p:nvPr/>
         </p:nvSpPr>
         <p:spPr>
           <a:xfrm>
-            <a:off x="457200" y="999489"/>
+            <a:off x="457200" y="999488"/>
             <a:ext cx="8229600" cy="241301"/>
           </a:xfrm>
           <a:prstGeom prst="rect">
@@ -9872,7 +9989,7 @@
       </p:sp>
       <p:graphicFrame>
         <p:nvGraphicFramePr>
-          <p:cNvPr id="223" name="Table 0"/>
+          <p:cNvPr id="214" name="Table 0"/>
           <p:cNvGraphicFramePr/>
           <p:nvPr/>
         </p:nvGraphicFramePr>
@@ -10627,7 +10744,7 @@
       </p:graphicFrame>
       <p:sp>
         <p:nvSpPr>
-          <p:cNvPr id="224" name="Text 2"/>
+          <p:cNvPr id="215" name="Text 2"/>
           <p:cNvSpPr txBox="1"/>
           <p:nvPr/>
         </p:nvSpPr>
@@ -10708,13 +10825,13 @@
       </p:grpSpPr>
       <p:sp>
         <p:nvSpPr>
-          <p:cNvPr id="226" name="Text 0"/>
+          <p:cNvPr id="217" name="Text 0"/>
           <p:cNvSpPr txBox="1"/>
           <p:nvPr/>
         </p:nvSpPr>
         <p:spPr>
           <a:xfrm>
-            <a:off x="457200" y="381000"/>
+            <a:off x="457200" y="380999"/>
             <a:ext cx="8229600" cy="609601"/>
           </a:xfrm>
           <a:prstGeom prst="rect">
@@ -10756,13 +10873,13 @@
       </p:sp>
       <p:sp>
         <p:nvSpPr>
-          <p:cNvPr id="227" name="Text 1"/>
+          <p:cNvPr id="218" name="Text 1"/>
           <p:cNvSpPr txBox="1"/>
           <p:nvPr/>
         </p:nvSpPr>
         <p:spPr>
           <a:xfrm>
-            <a:off x="457200" y="999489"/>
+            <a:off x="457200" y="999488"/>
             <a:ext cx="8229600" cy="241301"/>
           </a:xfrm>
           <a:prstGeom prst="rect">
@@ -10804,7 +10921,7 @@
       </p:sp>
       <p:sp>
         <p:nvSpPr>
-          <p:cNvPr id="228" name="Shape 2"/>
+          <p:cNvPr id="219" name="Shape 2"/>
           <p:cNvSpPr/>
           <p:nvPr/>
         </p:nvSpPr>
@@ -10828,23 +10945,30 @@
           </a:ln>
         </p:spPr>
         <p:txBody>
-          <a:bodyPr lIns="45719" rIns="45719"/>
+          <a:bodyPr lIns="45718" tIns="45718" rIns="45718" bIns="45718"/>
           <a:lstStyle/>
           <a:p>
-            <a:pPr/>
-          </a:p>
-        </p:txBody>
-      </p:sp>
-      <p:sp>
-        <p:nvSpPr>
-          <p:cNvPr id="229" name="Text 3"/>
+            <a:pPr>
+              <a:defRPr>
+                <a:latin typeface="+mj-lt"/>
+                <a:ea typeface="+mj-ea"/>
+                <a:cs typeface="+mj-cs"/>
+                <a:sym typeface="Calibri"/>
+              </a:defRPr>
+            </a:pPr>
+          </a:p>
+        </p:txBody>
+      </p:sp>
+      <p:sp>
+        <p:nvSpPr>
+          <p:cNvPr id="220" name="Text 3"/>
           <p:cNvSpPr txBox="1"/>
           <p:nvPr/>
         </p:nvSpPr>
         <p:spPr>
           <a:xfrm>
-            <a:off x="822960" y="2182367"/>
-            <a:ext cx="2194561" cy="304801"/>
+            <a:off x="822960" y="2182366"/>
+            <a:ext cx="2194562" cy="304801"/>
           </a:xfrm>
           <a:prstGeom prst="rect">
             <a:avLst/>
@@ -10885,14 +11009,14 @@
       </p:sp>
       <p:sp>
         <p:nvSpPr>
-          <p:cNvPr id="230" name="Text 4"/>
+          <p:cNvPr id="221" name="Text 4"/>
           <p:cNvSpPr txBox="1"/>
           <p:nvPr/>
         </p:nvSpPr>
         <p:spPr>
           <a:xfrm>
             <a:off x="822960" y="2560320"/>
-            <a:ext cx="2194561" cy="381001"/>
+            <a:ext cx="2194562" cy="381001"/>
           </a:xfrm>
           <a:prstGeom prst="rect">
             <a:avLst/>
@@ -10947,14 +11071,14 @@
       </p:sp>
       <p:sp>
         <p:nvSpPr>
-          <p:cNvPr id="231" name="Shape 5"/>
+          <p:cNvPr id="222" name="Shape 5"/>
           <p:cNvSpPr/>
           <p:nvPr/>
         </p:nvSpPr>
         <p:spPr>
           <a:xfrm>
             <a:off x="3383279" y="1554480"/>
-            <a:ext cx="2377441" cy="1828801"/>
+            <a:ext cx="2377442" cy="1828801"/>
           </a:xfrm>
           <a:prstGeom prst="roundRect">
             <a:avLst>
@@ -10971,23 +11095,30 @@
           </a:ln>
         </p:spPr>
         <p:txBody>
-          <a:bodyPr lIns="45719" rIns="45719"/>
+          <a:bodyPr lIns="45718" tIns="45718" rIns="45718" bIns="45718"/>
           <a:lstStyle/>
           <a:p>
-            <a:pPr/>
-          </a:p>
-        </p:txBody>
-      </p:sp>
-      <p:sp>
-        <p:nvSpPr>
-          <p:cNvPr id="232" name="Text 6"/>
+            <a:pPr>
+              <a:defRPr>
+                <a:latin typeface="+mj-lt"/>
+                <a:ea typeface="+mj-ea"/>
+                <a:cs typeface="+mj-cs"/>
+                <a:sym typeface="Calibri"/>
+              </a:defRPr>
+            </a:pPr>
+          </a:p>
+        </p:txBody>
+      </p:sp>
+      <p:sp>
+        <p:nvSpPr>
+          <p:cNvPr id="223" name="Text 6"/>
           <p:cNvSpPr txBox="1"/>
           <p:nvPr/>
         </p:nvSpPr>
         <p:spPr>
           <a:xfrm>
-            <a:off x="3474720" y="1877567"/>
-            <a:ext cx="2194561" cy="609601"/>
+            <a:off x="3474720" y="1877566"/>
+            <a:ext cx="2194562" cy="609601"/>
           </a:xfrm>
           <a:prstGeom prst="rect">
             <a:avLst/>
@@ -11028,14 +11159,14 @@
       </p:sp>
       <p:sp>
         <p:nvSpPr>
-          <p:cNvPr id="233" name="Text 7"/>
+          <p:cNvPr id="224" name="Text 7"/>
           <p:cNvSpPr txBox="1"/>
           <p:nvPr/>
         </p:nvSpPr>
         <p:spPr>
           <a:xfrm>
             <a:off x="3474720" y="2560320"/>
-            <a:ext cx="2194561" cy="381001"/>
+            <a:ext cx="2194562" cy="381001"/>
           </a:xfrm>
           <a:prstGeom prst="rect">
             <a:avLst/>
@@ -11090,14 +11221,14 @@
       </p:sp>
       <p:sp>
         <p:nvSpPr>
-          <p:cNvPr id="234" name="Shape 8"/>
+          <p:cNvPr id="225" name="Shape 8"/>
           <p:cNvSpPr/>
           <p:nvPr/>
         </p:nvSpPr>
         <p:spPr>
           <a:xfrm>
             <a:off x="6035040" y="1554480"/>
-            <a:ext cx="2377441" cy="1828801"/>
+            <a:ext cx="2377442" cy="1828801"/>
           </a:xfrm>
           <a:prstGeom prst="roundRect">
             <a:avLst>
@@ -11114,23 +11245,30 @@
           </a:ln>
         </p:spPr>
         <p:txBody>
-          <a:bodyPr lIns="45719" rIns="45719"/>
+          <a:bodyPr lIns="45718" tIns="45718" rIns="45718" bIns="45718"/>
           <a:lstStyle/>
           <a:p>
-            <a:pPr/>
-          </a:p>
-        </p:txBody>
-      </p:sp>
-      <p:sp>
-        <p:nvSpPr>
-          <p:cNvPr id="235" name="Text 9"/>
+            <a:pPr>
+              <a:defRPr>
+                <a:latin typeface="+mj-lt"/>
+                <a:ea typeface="+mj-ea"/>
+                <a:cs typeface="+mj-cs"/>
+                <a:sym typeface="Calibri"/>
+              </a:defRPr>
+            </a:pPr>
+          </a:p>
+        </p:txBody>
+      </p:sp>
+      <p:sp>
+        <p:nvSpPr>
+          <p:cNvPr id="226" name="Text 9"/>
           <p:cNvSpPr txBox="1"/>
           <p:nvPr/>
         </p:nvSpPr>
         <p:spPr>
           <a:xfrm>
-            <a:off x="6126479" y="2182367"/>
-            <a:ext cx="2194561" cy="304801"/>
+            <a:off x="6126479" y="2182366"/>
+            <a:ext cx="2194562" cy="304801"/>
           </a:xfrm>
           <a:prstGeom prst="rect">
             <a:avLst/>
@@ -11171,14 +11309,14 @@
       </p:sp>
       <p:sp>
         <p:nvSpPr>
-          <p:cNvPr id="236" name="Text 10"/>
+          <p:cNvPr id="227" name="Text 10"/>
           <p:cNvSpPr txBox="1"/>
           <p:nvPr/>
         </p:nvSpPr>
         <p:spPr>
           <a:xfrm>
             <a:off x="6126479" y="2560320"/>
-            <a:ext cx="2194561" cy="381001"/>
+            <a:ext cx="2194562" cy="381001"/>
           </a:xfrm>
           <a:prstGeom prst="rect">
             <a:avLst/>
@@ -11233,7 +11371,7 @@
       </p:sp>
       <p:sp>
         <p:nvSpPr>
-          <p:cNvPr id="237" name="Text 11"/>
+          <p:cNvPr id="228" name="Text 11"/>
           <p:cNvSpPr txBox="1"/>
           <p:nvPr/>
         </p:nvSpPr>
@@ -11314,14 +11452,14 @@
       </p:grpSpPr>
       <p:sp>
         <p:nvSpPr>
-          <p:cNvPr id="239" name="Text 0"/>
+          <p:cNvPr id="230" name="Text 0"/>
           <p:cNvSpPr txBox="1"/>
           <p:nvPr/>
         </p:nvSpPr>
         <p:spPr>
           <a:xfrm>
-            <a:off x="457200" y="289560"/>
-            <a:ext cx="8229600" cy="609601"/>
+            <a:off x="457199" y="1856513"/>
+            <a:ext cx="8721123" cy="1066801"/>
           </a:xfrm>
           <a:prstGeom prst="rect">
             <a:avLst/>
@@ -11340,8 +11478,8 @@
             <a:spAutoFit/>
           </a:bodyPr>
           <a:lstStyle>
-            <a:lvl1pPr algn="ctr">
-              <a:defRPr sz="4000">
+            <a:lvl1pPr>
+              <a:defRPr sz="7000">
                 <a:solidFill>
                   <a:srgbClr val="142B47"/>
                 </a:solidFill>
@@ -11355,21 +11493,21 @@
           <a:p>
             <a:pPr/>
             <a:r>
-              <a:t>Análise crítica</a:t>
-            </a:r>
-          </a:p>
-        </p:txBody>
-      </p:sp>
-      <p:sp>
-        <p:nvSpPr>
-          <p:cNvPr id="240" name="Text 1"/>
+              <a:t>O que funcionou</a:t>
+            </a:r>
+          </a:p>
+        </p:txBody>
+      </p:sp>
+      <p:sp>
+        <p:nvSpPr>
+          <p:cNvPr id="231" name="Text 3"/>
           <p:cNvSpPr txBox="1"/>
           <p:nvPr/>
         </p:nvSpPr>
         <p:spPr>
           <a:xfrm>
-            <a:off x="731519" y="1036319"/>
-            <a:ext cx="3657601" cy="304801"/>
+            <a:off x="534213" y="2858629"/>
+            <a:ext cx="7379804" cy="1524001"/>
           </a:xfrm>
           <a:prstGeom prst="rect">
             <a:avLst/>
@@ -11384,364 +11522,72 @@
           </a:extLst>
         </p:spPr>
         <p:txBody>
-          <a:bodyPr lIns="0" tIns="0" rIns="0" bIns="0" anchor="ctr">
+          <a:bodyPr lIns="0" tIns="0" rIns="0" bIns="0">
             <a:spAutoFit/>
           </a:bodyPr>
-          <a:lstStyle>
-            <a:lvl1pPr algn="ctr">
+          <a:lstStyle/>
+          <a:p>
+            <a:pPr>
+              <a:spcBef>
+                <a:spcPts val="600"/>
+              </a:spcBef>
               <a:defRPr sz="2000">
                 <a:solidFill>
-                  <a:srgbClr val="C24F80"/>
+                  <a:srgbClr val="142B47"/>
+                </a:solidFill>
+                <a:latin typeface="SF Pro Regular"/>
+                <a:ea typeface="SF Pro Regular"/>
+                <a:cs typeface="SF Pro Regular"/>
+                <a:sym typeface="SF Pro Regular"/>
+              </a:defRPr>
+            </a:pPr>
+            <a:r>
+              <a:t>O TF-IDF classificou certo </a:t>
+            </a:r>
+            <a:r>
+              <a:rPr>
+                <a:solidFill>
+                  <a:srgbClr val="D249B6"/>
                 </a:solidFill>
                 <a:latin typeface="SF Pro Bold"/>
                 <a:ea typeface="SF Pro Bold"/>
                 <a:cs typeface="SF Pro Bold"/>
                 <a:sym typeface="SF Pro Bold"/>
-              </a:defRPr>
-            </a:lvl1pPr>
-          </a:lstStyle>
-          <a:p>
-            <a:pPr/>
-            <a:r>
-              <a:t>O que funcionou</a:t>
-            </a:r>
-          </a:p>
-        </p:txBody>
-      </p:sp>
-      <p:sp>
-        <p:nvSpPr>
-          <p:cNvPr id="241" name="Text 2"/>
-          <p:cNvSpPr txBox="1"/>
-          <p:nvPr/>
-        </p:nvSpPr>
-        <p:spPr>
-          <a:xfrm>
-            <a:off x="4754879" y="1036319"/>
-            <a:ext cx="3657601" cy="304801"/>
-          </a:xfrm>
-          <a:prstGeom prst="rect">
-            <a:avLst/>
-          </a:prstGeom>
-          <a:ln w="12700">
-            <a:miter lim="400000"/>
-          </a:ln>
-          <a:extLst>
-            <a:ext uri="{C572A759-6A51-4108-AA02-DFA0A04FC94B}">
-              <ma14:wrappingTextBoxFlag xmlns:ma14="http://schemas.microsoft.com/office/mac/drawingml/2011/main" val="1"/>
-            </a:ext>
-          </a:extLst>
-        </p:spPr>
-        <p:txBody>
-          <a:bodyPr lIns="0" tIns="0" rIns="0" bIns="0" anchor="ctr">
-            <a:spAutoFit/>
-          </a:bodyPr>
-          <a:lstStyle>
-            <a:lvl1pPr algn="ctr">
-              <a:defRPr sz="2000">
+              </a:rPr>
+              <a:t>91% das questões</a:t>
+            </a:r>
+            <a:r>
+              <a:t>, porque os termos técnicos decidem a subárea. Na similaridade, </a:t>
+            </a:r>
+            <a:r>
+              <a:rPr>
                 <a:solidFill>
-                  <a:srgbClr val="C24F80"/>
+                  <a:srgbClr val="D249B6"/>
                 </a:solidFill>
                 <a:latin typeface="SF Pro Bold"/>
                 <a:ea typeface="SF Pro Bold"/>
                 <a:cs typeface="SF Pro Bold"/>
                 <a:sym typeface="SF Pro Bold"/>
-              </a:defRPr>
-            </a:lvl1pPr>
-          </a:lstStyle>
-          <a:p>
-            <a:pPr/>
-            <a:r>
-              <a:t>Limitações</a:t>
-            </a:r>
-          </a:p>
-        </p:txBody>
-      </p:sp>
-      <p:sp>
-        <p:nvSpPr>
-          <p:cNvPr id="242" name="Shape 3"/>
-          <p:cNvSpPr/>
-          <p:nvPr/>
-        </p:nvSpPr>
-        <p:spPr>
-          <a:xfrm>
-            <a:off x="731519" y="1463039"/>
-            <a:ext cx="3657601" cy="2926081"/>
-          </a:xfrm>
-          <a:prstGeom prst="roundRect">
-            <a:avLst>
-              <a:gd name="adj" fmla="val 4688"/>
-            </a:avLst>
-          </a:prstGeom>
-          <a:solidFill>
-            <a:srgbClr val="142B47"/>
-          </a:solidFill>
-          <a:ln w="12700">
-            <a:miter lim="400000"/>
-          </a:ln>
-        </p:spPr>
-        <p:txBody>
-          <a:bodyPr lIns="45719" rIns="45719"/>
-          <a:lstStyle/>
-          <a:p>
-            <a:pPr/>
-          </a:p>
-        </p:txBody>
-      </p:sp>
-      <p:sp>
-        <p:nvSpPr>
-          <p:cNvPr id="243" name="Text 4"/>
-          <p:cNvSpPr txBox="1"/>
-          <p:nvPr/>
-        </p:nvSpPr>
-        <p:spPr>
-          <a:xfrm>
-            <a:off x="960119" y="1691639"/>
-            <a:ext cx="3200401" cy="1447801"/>
-          </a:xfrm>
-          <a:prstGeom prst="rect">
-            <a:avLst/>
-          </a:prstGeom>
-          <a:ln w="12700">
-            <a:miter lim="400000"/>
-          </a:ln>
-          <a:extLst>
-            <a:ext uri="{C572A759-6A51-4108-AA02-DFA0A04FC94B}">
-              <ma14:wrappingTextBoxFlag xmlns:ma14="http://schemas.microsoft.com/office/mac/drawingml/2011/main" val="1"/>
-            </a:ext>
-          </a:extLst>
-        </p:spPr>
-        <p:txBody>
-          <a:bodyPr lIns="0" tIns="0" rIns="0" bIns="0">
-            <a:spAutoFit/>
-          </a:bodyPr>
-          <a:lstStyle/>
-          <a:p>
-            <a:pPr marL="400050" indent="-400050">
-              <a:spcBef>
-                <a:spcPts val="600"/>
-              </a:spcBef>
-              <a:buSzPct val="100000"/>
-              <a:buChar char="•"/>
-              <a:defRPr sz="1400">
+              </a:rPr>
+              <a:t>o Gemini foi o modelo mais perto das pessoas</a:t>
+            </a:r>
+            <a:r>
+              <a:t> (0,68 no nosso dataset). E o </a:t>
+            </a:r>
+            <a:r>
+              <a:rPr>
                 <a:solidFill>
-                  <a:srgbClr val="E6F1FA"/>
+                  <a:srgbClr val="D249B6"/>
                 </a:solidFill>
-                <a:latin typeface="SF Pro Regular"/>
-                <a:ea typeface="SF Pro Regular"/>
-                <a:cs typeface="SF Pro Regular"/>
-                <a:sym typeface="SF Pro Regular"/>
-              </a:defRPr>
-            </a:pPr>
-            <a:r>
-              <a:t>TF-IDF acertou 91% das subáreas</a:t>
-            </a:r>
-          </a:p>
-          <a:p>
-            <a:pPr marL="400050" indent="-400050">
-              <a:spcBef>
-                <a:spcPts val="600"/>
-              </a:spcBef>
-              <a:buSzPct val="100000"/>
-              <a:buChar char="•"/>
-              <a:defRPr sz="1400">
-                <a:solidFill>
-                  <a:srgbClr val="E6F1FA"/>
-                </a:solidFill>
-                <a:latin typeface="SF Pro Regular"/>
-                <a:ea typeface="SF Pro Regular"/>
-                <a:cs typeface="SF Pro Regular"/>
-                <a:sym typeface="SF Pro Regular"/>
-              </a:defRPr>
-            </a:pPr>
-            <a:r>
-              <a:t>Gemini concordou com as anotadoras (0,68)</a:t>
-            </a:r>
-          </a:p>
-          <a:p>
-            <a:pPr marL="400050" indent="-400050">
-              <a:spcBef>
-                <a:spcPts val="600"/>
-              </a:spcBef>
-              <a:buSzPct val="100000"/>
-              <a:buChar char="•"/>
-              <a:defRPr sz="1400">
-                <a:solidFill>
-                  <a:srgbClr val="E6F1FA"/>
-                </a:solidFill>
-                <a:latin typeface="SF Pro Regular"/>
-                <a:ea typeface="SF Pro Regular"/>
-                <a:cs typeface="SF Pro Regular"/>
-                <a:sym typeface="SF Pro Regular"/>
-              </a:defRPr>
-            </a:pPr>
-            <a:r>
-              <a:t>k-NN da aula decidiu os rótulos ambíguos</a:t>
-            </a:r>
-          </a:p>
-          <a:p>
-            <a:pPr marL="400050" indent="-400050">
-              <a:spcBef>
-                <a:spcPts val="600"/>
-              </a:spcBef>
-              <a:buSzPct val="100000"/>
-              <a:buChar char="•"/>
-              <a:defRPr sz="1400">
-                <a:solidFill>
-                  <a:srgbClr val="E6F1FA"/>
-                </a:solidFill>
-                <a:latin typeface="SF Pro Regular"/>
-                <a:ea typeface="SF Pro Regular"/>
-                <a:cs typeface="SF Pro Regular"/>
-                <a:sym typeface="SF Pro Regular"/>
-              </a:defRPr>
-            </a:pPr>
-            <a:r>
-              <a:t>Mesma escala nos dois datasets</a:t>
-            </a:r>
-          </a:p>
-        </p:txBody>
-      </p:sp>
-      <p:sp>
-        <p:nvSpPr>
-          <p:cNvPr id="244" name="Shape 5"/>
-          <p:cNvSpPr/>
-          <p:nvPr/>
-        </p:nvSpPr>
-        <p:spPr>
-          <a:xfrm>
-            <a:off x="4754879" y="1463039"/>
-            <a:ext cx="3657601" cy="2926081"/>
-          </a:xfrm>
-          <a:prstGeom prst="roundRect">
-            <a:avLst>
-              <a:gd name="adj" fmla="val 4688"/>
-            </a:avLst>
-          </a:prstGeom>
-          <a:solidFill>
-            <a:srgbClr val="142B47"/>
-          </a:solidFill>
-          <a:ln w="12700">
-            <a:miter lim="400000"/>
-          </a:ln>
-        </p:spPr>
-        <p:txBody>
-          <a:bodyPr lIns="45719" rIns="45719"/>
-          <a:lstStyle/>
-          <a:p>
-            <a:pPr/>
-          </a:p>
-        </p:txBody>
-      </p:sp>
-      <p:sp>
-        <p:nvSpPr>
-          <p:cNvPr id="245" name="Text 6"/>
-          <p:cNvSpPr txBox="1"/>
-          <p:nvPr/>
-        </p:nvSpPr>
-        <p:spPr>
-          <a:xfrm>
-            <a:off x="4983479" y="1691639"/>
-            <a:ext cx="3200401" cy="1854201"/>
-          </a:xfrm>
-          <a:prstGeom prst="rect">
-            <a:avLst/>
-          </a:prstGeom>
-          <a:ln w="12700">
-            <a:miter lim="400000"/>
-          </a:ln>
-          <a:extLst>
-            <a:ext uri="{C572A759-6A51-4108-AA02-DFA0A04FC94B}">
-              <ma14:wrappingTextBoxFlag xmlns:ma14="http://schemas.microsoft.com/office/mac/drawingml/2011/main" val="1"/>
-            </a:ext>
-          </a:extLst>
-        </p:spPr>
-        <p:txBody>
-          <a:bodyPr lIns="0" tIns="0" rIns="0" bIns="0">
-            <a:spAutoFit/>
-          </a:bodyPr>
-          <a:lstStyle/>
-          <a:p>
-            <a:pPr marL="400050" indent="-400050">
-              <a:spcBef>
-                <a:spcPts val="600"/>
-              </a:spcBef>
-              <a:buSzPct val="100000"/>
-              <a:buChar char="•"/>
-              <a:defRPr sz="1400">
-                <a:solidFill>
-                  <a:srgbClr val="E6F1FA"/>
-                </a:solidFill>
-                <a:latin typeface="SF Pro Regular"/>
-                <a:ea typeface="SF Pro Regular"/>
-                <a:cs typeface="SF Pro Regular"/>
-                <a:sym typeface="SF Pro Regular"/>
-              </a:defRPr>
-            </a:pPr>
-            <a:r>
-              <a:t>Só 2 anotadoras e 100 pares, quase todos pouco parecidos</a:t>
-            </a:r>
-          </a:p>
-          <a:p>
-            <a:pPr marL="400050" indent="-400050">
-              <a:spcBef>
-                <a:spcPts val="600"/>
-              </a:spcBef>
-              <a:buSzPct val="100000"/>
-              <a:buChar char="•"/>
-              <a:defRPr sz="1400">
-                <a:solidFill>
-                  <a:srgbClr val="E6F1FA"/>
-                </a:solidFill>
-                <a:latin typeface="SF Pro Regular"/>
-                <a:ea typeface="SF Pro Regular"/>
-                <a:cs typeface="SF Pro Regular"/>
-                <a:sym typeface="SF Pro Regular"/>
-              </a:defRPr>
-            </a:pPr>
-            <a:r>
-              <a:t>Palavras técnicas fora do vocabulário do spaCy</a:t>
-            </a:r>
-          </a:p>
-          <a:p>
-            <a:pPr marL="400050" indent="-400050">
-              <a:spcBef>
-                <a:spcPts val="600"/>
-              </a:spcBef>
-              <a:buSzPct val="100000"/>
-              <a:buChar char="•"/>
-              <a:defRPr sz="1400">
-                <a:solidFill>
-                  <a:srgbClr val="E6F1FA"/>
-                </a:solidFill>
-                <a:latin typeface="SF Pro Regular"/>
-                <a:ea typeface="SF Pro Regular"/>
-                <a:cs typeface="SF Pro Regular"/>
-                <a:sym typeface="SF Pro Regular"/>
-              </a:defRPr>
-            </a:pPr>
-            <a:r>
-              <a:t>BERT não foi feito para palavra isolada</a:t>
-            </a:r>
-          </a:p>
-          <a:p>
-            <a:pPr marL="400050" indent="-400050">
-              <a:spcBef>
-                <a:spcPts val="600"/>
-              </a:spcBef>
-              <a:buSzPct val="100000"/>
-              <a:buChar char="•"/>
-              <a:defRPr sz="1400">
-                <a:solidFill>
-                  <a:srgbClr val="E6F1FA"/>
-                </a:solidFill>
-                <a:latin typeface="SF Pro Regular"/>
-                <a:ea typeface="SF Pro Regular"/>
-                <a:cs typeface="SF Pro Regular"/>
-                <a:sym typeface="SF Pro Regular"/>
-              </a:defRPr>
-            </a:pPr>
-            <a:r>
-              <a:t>Cerca de 3% das questões com subárea errada</a:t>
+                <a:latin typeface="SF Pro Bold"/>
+                <a:ea typeface="SF Pro Bold"/>
+                <a:cs typeface="SF Pro Bold"/>
+                <a:sym typeface="SF Pro Bold"/>
+              </a:rPr>
+              <a:t>k‑NN visto em aula</a:t>
+            </a:r>
+            <a:r>
+              <a:t> resolveu as questões ambíguas na hora de definir a subárea.</a:t>
             </a:r>
           </a:p>
         </p:txBody>
@@ -11781,14 +11627,14 @@
       </p:grpSpPr>
       <p:sp>
         <p:nvSpPr>
-          <p:cNvPr id="247" name="Text 0"/>
+          <p:cNvPr id="233" name="Text 0"/>
           <p:cNvSpPr txBox="1"/>
           <p:nvPr/>
         </p:nvSpPr>
         <p:spPr>
           <a:xfrm>
-            <a:off x="457200" y="289560"/>
-            <a:ext cx="8229600" cy="609601"/>
+            <a:off x="211438" y="1805666"/>
+            <a:ext cx="8721123" cy="1066801"/>
           </a:xfrm>
           <a:prstGeom prst="rect">
             <a:avLst/>
@@ -11807,8 +11653,8 @@
             <a:spAutoFit/>
           </a:bodyPr>
           <a:lstStyle>
-            <a:lvl1pPr algn="ctr">
-              <a:defRPr sz="4000">
+            <a:lvl1pPr algn="r">
+              <a:defRPr sz="7000">
                 <a:solidFill>
                   <a:srgbClr val="142B47"/>
                 </a:solidFill>
@@ -11822,21 +11668,21 @@
           <a:p>
             <a:pPr/>
             <a:r>
-              <a:t>Uso de IA</a:t>
-            </a:r>
-          </a:p>
-        </p:txBody>
-      </p:sp>
-      <p:sp>
-        <p:nvSpPr>
-          <p:cNvPr id="248" name="Text 1"/>
+              <a:t>Limitações</a:t>
+            </a:r>
+          </a:p>
+        </p:txBody>
+      </p:sp>
+      <p:sp>
+        <p:nvSpPr>
+          <p:cNvPr id="234" name="Text 3"/>
           <p:cNvSpPr txBox="1"/>
           <p:nvPr/>
         </p:nvSpPr>
         <p:spPr>
           <a:xfrm>
-            <a:off x="731519" y="1036319"/>
-            <a:ext cx="3657601" cy="304801"/>
+            <a:off x="1525731" y="2867104"/>
+            <a:ext cx="7379804" cy="1219201"/>
           </a:xfrm>
           <a:prstGeom prst="rect">
             <a:avLst/>
@@ -11851,364 +11697,84 @@
           </a:extLst>
         </p:spPr>
         <p:txBody>
-          <a:bodyPr lIns="0" tIns="0" rIns="0" bIns="0" anchor="ctr">
+          <a:bodyPr lIns="0" tIns="0" rIns="0" bIns="0">
             <a:spAutoFit/>
           </a:bodyPr>
-          <a:lstStyle>
-            <a:lvl1pPr algn="ctr">
+          <a:lstStyle/>
+          <a:p>
+            <a:pPr algn="r">
+              <a:spcBef>
+                <a:spcPts val="600"/>
+              </a:spcBef>
               <a:defRPr sz="2000">
                 <a:solidFill>
-                  <a:srgbClr val="C24F80"/>
+                  <a:srgbClr val="142B47"/>
+                </a:solidFill>
+                <a:latin typeface="SF Pro Regular"/>
+                <a:ea typeface="SF Pro Regular"/>
+                <a:cs typeface="SF Pro Regular"/>
+                <a:sym typeface="SF Pro Regular"/>
+              </a:defRPr>
+            </a:pPr>
+            <a:r>
+              <a:rPr>
+                <a:solidFill>
+                  <a:srgbClr val="D249B6"/>
                 </a:solidFill>
                 <a:latin typeface="SF Pro Bold"/>
                 <a:ea typeface="SF Pro Bold"/>
                 <a:cs typeface="SF Pro Bold"/>
                 <a:sym typeface="SF Pro Bold"/>
-              </a:defRPr>
-            </a:lvl1pPr>
-          </a:lstStyle>
-          <a:p>
-            <a:pPr/>
-            <a:r>
-              <a:t>Onde usamos</a:t>
-            </a:r>
-          </a:p>
-        </p:txBody>
-      </p:sp>
-      <p:sp>
-        <p:nvSpPr>
-          <p:cNvPr id="249" name="Text 2"/>
-          <p:cNvSpPr txBox="1"/>
-          <p:nvPr/>
-        </p:nvSpPr>
-        <p:spPr>
-          <a:xfrm>
-            <a:off x="4754879" y="1036319"/>
-            <a:ext cx="3657601" cy="304801"/>
-          </a:xfrm>
-          <a:prstGeom prst="rect">
-            <a:avLst/>
-          </a:prstGeom>
-          <a:ln w="12700">
-            <a:miter lim="400000"/>
-          </a:ln>
-          <a:extLst>
-            <a:ext uri="{C572A759-6A51-4108-AA02-DFA0A04FC94B}">
-              <ma14:wrappingTextBoxFlag xmlns:ma14="http://schemas.microsoft.com/office/mac/drawingml/2011/main" val="1"/>
-            </a:ext>
-          </a:extLst>
-        </p:spPr>
-        <p:txBody>
-          <a:bodyPr lIns="0" tIns="0" rIns="0" bIns="0" anchor="ctr">
-            <a:spAutoFit/>
-          </a:bodyPr>
-          <a:lstStyle>
-            <a:lvl1pPr algn="ctr">
-              <a:defRPr sz="2000">
+              </a:rPr>
+              <a:t>Só 2 anotadoras e 100 pares</a:t>
+            </a:r>
+            <a:r>
+              <a:t>, quase todos pouco parecidos. O spaCy não conhece </a:t>
+            </a:r>
+            <a:r>
+              <a:rPr>
                 <a:solidFill>
-                  <a:srgbClr val="C24F80"/>
+                  <a:srgbClr val="D249B6"/>
                 </a:solidFill>
                 <a:latin typeface="SF Pro Bold"/>
                 <a:ea typeface="SF Pro Bold"/>
                 <a:cs typeface="SF Pro Bold"/>
                 <a:sym typeface="SF Pro Bold"/>
-              </a:defRPr>
-            </a:lvl1pPr>
-          </a:lstStyle>
-          <a:p>
-            <a:pPr/>
-            <a:r>
-              <a:t>Onde não usamos</a:t>
-            </a:r>
-          </a:p>
-        </p:txBody>
-      </p:sp>
-      <p:sp>
-        <p:nvSpPr>
-          <p:cNvPr id="250" name="Shape 3"/>
-          <p:cNvSpPr/>
-          <p:nvPr/>
-        </p:nvSpPr>
-        <p:spPr>
-          <a:xfrm>
-            <a:off x="731519" y="1463039"/>
-            <a:ext cx="3657601" cy="2926081"/>
-          </a:xfrm>
-          <a:prstGeom prst="roundRect">
-            <a:avLst>
-              <a:gd name="adj" fmla="val 4688"/>
-            </a:avLst>
-          </a:prstGeom>
-          <a:solidFill>
-            <a:srgbClr val="142B47"/>
-          </a:solidFill>
-          <a:ln w="12700">
-            <a:miter lim="400000"/>
-          </a:ln>
-        </p:spPr>
-        <p:txBody>
-          <a:bodyPr lIns="45719" rIns="45719"/>
-          <a:lstStyle/>
-          <a:p>
-            <a:pPr/>
-          </a:p>
-        </p:txBody>
-      </p:sp>
-      <p:sp>
-        <p:nvSpPr>
-          <p:cNvPr id="251" name="Text 4"/>
-          <p:cNvSpPr txBox="1"/>
-          <p:nvPr/>
-        </p:nvSpPr>
-        <p:spPr>
-          <a:xfrm>
-            <a:off x="960119" y="1691639"/>
-            <a:ext cx="3200401" cy="2209801"/>
-          </a:xfrm>
-          <a:prstGeom prst="rect">
-            <a:avLst/>
-          </a:prstGeom>
-          <a:ln w="12700">
-            <a:miter lim="400000"/>
-          </a:ln>
-          <a:extLst>
-            <a:ext uri="{C572A759-6A51-4108-AA02-DFA0A04FC94B}">
-              <ma14:wrappingTextBoxFlag xmlns:ma14="http://schemas.microsoft.com/office/mac/drawingml/2011/main" val="1"/>
-            </a:ext>
-          </a:extLst>
-        </p:spPr>
-        <p:txBody>
-          <a:bodyPr lIns="0" tIns="0" rIns="0" bIns="0">
-            <a:spAutoFit/>
-          </a:bodyPr>
-          <a:lstStyle/>
-          <a:p>
-            <a:pPr marL="371475" indent="-371475">
-              <a:spcBef>
-                <a:spcPts val="600"/>
-              </a:spcBef>
-              <a:buSzPct val="100000"/>
-              <a:buChar char="•"/>
-              <a:defRPr sz="1300">
+              </a:rPr>
+              <a:t>termos como deployar e parsear</a:t>
+            </a:r>
+            <a:r>
+              <a:t>, o BERT não foi feito para </a:t>
+            </a:r>
+            <a:r>
+              <a:rPr>
                 <a:solidFill>
-                  <a:srgbClr val="E6F1FA"/>
+                  <a:srgbClr val="D249B6"/>
                 </a:solidFill>
-                <a:latin typeface="SF Pro Regular"/>
-                <a:ea typeface="SF Pro Regular"/>
-                <a:cs typeface="SF Pro Regular"/>
-                <a:sym typeface="SF Pro Regular"/>
-              </a:defRPr>
-            </a:pPr>
-            <a:r>
-              <a:t>Claude: programação dos scripts e notebooks</a:t>
-            </a:r>
-          </a:p>
-          <a:p>
-            <a:pPr marL="371475" indent="-371475">
-              <a:spcBef>
-                <a:spcPts val="600"/>
-              </a:spcBef>
-              <a:buSzPct val="100000"/>
-              <a:buChar char="•"/>
-              <a:defRPr sz="1300">
+                <a:latin typeface="SF Pro Bold"/>
+                <a:ea typeface="SF Pro Bold"/>
+                <a:cs typeface="SF Pro Bold"/>
+                <a:sym typeface="SF Pro Bold"/>
+              </a:rPr>
+              <a:t>palavras isoladas</a:t>
+            </a:r>
+            <a:r>
+              <a:t>, e cerca de </a:t>
+            </a:r>
+            <a:r>
+              <a:rPr>
                 <a:solidFill>
-                  <a:srgbClr val="E6F1FA"/>
+                  <a:srgbClr val="D249B6"/>
                 </a:solidFill>
-                <a:latin typeface="SF Pro Regular"/>
-                <a:ea typeface="SF Pro Regular"/>
-                <a:cs typeface="SF Pro Regular"/>
-                <a:sym typeface="SF Pro Regular"/>
-              </a:defRPr>
-            </a:pPr>
-            <a:r>
-              <a:t>Claude: texto do README e da apresentação</a:t>
-            </a:r>
-          </a:p>
-          <a:p>
-            <a:pPr marL="371475" indent="-371475">
-              <a:spcBef>
-                <a:spcPts val="600"/>
-              </a:spcBef>
-              <a:buSzPct val="100000"/>
-              <a:buChar char="•"/>
-              <a:defRPr sz="1300">
-                <a:solidFill>
-                  <a:srgbClr val="E6F1FA"/>
-                </a:solidFill>
-                <a:latin typeface="SF Pro Regular"/>
-                <a:ea typeface="SF Pro Regular"/>
-                <a:cs typeface="SF Pro Regular"/>
-                <a:sym typeface="SF Pro Regular"/>
-              </a:defRPr>
-            </a:pPr>
-            <a:r>
-              <a:t>Claude: conferência das 336 questões usadas para medir a subárea</a:t>
-            </a:r>
-          </a:p>
-          <a:p>
-            <a:pPr marL="371475" indent="-371475">
-              <a:spcBef>
-                <a:spcPts val="600"/>
-              </a:spcBef>
-              <a:buSzPct val="100000"/>
-              <a:buChar char="•"/>
-              <a:defRPr sz="1300">
-                <a:solidFill>
-                  <a:srgbClr val="E6F1FA"/>
-                </a:solidFill>
-                <a:latin typeface="SF Pro Regular"/>
-                <a:ea typeface="SF Pro Regular"/>
-                <a:cs typeface="SF Pro Regular"/>
-                <a:sym typeface="SF Pro Regular"/>
-              </a:defRPr>
-            </a:pPr>
-            <a:r>
-              <a:t>Codex: scripts da parte 2</a:t>
-            </a:r>
-          </a:p>
-          <a:p>
-            <a:pPr marL="371475" indent="-371475">
-              <a:spcBef>
-                <a:spcPts val="600"/>
-              </a:spcBef>
-              <a:buSzPct val="100000"/>
-              <a:buChar char="•"/>
-              <a:defRPr sz="1300">
-                <a:solidFill>
-                  <a:srgbClr val="E6F1FA"/>
-                </a:solidFill>
-                <a:latin typeface="SF Pro Regular"/>
-                <a:ea typeface="SF Pro Regular"/>
-                <a:cs typeface="SF Pro Regular"/>
-                <a:sym typeface="SF Pro Regular"/>
-              </a:defRPr>
-            </a:pPr>
-            <a:r>
-              <a:t>Gemini: um dos modelos testados na parte 4</a:t>
-            </a:r>
-          </a:p>
-        </p:txBody>
-      </p:sp>
-      <p:sp>
-        <p:nvSpPr>
-          <p:cNvPr id="252" name="Shape 5"/>
-          <p:cNvSpPr/>
-          <p:nvPr/>
-        </p:nvSpPr>
-        <p:spPr>
-          <a:xfrm>
-            <a:off x="4754879" y="1463039"/>
-            <a:ext cx="3657601" cy="2926081"/>
-          </a:xfrm>
-          <a:prstGeom prst="roundRect">
-            <a:avLst>
-              <a:gd name="adj" fmla="val 4688"/>
-            </a:avLst>
-          </a:prstGeom>
-          <a:solidFill>
-            <a:srgbClr val="142B47"/>
-          </a:solidFill>
-          <a:ln w="12700">
-            <a:miter lim="400000"/>
-          </a:ln>
-        </p:spPr>
-        <p:txBody>
-          <a:bodyPr lIns="45719" rIns="45719"/>
-          <a:lstStyle/>
-          <a:p>
-            <a:pPr/>
-          </a:p>
-        </p:txBody>
-      </p:sp>
-      <p:sp>
-        <p:nvSpPr>
-          <p:cNvPr id="253" name="Text 6"/>
-          <p:cNvSpPr txBox="1"/>
-          <p:nvPr/>
-        </p:nvSpPr>
-        <p:spPr>
-          <a:xfrm>
-            <a:off x="4983479" y="1691639"/>
-            <a:ext cx="3200401" cy="1168401"/>
-          </a:xfrm>
-          <a:prstGeom prst="rect">
-            <a:avLst/>
-          </a:prstGeom>
-          <a:ln w="12700">
-            <a:miter lim="400000"/>
-          </a:ln>
-          <a:extLst>
-            <a:ext uri="{C572A759-6A51-4108-AA02-DFA0A04FC94B}">
-              <ma14:wrappingTextBoxFlag xmlns:ma14="http://schemas.microsoft.com/office/mac/drawingml/2011/main" val="1"/>
-            </a:ext>
-          </a:extLst>
-        </p:spPr>
-        <p:txBody>
-          <a:bodyPr lIns="0" tIns="0" rIns="0" bIns="0">
-            <a:spAutoFit/>
-          </a:bodyPr>
-          <a:lstStyle/>
-          <a:p>
-            <a:pPr marL="400050" indent="-400050">
-              <a:spcBef>
-                <a:spcPts val="600"/>
-              </a:spcBef>
-              <a:buSzPct val="100000"/>
-              <a:buChar char="•"/>
-              <a:defRPr sz="1400">
-                <a:solidFill>
-                  <a:srgbClr val="E6F1FA"/>
-                </a:solidFill>
-                <a:latin typeface="SF Pro Regular"/>
-                <a:ea typeface="SF Pro Regular"/>
-                <a:cs typeface="SF Pro Regular"/>
-                <a:sym typeface="SF Pro Regular"/>
-              </a:defRPr>
-            </a:pPr>
-            <a:r>
-              <a:t>Anotação dos 100 pares (Luiza e Rafaela)</a:t>
-            </a:r>
-          </a:p>
-          <a:p>
-            <a:pPr marL="400050" indent="-400050">
-              <a:spcBef>
-                <a:spcPts val="600"/>
-              </a:spcBef>
-              <a:buSzPct val="100000"/>
-              <a:buChar char="•"/>
-              <a:defRPr sz="1400">
-                <a:solidFill>
-                  <a:srgbClr val="E6F1FA"/>
-                </a:solidFill>
-                <a:latin typeface="SF Pro Regular"/>
-                <a:ea typeface="SF Pro Regular"/>
-                <a:cs typeface="SF Pro Regular"/>
-                <a:sym typeface="SF Pro Regular"/>
-              </a:defRPr>
-            </a:pPr>
-            <a:r>
-              <a:t>Anotação do dataset de aula</a:t>
-            </a:r>
-          </a:p>
-          <a:p>
-            <a:pPr marL="400050" indent="-400050">
-              <a:spcBef>
-                <a:spcPts val="600"/>
-              </a:spcBef>
-              <a:buSzPct val="100000"/>
-              <a:buChar char="•"/>
-              <a:defRPr sz="1400">
-                <a:solidFill>
-                  <a:srgbClr val="E6F1FA"/>
-                </a:solidFill>
-                <a:latin typeface="SF Pro Regular"/>
-                <a:ea typeface="SF Pro Regular"/>
-                <a:cs typeface="SF Pro Regular"/>
-                <a:sym typeface="SF Pro Regular"/>
-              </a:defRPr>
-            </a:pPr>
-            <a:r>
-              <a:t>Nenhum rótulo do corpus veio da conferência com IA</a:t>
+                <a:latin typeface="SF Pro Bold"/>
+                <a:ea typeface="SF Pro Bold"/>
+                <a:cs typeface="SF Pro Bold"/>
+                <a:sym typeface="SF Pro Bold"/>
+              </a:rPr>
+              <a:t>3% das questões</a:t>
+            </a:r>
+            <a:r>
+              <a:t> ainda estão com a subárea errada.</a:t>
             </a:r>
           </a:p>
         </p:txBody>
@@ -12248,13 +11814,13 @@
       </p:grpSpPr>
       <p:sp>
         <p:nvSpPr>
-          <p:cNvPr id="255" name="Text 0"/>
+          <p:cNvPr id="236" name="Text 0"/>
           <p:cNvSpPr txBox="1"/>
           <p:nvPr/>
         </p:nvSpPr>
         <p:spPr>
           <a:xfrm>
-            <a:off x="914400" y="1378004"/>
+            <a:off x="914400" y="1378003"/>
             <a:ext cx="7315200" cy="304801"/>
           </a:xfrm>
           <a:prstGeom prst="rect">
@@ -12296,13 +11862,13 @@
       </p:sp>
       <p:sp>
         <p:nvSpPr>
-          <p:cNvPr id="256" name="Text 1"/>
+          <p:cNvPr id="237" name="Text 1"/>
           <p:cNvSpPr txBox="1"/>
           <p:nvPr/>
         </p:nvSpPr>
         <p:spPr>
           <a:xfrm>
-            <a:off x="565322" y="1823931"/>
+            <a:off x="565322" y="1823930"/>
             <a:ext cx="8013356" cy="1930401"/>
           </a:xfrm>
           <a:prstGeom prst="rect">
@@ -12337,7 +11903,7 @@
           <a:p>
             <a:pPr/>
             <a:r>
-              <a:t>Para classificar, o TF-IDF foi o melhor (F1 0,91): o assunto está nos termos técnicos. Para similaridade, só o LLM ficou perto das pessoas.</a:t>
+              <a:t>Para classificar, o TF-IDF foi o melhor (F1 0,91), o assunto está nos termos técnicos. Para similaridade, só o LLM ficou perto das pessoas.</a:t>
             </a:r>
           </a:p>
         </p:txBody>
@@ -12381,7 +11947,7 @@
                                       <p:cBhvr>
                                         <p:cTn id="6" fill="hold"/>
                                         <p:tgtEl>
-                                          <p:spTgt spid="255"/>
+                                          <p:spTgt spid="236"/>
                                         </p:tgtEl>
                                         <p:attrNameLst>
                                           <p:attrName>style.visibility</p:attrName>
@@ -12422,7 +11988,7 @@
       </p:par>
     </p:tnLst>
     <p:bldLst>
-      <p:bldP build="whole" bldLvl="1" animBg="1" rev="0" advAuto="0" spid="255" grpId="1"/>
+      <p:bldP build="whole" bldLvl="1" animBg="1" rev="0" advAuto="0" spid="236" grpId="1"/>
     </p:bldLst>
   </p:timing>
 </p:sld>
@@ -12461,7 +12027,7 @@
         <p:spPr>
           <a:xfrm>
             <a:off x="480844" y="2120900"/>
-            <a:ext cx="8046720" cy="901701"/>
+            <a:ext cx="8046719" cy="901701"/>
           </a:xfrm>
           <a:prstGeom prst="rect">
             <a:avLst/>
@@ -12535,14 +12101,94 @@
       </p:grpSpPr>
       <p:sp>
         <p:nvSpPr>
-          <p:cNvPr id="29" name="Text 0"/>
+          <p:cNvPr id="29" name="Shape 2"/>
+          <p:cNvSpPr/>
+          <p:nvPr/>
+        </p:nvSpPr>
+        <p:spPr>
+          <a:xfrm>
+            <a:off x="5956966" y="2305531"/>
+            <a:ext cx="2350711" cy="1787261"/>
+          </a:xfrm>
+          <a:prstGeom prst="roundRect">
+            <a:avLst>
+              <a:gd name="adj" fmla="val 7674"/>
+            </a:avLst>
+          </a:prstGeom>
+          <a:solidFill>
+            <a:srgbClr val="142B47"/>
+          </a:solidFill>
+          <a:ln w="12700">
+            <a:solidFill>
+              <a:srgbClr val="142B47"/>
+            </a:solidFill>
+          </a:ln>
+        </p:spPr>
+        <p:txBody>
+          <a:bodyPr lIns="45718" tIns="45718" rIns="45718" bIns="45718"/>
+          <a:lstStyle/>
+          <a:p>
+            <a:pPr>
+              <a:defRPr>
+                <a:latin typeface="+mj-lt"/>
+                <a:ea typeface="+mj-ea"/>
+                <a:cs typeface="+mj-cs"/>
+                <a:sym typeface="Calibri"/>
+              </a:defRPr>
+            </a:pPr>
+          </a:p>
+        </p:txBody>
+      </p:sp>
+      <p:sp>
+        <p:nvSpPr>
+          <p:cNvPr id="30" name="Shape 2"/>
+          <p:cNvSpPr/>
+          <p:nvPr/>
+        </p:nvSpPr>
+        <p:spPr>
+          <a:xfrm>
+            <a:off x="3396644" y="2305531"/>
+            <a:ext cx="2350712" cy="1787261"/>
+          </a:xfrm>
+          <a:prstGeom prst="roundRect">
+            <a:avLst>
+              <a:gd name="adj" fmla="val 7674"/>
+            </a:avLst>
+          </a:prstGeom>
+          <a:solidFill>
+            <a:srgbClr val="142B47"/>
+          </a:solidFill>
+          <a:ln w="12700">
+            <a:solidFill>
+              <a:srgbClr val="142B47"/>
+            </a:solidFill>
+          </a:ln>
+        </p:spPr>
+        <p:txBody>
+          <a:bodyPr lIns="45718" tIns="45718" rIns="45718" bIns="45718"/>
+          <a:lstStyle/>
+          <a:p>
+            <a:pPr>
+              <a:defRPr>
+                <a:latin typeface="+mj-lt"/>
+                <a:ea typeface="+mj-ea"/>
+                <a:cs typeface="+mj-cs"/>
+                <a:sym typeface="Calibri"/>
+              </a:defRPr>
+            </a:pPr>
+          </a:p>
+        </p:txBody>
+      </p:sp>
+      <p:sp>
+        <p:nvSpPr>
+          <p:cNvPr id="31" name="Text 0"/>
           <p:cNvSpPr txBox="1"/>
           <p:nvPr/>
         </p:nvSpPr>
         <p:spPr>
           <a:xfrm>
-            <a:off x="457200" y="686082"/>
-            <a:ext cx="8229600" cy="609601"/>
+            <a:off x="457200" y="717000"/>
+            <a:ext cx="8229601" cy="901701"/>
           </a:xfrm>
           <a:prstGeom prst="rect">
             <a:avLst/>
@@ -12562,7 +12208,7 @@
           </a:bodyPr>
           <a:lstStyle>
             <a:lvl1pPr algn="ctr">
-              <a:defRPr sz="4000">
+              <a:defRPr sz="6000">
                 <a:solidFill>
                   <a:srgbClr val="C24F80"/>
                 </a:solidFill>
@@ -12583,14 +12229,14 @@
       </p:sp>
       <p:sp>
         <p:nvSpPr>
-          <p:cNvPr id="30" name="Text 1"/>
+          <p:cNvPr id="32" name="Text 1"/>
           <p:cNvSpPr txBox="1"/>
           <p:nvPr/>
         </p:nvSpPr>
         <p:spPr>
           <a:xfrm>
-            <a:off x="457200" y="1291872"/>
-            <a:ext cx="8229600" cy="266701"/>
+            <a:off x="457199" y="1638330"/>
+            <a:ext cx="8229601" cy="266701"/>
           </a:xfrm>
           <a:prstGeom prst="rect">
             <a:avLst/>
@@ -12631,18 +12277,18 @@
       </p:sp>
       <p:sp>
         <p:nvSpPr>
-          <p:cNvPr id="31" name="Shape 2"/>
+          <p:cNvPr id="33" name="Shape 2"/>
           <p:cNvSpPr/>
           <p:nvPr/>
         </p:nvSpPr>
         <p:spPr>
           <a:xfrm>
-            <a:off x="914400" y="1996722"/>
-            <a:ext cx="2194561" cy="1371601"/>
+            <a:off x="836323" y="2305531"/>
+            <a:ext cx="2350711" cy="1787261"/>
           </a:xfrm>
           <a:prstGeom prst="roundRect">
             <a:avLst>
-              <a:gd name="adj" fmla="val 10000"/>
+              <a:gd name="adj" fmla="val 7674"/>
             </a:avLst>
           </a:prstGeom>
           <a:solidFill>
@@ -12655,23 +12301,30 @@
           </a:ln>
         </p:spPr>
         <p:txBody>
-          <a:bodyPr lIns="45719" rIns="45719"/>
+          <a:bodyPr lIns="45718" tIns="45718" rIns="45718" bIns="45718"/>
           <a:lstStyle/>
           <a:p>
-            <a:pPr/>
-          </a:p>
-        </p:txBody>
-      </p:sp>
-      <p:sp>
-        <p:nvSpPr>
-          <p:cNvPr id="32" name="Text 3"/>
+            <a:pPr>
+              <a:defRPr>
+                <a:latin typeface="+mj-lt"/>
+                <a:ea typeface="+mj-ea"/>
+                <a:cs typeface="+mj-cs"/>
+                <a:sym typeface="Calibri"/>
+              </a:defRPr>
+            </a:pPr>
+          </a:p>
+        </p:txBody>
+      </p:sp>
+      <p:sp>
+        <p:nvSpPr>
+          <p:cNvPr id="34" name="Text 3"/>
           <p:cNvSpPr txBox="1"/>
           <p:nvPr/>
         </p:nvSpPr>
         <p:spPr>
           <a:xfrm>
-            <a:off x="1005839" y="2114070"/>
-            <a:ext cx="2011680" cy="609601"/>
+            <a:off x="1005839" y="2460528"/>
+            <a:ext cx="2011679" cy="609601"/>
           </a:xfrm>
           <a:prstGeom prst="rect">
             <a:avLst/>
@@ -12712,14 +12365,14 @@
       </p:sp>
       <p:sp>
         <p:nvSpPr>
-          <p:cNvPr id="33" name="Text 4"/>
+          <p:cNvPr id="35" name="Text 4"/>
           <p:cNvSpPr txBox="1"/>
           <p:nvPr/>
         </p:nvSpPr>
         <p:spPr>
           <a:xfrm>
-            <a:off x="1005839" y="2751102"/>
-            <a:ext cx="2011680" cy="203201"/>
+            <a:off x="1005839" y="3097560"/>
+            <a:ext cx="2011679" cy="762001"/>
           </a:xfrm>
           <a:prstGeom prst="rect">
             <a:avLst/>
@@ -12739,7 +12392,7 @@
           </a:bodyPr>
           <a:lstStyle>
             <a:lvl1pPr algn="ctr">
-              <a:defRPr sz="1400">
+              <a:defRPr sz="2500">
                 <a:solidFill>
                   <a:srgbClr val="B9D3EE"/>
                 </a:solidFill>
@@ -12760,46 +12413,13 @@
       </p:sp>
       <p:sp>
         <p:nvSpPr>
-          <p:cNvPr id="34" name="Shape 5"/>
-          <p:cNvSpPr/>
-          <p:nvPr/>
-        </p:nvSpPr>
-        <p:spPr>
-          <a:xfrm>
-            <a:off x="3474720" y="1996722"/>
-            <a:ext cx="2194561" cy="1371601"/>
-          </a:xfrm>
-          <a:prstGeom prst="roundRect">
-            <a:avLst>
-              <a:gd name="adj" fmla="val 10000"/>
-            </a:avLst>
-          </a:prstGeom>
-          <a:solidFill>
-            <a:srgbClr val="142B47"/>
-          </a:solidFill>
-          <a:ln w="12700">
-            <a:solidFill>
-              <a:srgbClr val="142B47"/>
-            </a:solidFill>
-          </a:ln>
-        </p:spPr>
-        <p:txBody>
-          <a:bodyPr lIns="45719" rIns="45719"/>
-          <a:lstStyle/>
-          <a:p>
-            <a:pPr/>
-          </a:p>
-        </p:txBody>
-      </p:sp>
-      <p:sp>
-        <p:nvSpPr>
-          <p:cNvPr id="35" name="Text 6"/>
+          <p:cNvPr id="36" name="Text 6"/>
           <p:cNvSpPr txBox="1"/>
           <p:nvPr/>
         </p:nvSpPr>
         <p:spPr>
           <a:xfrm>
-            <a:off x="3566159" y="2114070"/>
+            <a:off x="3566159" y="2460528"/>
             <a:ext cx="2011680" cy="609601"/>
           </a:xfrm>
           <a:prstGeom prst="rect">
@@ -12841,14 +12461,14 @@
       </p:sp>
       <p:sp>
         <p:nvSpPr>
-          <p:cNvPr id="36" name="Text 7"/>
+          <p:cNvPr id="37" name="Text 7"/>
           <p:cNvSpPr txBox="1"/>
           <p:nvPr/>
         </p:nvSpPr>
         <p:spPr>
           <a:xfrm>
-            <a:off x="3566159" y="2751102"/>
-            <a:ext cx="2011680" cy="203201"/>
+            <a:off x="3566159" y="3097560"/>
+            <a:ext cx="2011680" cy="762001"/>
           </a:xfrm>
           <a:prstGeom prst="rect">
             <a:avLst/>
@@ -12868,7 +12488,7 @@
           </a:bodyPr>
           <a:lstStyle>
             <a:lvl1pPr algn="ctr">
-              <a:defRPr sz="1400">
+              <a:defRPr sz="2500">
                 <a:solidFill>
                   <a:srgbClr val="B9D3EE"/>
                 </a:solidFill>
@@ -12889,46 +12509,13 @@
       </p:sp>
       <p:sp>
         <p:nvSpPr>
-          <p:cNvPr id="37" name="Shape 8"/>
-          <p:cNvSpPr/>
-          <p:nvPr/>
-        </p:nvSpPr>
-        <p:spPr>
-          <a:xfrm>
-            <a:off x="6035040" y="1996722"/>
-            <a:ext cx="2194561" cy="1371601"/>
-          </a:xfrm>
-          <a:prstGeom prst="roundRect">
-            <a:avLst>
-              <a:gd name="adj" fmla="val 10000"/>
-            </a:avLst>
-          </a:prstGeom>
-          <a:solidFill>
-            <a:srgbClr val="142B47"/>
-          </a:solidFill>
-          <a:ln w="12700">
-            <a:solidFill>
-              <a:srgbClr val="142B47"/>
-            </a:solidFill>
-          </a:ln>
-        </p:spPr>
-        <p:txBody>
-          <a:bodyPr lIns="45719" rIns="45719"/>
-          <a:lstStyle/>
-          <a:p>
-            <a:pPr/>
-          </a:p>
-        </p:txBody>
-      </p:sp>
-      <p:sp>
-        <p:nvSpPr>
           <p:cNvPr id="38" name="Text 9"/>
           <p:cNvSpPr txBox="1"/>
           <p:nvPr/>
         </p:nvSpPr>
         <p:spPr>
           <a:xfrm>
-            <a:off x="6126479" y="2114070"/>
+            <a:off x="6126479" y="2460528"/>
             <a:ext cx="2011680" cy="609601"/>
           </a:xfrm>
           <a:prstGeom prst="rect">
@@ -12976,8 +12563,8 @@
         </p:nvSpPr>
         <p:spPr>
           <a:xfrm>
-            <a:off x="6126479" y="2751102"/>
-            <a:ext cx="2011680" cy="406401"/>
+            <a:off x="6126479" y="3097560"/>
+            <a:ext cx="2011680" cy="762001"/>
           </a:xfrm>
           <a:prstGeom prst="rect">
             <a:avLst/>
@@ -12997,7 +12584,7 @@
           </a:bodyPr>
           <a:lstStyle>
             <a:lvl1pPr algn="ctr">
-              <a:defRPr sz="1400">
+              <a:defRPr sz="2500">
                 <a:solidFill>
                   <a:srgbClr val="B9D3EE"/>
                 </a:solidFill>
@@ -13012,54 +12599,6 @@
             <a:pPr/>
             <a:r>
               <a:t>Segurança da Informação</a:t>
-            </a:r>
-          </a:p>
-        </p:txBody>
-      </p:sp>
-      <p:sp>
-        <p:nvSpPr>
-          <p:cNvPr id="40" name="Text 11"/>
-          <p:cNvSpPr txBox="1"/>
-          <p:nvPr/>
-        </p:nvSpPr>
-        <p:spPr>
-          <a:xfrm>
-            <a:off x="457200" y="3665502"/>
-            <a:ext cx="8229600" cy="457201"/>
-          </a:xfrm>
-          <a:prstGeom prst="rect">
-            <a:avLst/>
-          </a:prstGeom>
-          <a:ln w="12700">
-            <a:miter lim="400000"/>
-          </a:ln>
-          <a:extLst>
-            <a:ext uri="{C572A759-6A51-4108-AA02-DFA0A04FC94B}">
-              <ma14:wrappingTextBoxFlag xmlns:ma14="http://schemas.microsoft.com/office/mac/drawingml/2011/main" val="1"/>
-            </a:ext>
-          </a:extLst>
-        </p:spPr>
-        <p:txBody>
-          <a:bodyPr lIns="0" tIns="0" rIns="0" bIns="0" anchor="ctr">
-            <a:spAutoFit/>
-          </a:bodyPr>
-          <a:lstStyle>
-            <a:lvl1pPr algn="ctr">
-              <a:defRPr sz="1500">
-                <a:solidFill>
-                  <a:srgbClr val="142B47"/>
-                </a:solidFill>
-                <a:latin typeface="SF Pro Bold"/>
-                <a:ea typeface="SF Pro Bold"/>
-                <a:cs typeface="SF Pro Bold"/>
-                <a:sym typeface="SF Pro Bold"/>
-              </a:defRPr>
-            </a:lvl1pPr>
-          </a:lstStyle>
-          <a:p>
-            <a:pPr/>
-            <a:r>
-              <a:t>As 3 subáreas exigidas passam de 500  ·  BD (469) e Governança (139) são extras  ·  total: 2.506 questões</a:t>
             </a:r>
           </a:p>
         </p:txBody>
@@ -13099,7 +12638,7 @@
       </p:grpSpPr>
       <p:sp>
         <p:nvSpPr>
-          <p:cNvPr id="42" name="Text 0"/>
+          <p:cNvPr id="41" name="Text 0"/>
           <p:cNvSpPr txBox="1"/>
           <p:nvPr/>
         </p:nvSpPr>
@@ -13147,14 +12686,14 @@
       </p:sp>
       <p:sp>
         <p:nvSpPr>
-          <p:cNvPr id="43" name="Text 1"/>
+          <p:cNvPr id="42" name="Text 1"/>
           <p:cNvSpPr txBox="1"/>
           <p:nvPr/>
         </p:nvSpPr>
         <p:spPr>
           <a:xfrm>
-            <a:off x="457200" y="1546107"/>
-            <a:ext cx="8229601" cy="266701"/>
+            <a:off x="457200" y="1527057"/>
+            <a:ext cx="8229601" cy="304801"/>
           </a:xfrm>
           <a:prstGeom prst="rect">
             <a:avLst/>
@@ -13174,7 +12713,7 @@
           </a:bodyPr>
           <a:lstStyle>
             <a:lvl1pPr algn="ctr">
-              <a:defRPr>
+              <a:defRPr sz="2000">
                 <a:solidFill>
                   <a:srgbClr val="C24F80"/>
                 </a:solidFill>
@@ -13188,21 +12727,21 @@
           <a:p>
             <a:pPr/>
             <a:r>
-              <a:t>etapas aplicadas em cada prova</a:t>
-            </a:r>
-          </a:p>
-        </p:txBody>
-      </p:sp>
-      <p:sp>
-        <p:nvSpPr>
-          <p:cNvPr id="44" name="Shape 2"/>
+              <a:t>etapas aplicadas</a:t>
+            </a:r>
+          </a:p>
+        </p:txBody>
+      </p:sp>
+      <p:sp>
+        <p:nvSpPr>
+          <p:cNvPr id="43" name="Shape 2"/>
           <p:cNvSpPr/>
           <p:nvPr/>
         </p:nvSpPr>
         <p:spPr>
           <a:xfrm>
             <a:off x="457200" y="2285462"/>
-            <a:ext cx="777241" cy="777241"/>
+            <a:ext cx="777242" cy="777243"/>
           </a:xfrm>
           <a:prstGeom prst="ellipse">
             <a:avLst/>
@@ -13217,23 +12756,30 @@
           </a:ln>
         </p:spPr>
         <p:txBody>
-          <a:bodyPr lIns="45719" rIns="45719"/>
+          <a:bodyPr lIns="45718" tIns="45718" rIns="45718" bIns="45718"/>
           <a:lstStyle/>
           <a:p>
-            <a:pPr/>
-          </a:p>
-        </p:txBody>
-      </p:sp>
-      <p:sp>
-        <p:nvSpPr>
-          <p:cNvPr id="45" name="Text 3"/>
+            <a:pPr>
+              <a:defRPr>
+                <a:latin typeface="+mj-lt"/>
+                <a:ea typeface="+mj-ea"/>
+                <a:cs typeface="+mj-cs"/>
+                <a:sym typeface="Calibri"/>
+              </a:defRPr>
+            </a:pPr>
+          </a:p>
+        </p:txBody>
+      </p:sp>
+      <p:sp>
+        <p:nvSpPr>
+          <p:cNvPr id="44" name="Text 3"/>
           <p:cNvSpPr txBox="1"/>
           <p:nvPr/>
         </p:nvSpPr>
         <p:spPr>
           <a:xfrm>
-            <a:off x="457200" y="2597882"/>
-            <a:ext cx="777241" cy="152401"/>
+            <a:off x="457199" y="2597881"/>
+            <a:ext cx="777243" cy="152401"/>
           </a:xfrm>
           <a:prstGeom prst="rect">
             <a:avLst/>
@@ -13274,14 +12820,14 @@
       </p:sp>
       <p:sp>
         <p:nvSpPr>
-          <p:cNvPr id="46" name="Text 4"/>
+          <p:cNvPr id="45" name="Text 4"/>
           <p:cNvSpPr txBox="1"/>
           <p:nvPr/>
         </p:nvSpPr>
         <p:spPr>
           <a:xfrm>
-            <a:off x="137160" y="3161277"/>
-            <a:ext cx="1417321" cy="177801"/>
+            <a:off x="137159" y="3161276"/>
+            <a:ext cx="1417323" cy="177801"/>
           </a:xfrm>
           <a:prstGeom prst="rect">
             <a:avLst/>
@@ -13322,14 +12868,14 @@
       </p:sp>
       <p:sp>
         <p:nvSpPr>
-          <p:cNvPr id="47" name="Shape 5"/>
+          <p:cNvPr id="46" name="Shape 5"/>
           <p:cNvSpPr/>
           <p:nvPr/>
         </p:nvSpPr>
         <p:spPr>
           <a:xfrm>
-            <a:off x="1307592" y="2699505"/>
-            <a:ext cx="566929" cy="1"/>
+            <a:off x="1307591" y="2699504"/>
+            <a:ext cx="566930" cy="2"/>
           </a:xfrm>
           <a:prstGeom prst="line">
             <a:avLst/>
@@ -13342,7 +12888,7 @@
           </a:ln>
         </p:spPr>
         <p:txBody>
-          <a:bodyPr lIns="45719" rIns="45719"/>
+          <a:bodyPr lIns="45718" tIns="45718" rIns="45718" bIns="45718"/>
           <a:lstStyle/>
           <a:p>
             <a:pPr/>
@@ -13351,14 +12897,14 @@
       </p:sp>
       <p:sp>
         <p:nvSpPr>
-          <p:cNvPr id="48" name="Shape 6"/>
+          <p:cNvPr id="47" name="Shape 6"/>
           <p:cNvSpPr/>
           <p:nvPr/>
         </p:nvSpPr>
         <p:spPr>
           <a:xfrm>
-            <a:off x="1947672" y="2310885"/>
-            <a:ext cx="777241" cy="777241"/>
+            <a:off x="1947672" y="2310884"/>
+            <a:ext cx="777243" cy="777243"/>
           </a:xfrm>
           <a:prstGeom prst="ellipse">
             <a:avLst/>
@@ -13373,23 +12919,30 @@
           </a:ln>
         </p:spPr>
         <p:txBody>
-          <a:bodyPr lIns="45719" rIns="45719"/>
+          <a:bodyPr lIns="45718" tIns="45718" rIns="45718" bIns="45718"/>
           <a:lstStyle/>
           <a:p>
-            <a:pPr/>
-          </a:p>
-        </p:txBody>
-      </p:sp>
-      <p:sp>
-        <p:nvSpPr>
-          <p:cNvPr id="49" name="Text 7"/>
+            <a:pPr>
+              <a:defRPr>
+                <a:latin typeface="+mj-lt"/>
+                <a:ea typeface="+mj-ea"/>
+                <a:cs typeface="+mj-cs"/>
+                <a:sym typeface="Calibri"/>
+              </a:defRPr>
+            </a:pPr>
+          </a:p>
+        </p:txBody>
+      </p:sp>
+      <p:sp>
+        <p:nvSpPr>
+          <p:cNvPr id="48" name="Text 7"/>
           <p:cNvSpPr txBox="1"/>
           <p:nvPr/>
         </p:nvSpPr>
         <p:spPr>
           <a:xfrm>
-            <a:off x="1947672" y="2623305"/>
-            <a:ext cx="777241" cy="152401"/>
+            <a:off x="1947671" y="2623304"/>
+            <a:ext cx="777243" cy="152401"/>
           </a:xfrm>
           <a:prstGeom prst="rect">
             <a:avLst/>
@@ -13430,14 +12983,14 @@
       </p:sp>
       <p:sp>
         <p:nvSpPr>
-          <p:cNvPr id="50" name="Text 8"/>
+          <p:cNvPr id="49" name="Text 8"/>
           <p:cNvSpPr txBox="1"/>
           <p:nvPr/>
         </p:nvSpPr>
         <p:spPr>
           <a:xfrm>
             <a:off x="1627632" y="3161277"/>
-            <a:ext cx="1417321" cy="355601"/>
+            <a:ext cx="1417322" cy="355601"/>
           </a:xfrm>
           <a:prstGeom prst="rect">
             <a:avLst/>
@@ -13478,14 +13031,14 @@
       </p:sp>
       <p:sp>
         <p:nvSpPr>
-          <p:cNvPr id="51" name="Shape 9"/>
+          <p:cNvPr id="50" name="Shape 9"/>
           <p:cNvSpPr/>
           <p:nvPr/>
         </p:nvSpPr>
         <p:spPr>
           <a:xfrm>
-            <a:off x="2798064" y="2699505"/>
-            <a:ext cx="566929" cy="1"/>
+            <a:off x="2798064" y="2699504"/>
+            <a:ext cx="566930" cy="2"/>
           </a:xfrm>
           <a:prstGeom prst="line">
             <a:avLst/>
@@ -13498,7 +13051,7 @@
           </a:ln>
         </p:spPr>
         <p:txBody>
-          <a:bodyPr lIns="45719" rIns="45719"/>
+          <a:bodyPr lIns="45718" tIns="45718" rIns="45718" bIns="45718"/>
           <a:lstStyle/>
           <a:p>
             <a:pPr/>
@@ -13507,14 +13060,14 @@
       </p:sp>
       <p:sp>
         <p:nvSpPr>
-          <p:cNvPr id="52" name="Shape 10"/>
+          <p:cNvPr id="51" name="Shape 10"/>
           <p:cNvSpPr/>
           <p:nvPr/>
         </p:nvSpPr>
         <p:spPr>
           <a:xfrm>
-            <a:off x="3438144" y="2310885"/>
-            <a:ext cx="777241" cy="777241"/>
+            <a:off x="3438144" y="2310884"/>
+            <a:ext cx="777243" cy="777243"/>
           </a:xfrm>
           <a:prstGeom prst="ellipse">
             <a:avLst/>
@@ -13529,23 +13082,30 @@
           </a:ln>
         </p:spPr>
         <p:txBody>
-          <a:bodyPr lIns="45719" rIns="45719"/>
+          <a:bodyPr lIns="45718" tIns="45718" rIns="45718" bIns="45718"/>
           <a:lstStyle/>
           <a:p>
-            <a:pPr/>
-          </a:p>
-        </p:txBody>
-      </p:sp>
-      <p:sp>
-        <p:nvSpPr>
-          <p:cNvPr id="53" name="Text 11"/>
+            <a:pPr>
+              <a:defRPr>
+                <a:latin typeface="+mj-lt"/>
+                <a:ea typeface="+mj-ea"/>
+                <a:cs typeface="+mj-cs"/>
+                <a:sym typeface="Calibri"/>
+              </a:defRPr>
+            </a:pPr>
+          </a:p>
+        </p:txBody>
+      </p:sp>
+      <p:sp>
+        <p:nvSpPr>
+          <p:cNvPr id="52" name="Text 11"/>
           <p:cNvSpPr txBox="1"/>
           <p:nvPr/>
         </p:nvSpPr>
         <p:spPr>
           <a:xfrm>
-            <a:off x="3438144" y="2623305"/>
-            <a:ext cx="777241" cy="152401"/>
+            <a:off x="3438144" y="2623304"/>
+            <a:ext cx="777242" cy="152401"/>
           </a:xfrm>
           <a:prstGeom prst="rect">
             <a:avLst/>
@@ -13586,14 +13146,14 @@
       </p:sp>
       <p:sp>
         <p:nvSpPr>
-          <p:cNvPr id="54" name="Text 12"/>
+          <p:cNvPr id="53" name="Text 12"/>
           <p:cNvSpPr txBox="1"/>
           <p:nvPr/>
         </p:nvSpPr>
         <p:spPr>
           <a:xfrm>
             <a:off x="3118104" y="3161277"/>
-            <a:ext cx="1417321" cy="355601"/>
+            <a:ext cx="1417322" cy="355601"/>
           </a:xfrm>
           <a:prstGeom prst="rect">
             <a:avLst/>
@@ -13634,14 +13194,14 @@
       </p:sp>
       <p:sp>
         <p:nvSpPr>
-          <p:cNvPr id="55" name="Shape 13"/>
+          <p:cNvPr id="54" name="Shape 13"/>
           <p:cNvSpPr/>
           <p:nvPr/>
         </p:nvSpPr>
         <p:spPr>
           <a:xfrm>
-            <a:off x="4288535" y="2699505"/>
-            <a:ext cx="566929" cy="1"/>
+            <a:off x="4288535" y="2699504"/>
+            <a:ext cx="566930" cy="2"/>
           </a:xfrm>
           <a:prstGeom prst="line">
             <a:avLst/>
@@ -13654,7 +13214,7 @@
           </a:ln>
         </p:spPr>
         <p:txBody>
-          <a:bodyPr lIns="45719" rIns="45719"/>
+          <a:bodyPr lIns="45718" tIns="45718" rIns="45718" bIns="45718"/>
           <a:lstStyle/>
           <a:p>
             <a:pPr/>
@@ -13663,14 +13223,14 @@
       </p:sp>
       <p:sp>
         <p:nvSpPr>
-          <p:cNvPr id="56" name="Shape 14"/>
+          <p:cNvPr id="55" name="Shape 14"/>
           <p:cNvSpPr/>
           <p:nvPr/>
         </p:nvSpPr>
         <p:spPr>
           <a:xfrm>
-            <a:off x="4928615" y="2310885"/>
-            <a:ext cx="777241" cy="777241"/>
+            <a:off x="4928615" y="2310884"/>
+            <a:ext cx="777243" cy="777243"/>
           </a:xfrm>
           <a:prstGeom prst="ellipse">
             <a:avLst/>
@@ -13685,23 +13245,30 @@
           </a:ln>
         </p:spPr>
         <p:txBody>
-          <a:bodyPr lIns="45719" rIns="45719"/>
+          <a:bodyPr lIns="45718" tIns="45718" rIns="45718" bIns="45718"/>
           <a:lstStyle/>
           <a:p>
-            <a:pPr/>
-          </a:p>
-        </p:txBody>
-      </p:sp>
-      <p:sp>
-        <p:nvSpPr>
-          <p:cNvPr id="57" name="Text 15"/>
+            <a:pPr>
+              <a:defRPr>
+                <a:latin typeface="+mj-lt"/>
+                <a:ea typeface="+mj-ea"/>
+                <a:cs typeface="+mj-cs"/>
+                <a:sym typeface="Calibri"/>
+              </a:defRPr>
+            </a:pPr>
+          </a:p>
+        </p:txBody>
+      </p:sp>
+      <p:sp>
+        <p:nvSpPr>
+          <p:cNvPr id="56" name="Text 15"/>
           <p:cNvSpPr txBox="1"/>
           <p:nvPr/>
         </p:nvSpPr>
         <p:spPr>
           <a:xfrm>
-            <a:off x="4928615" y="2623305"/>
-            <a:ext cx="777241" cy="152401"/>
+            <a:off x="4928615" y="2623304"/>
+            <a:ext cx="777242" cy="152401"/>
           </a:xfrm>
           <a:prstGeom prst="rect">
             <a:avLst/>
@@ -13742,14 +13309,14 @@
       </p:sp>
       <p:sp>
         <p:nvSpPr>
-          <p:cNvPr id="58" name="Text 16"/>
+          <p:cNvPr id="57" name="Text 16"/>
           <p:cNvSpPr txBox="1"/>
           <p:nvPr/>
         </p:nvSpPr>
         <p:spPr>
           <a:xfrm>
             <a:off x="4608576" y="3161277"/>
-            <a:ext cx="1417321" cy="355601"/>
+            <a:ext cx="1417322" cy="355601"/>
           </a:xfrm>
           <a:prstGeom prst="rect">
             <a:avLst/>
@@ -13790,14 +13357,14 @@
       </p:sp>
       <p:sp>
         <p:nvSpPr>
-          <p:cNvPr id="59" name="Shape 17"/>
+          <p:cNvPr id="58" name="Shape 17"/>
           <p:cNvSpPr/>
           <p:nvPr/>
         </p:nvSpPr>
         <p:spPr>
           <a:xfrm>
-            <a:off x="5779008" y="2699505"/>
-            <a:ext cx="566929" cy="1"/>
+            <a:off x="5779008" y="2699504"/>
+            <a:ext cx="566930" cy="2"/>
           </a:xfrm>
           <a:prstGeom prst="line">
             <a:avLst/>
@@ -13810,7 +13377,7 @@
           </a:ln>
         </p:spPr>
         <p:txBody>
-          <a:bodyPr lIns="45719" rIns="45719"/>
+          <a:bodyPr lIns="45718" tIns="45718" rIns="45718" bIns="45718"/>
           <a:lstStyle/>
           <a:p>
             <a:pPr/>
@@ -13819,14 +13386,14 @@
       </p:sp>
       <p:sp>
         <p:nvSpPr>
-          <p:cNvPr id="60" name="Shape 18"/>
+          <p:cNvPr id="59" name="Shape 18"/>
           <p:cNvSpPr/>
           <p:nvPr/>
         </p:nvSpPr>
         <p:spPr>
           <a:xfrm>
-            <a:off x="6419088" y="2310885"/>
-            <a:ext cx="777241" cy="777241"/>
+            <a:off x="6419088" y="2310884"/>
+            <a:ext cx="777243" cy="777243"/>
           </a:xfrm>
           <a:prstGeom prst="ellipse">
             <a:avLst/>
@@ -13841,23 +13408,30 @@
           </a:ln>
         </p:spPr>
         <p:txBody>
-          <a:bodyPr lIns="45719" rIns="45719"/>
+          <a:bodyPr lIns="45718" tIns="45718" rIns="45718" bIns="45718"/>
           <a:lstStyle/>
           <a:p>
-            <a:pPr/>
-          </a:p>
-        </p:txBody>
-      </p:sp>
-      <p:sp>
-        <p:nvSpPr>
-          <p:cNvPr id="61" name="Text 19"/>
+            <a:pPr>
+              <a:defRPr>
+                <a:latin typeface="+mj-lt"/>
+                <a:ea typeface="+mj-ea"/>
+                <a:cs typeface="+mj-cs"/>
+                <a:sym typeface="Calibri"/>
+              </a:defRPr>
+            </a:pPr>
+          </a:p>
+        </p:txBody>
+      </p:sp>
+      <p:sp>
+        <p:nvSpPr>
+          <p:cNvPr id="60" name="Text 19"/>
           <p:cNvSpPr txBox="1"/>
           <p:nvPr/>
         </p:nvSpPr>
         <p:spPr>
           <a:xfrm>
-            <a:off x="6419088" y="2623305"/>
-            <a:ext cx="777241" cy="152401"/>
+            <a:off x="6419088" y="2623304"/>
+            <a:ext cx="777242" cy="152401"/>
           </a:xfrm>
           <a:prstGeom prst="rect">
             <a:avLst/>
@@ -13898,14 +13472,14 @@
       </p:sp>
       <p:sp>
         <p:nvSpPr>
-          <p:cNvPr id="62" name="Text 20"/>
+          <p:cNvPr id="61" name="Text 20"/>
           <p:cNvSpPr txBox="1"/>
           <p:nvPr/>
         </p:nvSpPr>
         <p:spPr>
           <a:xfrm>
             <a:off x="6099047" y="3161277"/>
-            <a:ext cx="1417321" cy="355601"/>
+            <a:ext cx="1417322" cy="355601"/>
           </a:xfrm>
           <a:prstGeom prst="rect">
             <a:avLst/>
@@ -13946,14 +13520,14 @@
       </p:sp>
       <p:sp>
         <p:nvSpPr>
-          <p:cNvPr id="63" name="Shape 21"/>
+          <p:cNvPr id="62" name="Shape 21"/>
           <p:cNvSpPr/>
           <p:nvPr/>
         </p:nvSpPr>
         <p:spPr>
           <a:xfrm>
-            <a:off x="7269480" y="2699505"/>
-            <a:ext cx="566929" cy="1"/>
+            <a:off x="7269480" y="2699504"/>
+            <a:ext cx="566930" cy="2"/>
           </a:xfrm>
           <a:prstGeom prst="line">
             <a:avLst/>
@@ -13966,7 +13540,7 @@
           </a:ln>
         </p:spPr>
         <p:txBody>
-          <a:bodyPr lIns="45719" rIns="45719"/>
+          <a:bodyPr lIns="45718" tIns="45718" rIns="45718" bIns="45718"/>
           <a:lstStyle/>
           <a:p>
             <a:pPr/>
@@ -13975,14 +13549,14 @@
       </p:sp>
       <p:sp>
         <p:nvSpPr>
-          <p:cNvPr id="64" name="Shape 22"/>
+          <p:cNvPr id="63" name="Shape 22"/>
           <p:cNvSpPr/>
           <p:nvPr/>
         </p:nvSpPr>
         <p:spPr>
           <a:xfrm>
-            <a:off x="7909559" y="2310885"/>
-            <a:ext cx="777241" cy="777241"/>
+            <a:off x="7909559" y="2310884"/>
+            <a:ext cx="777243" cy="777243"/>
           </a:xfrm>
           <a:prstGeom prst="ellipse">
             <a:avLst/>
@@ -13995,23 +13569,30 @@
           </a:ln>
         </p:spPr>
         <p:txBody>
-          <a:bodyPr lIns="45719" rIns="45719"/>
+          <a:bodyPr lIns="45718" tIns="45718" rIns="45718" bIns="45718"/>
           <a:lstStyle/>
           <a:p>
-            <a:pPr/>
-          </a:p>
-        </p:txBody>
-      </p:sp>
-      <p:sp>
-        <p:nvSpPr>
-          <p:cNvPr id="65" name="Text 23"/>
+            <a:pPr>
+              <a:defRPr>
+                <a:latin typeface="+mj-lt"/>
+                <a:ea typeface="+mj-ea"/>
+                <a:cs typeface="+mj-cs"/>
+                <a:sym typeface="Calibri"/>
+              </a:defRPr>
+            </a:pPr>
+          </a:p>
+        </p:txBody>
+      </p:sp>
+      <p:sp>
+        <p:nvSpPr>
+          <p:cNvPr id="64" name="Text 23"/>
           <p:cNvSpPr txBox="1"/>
           <p:nvPr/>
         </p:nvSpPr>
         <p:spPr>
           <a:xfrm>
-            <a:off x="7909559" y="2623305"/>
-            <a:ext cx="777241" cy="152401"/>
+            <a:off x="7909559" y="2623304"/>
+            <a:ext cx="777242" cy="152401"/>
           </a:xfrm>
           <a:prstGeom prst="rect">
             <a:avLst/>
@@ -14052,14 +13633,14 @@
       </p:sp>
       <p:sp>
         <p:nvSpPr>
-          <p:cNvPr id="66" name="Text 24"/>
+          <p:cNvPr id="65" name="Text 24"/>
           <p:cNvSpPr txBox="1"/>
           <p:nvPr/>
         </p:nvSpPr>
         <p:spPr>
           <a:xfrm>
-            <a:off x="7589519" y="3161277"/>
-            <a:ext cx="1417321" cy="355601"/>
+            <a:off x="7589518" y="3161277"/>
+            <a:ext cx="1417322" cy="355601"/>
           </a:xfrm>
           <a:prstGeom prst="rect">
             <a:avLst/>
@@ -14100,7 +13681,7 @@
       </p:sp>
       <p:sp>
         <p:nvSpPr>
-          <p:cNvPr id="67" name="Text 25"/>
+          <p:cNvPr id="66" name="Text 25"/>
           <p:cNvSpPr txBox="1"/>
           <p:nvPr/>
         </p:nvSpPr>
@@ -14181,14 +13762,14 @@
       </p:grpSpPr>
       <p:sp>
         <p:nvSpPr>
-          <p:cNvPr id="69" name="Text 0"/>
+          <p:cNvPr id="68" name="Text 0"/>
           <p:cNvSpPr txBox="1"/>
           <p:nvPr/>
         </p:nvSpPr>
         <p:spPr>
           <a:xfrm>
-            <a:off x="457200" y="381000"/>
-            <a:ext cx="8229600" cy="609601"/>
+            <a:off x="313133" y="1941258"/>
+            <a:ext cx="8721123" cy="1066801"/>
           </a:xfrm>
           <a:prstGeom prst="rect">
             <a:avLst/>
@@ -14208,7 +13789,7 @@
           </a:bodyPr>
           <a:lstStyle>
             <a:lvl1pPr algn="ctr">
-              <a:defRPr sz="4000">
+              <a:defRPr sz="7000">
                 <a:solidFill>
                   <a:srgbClr val="142B47"/>
                 </a:solidFill>
@@ -14222,54 +13803,21 @@
           <a:p>
             <a:pPr/>
             <a:r>
-              <a:t>O que foi descartado</a:t>
-            </a:r>
-          </a:p>
-        </p:txBody>
-      </p:sp>
-      <p:sp>
-        <p:nvSpPr>
-          <p:cNvPr id="70" name="Shape 1"/>
-          <p:cNvSpPr/>
-          <p:nvPr/>
-        </p:nvSpPr>
-        <p:spPr>
-          <a:xfrm>
-            <a:off x="731519" y="1234439"/>
-            <a:ext cx="3657601" cy="3017522"/>
-          </a:xfrm>
-          <a:prstGeom prst="roundRect">
-            <a:avLst>
-              <a:gd name="adj" fmla="val 4545"/>
-            </a:avLst>
-          </a:prstGeom>
-          <a:solidFill>
-            <a:srgbClr val="5798D7"/>
-          </a:solidFill>
-          <a:ln w="12700">
-            <a:solidFill>
-              <a:srgbClr val="5798D7"/>
-            </a:solidFill>
-          </a:ln>
-        </p:spPr>
-        <p:txBody>
-          <a:bodyPr lIns="45719" rIns="45719"/>
-          <a:lstStyle/>
-          <a:p>
-            <a:pPr/>
-          </a:p>
-        </p:txBody>
-      </p:sp>
-      <p:sp>
-        <p:nvSpPr>
-          <p:cNvPr id="71" name="Text 2"/>
+              <a:t>Critérios de exclusão</a:t>
+            </a:r>
+          </a:p>
+        </p:txBody>
+      </p:sp>
+      <p:sp>
+        <p:nvSpPr>
+          <p:cNvPr id="69" name="Text 3"/>
           <p:cNvSpPr txBox="1"/>
           <p:nvPr/>
         </p:nvSpPr>
         <p:spPr>
           <a:xfrm>
-            <a:off x="914399" y="1421130"/>
-            <a:ext cx="3291842" cy="266701"/>
+            <a:off x="534213" y="2934900"/>
+            <a:ext cx="7379804" cy="1287236"/>
           </a:xfrm>
           <a:prstGeom prst="rect">
             <a:avLst/>
@@ -14284,68 +13832,20 @@
           </a:extLst>
         </p:spPr>
         <p:txBody>
-          <a:bodyPr lIns="0" tIns="0" rIns="0" bIns="0" anchor="ctr">
-            <a:spAutoFit/>
-          </a:bodyPr>
-          <a:lstStyle>
-            <a:lvl1pPr>
-              <a:defRPr>
-                <a:solidFill>
-                  <a:srgbClr val="142B47"/>
-                </a:solidFill>
-                <a:latin typeface="SF Pro Bold"/>
-                <a:ea typeface="SF Pro Bold"/>
-                <a:cs typeface="SF Pro Bold"/>
-                <a:sym typeface="SF Pro Bold"/>
-              </a:defRPr>
-            </a:lvl1pPr>
-          </a:lstStyle>
-          <a:p>
-            <a:pPr/>
-            <a:r>
-              <a:t>Critérios de exclusão</a:t>
-            </a:r>
-          </a:p>
-        </p:txBody>
-      </p:sp>
-      <p:sp>
-        <p:nvSpPr>
-          <p:cNvPr id="72" name="Text 3"/>
-          <p:cNvSpPr txBox="1"/>
-          <p:nvPr/>
-        </p:nvSpPr>
-        <p:spPr>
-          <a:xfrm>
-            <a:off x="914399" y="1828800"/>
-            <a:ext cx="3291842" cy="1828800"/>
-          </a:xfrm>
-          <a:prstGeom prst="rect">
-            <a:avLst/>
-          </a:prstGeom>
-          <a:ln w="12700">
-            <a:miter lim="400000"/>
-          </a:ln>
-          <a:extLst>
-            <a:ext uri="{C572A759-6A51-4108-AA02-DFA0A04FC94B}">
-              <ma14:wrappingTextBoxFlag xmlns:ma14="http://schemas.microsoft.com/office/mac/drawingml/2011/main" val="1"/>
-            </a:ext>
-          </a:extLst>
-        </p:spPr>
-        <p:txBody>
           <a:bodyPr lIns="0" tIns="0" rIns="0" bIns="0">
             <a:spAutoFit/>
           </a:bodyPr>
           <a:lstStyle/>
           <a:p>
-            <a:pPr marL="371475" indent="-371475">
+            <a:pPr>
               <a:spcBef>
                 <a:spcPts val="600"/>
               </a:spcBef>
-              <a:buSzPct val="100000"/>
-              <a:buChar char="•"/>
-              <a:defRPr sz="1300">
+              <a:defRPr sz="2000">
                 <a:solidFill>
-                  <a:srgbClr val="142B47"/>
+                  <a:srgbClr val="142B47">
+                    <a:alpha val="77701"/>
+                  </a:srgbClr>
                 </a:solidFill>
                 <a:latin typeface="SF Pro Regular"/>
                 <a:ea typeface="SF Pro Regular"/>
@@ -14354,235 +13854,72 @@
               </a:defRPr>
             </a:pPr>
             <a:r>
-              <a:t>Não é de computação (português, direito...)</a:t>
-            </a:r>
-          </a:p>
-          <a:p>
-            <a:pPr marL="371475" indent="-371475">
-              <a:spcBef>
-                <a:spcPts val="600"/>
-              </a:spcBef>
-              <a:buSzPct val="100000"/>
-              <a:buChar char="•"/>
-              <a:defRPr sz="1300">
+              <a:t>Foram removidas </a:t>
+            </a:r>
+            <a:r>
+              <a:rPr b="1">
                 <a:solidFill>
-                  <a:srgbClr val="142B47"/>
+                  <a:srgbClr val="C24F80"/>
                 </a:solidFill>
-                <a:latin typeface="SF Pro Regular"/>
-                <a:ea typeface="SF Pro Regular"/>
-                <a:cs typeface="SF Pro Regular"/>
-                <a:sym typeface="SF Pro Regular"/>
-              </a:defRPr>
-            </a:pPr>
-            <a:r>
-              <a:t>Problema de conversão (símbolo, tabela, figura)</a:t>
-            </a:r>
-          </a:p>
-          <a:p>
-            <a:pPr marL="371475" indent="-371475">
-              <a:spcBef>
-                <a:spcPts val="600"/>
-              </a:spcBef>
-              <a:buSzPct val="100000"/>
-              <a:buChar char="•"/>
-              <a:defRPr sz="1300">
+                <a:latin typeface="Helvetica Neue"/>
+                <a:ea typeface="Helvetica Neue"/>
+                <a:cs typeface="Helvetica Neue"/>
+                <a:sym typeface="Helvetica Neue"/>
+              </a:rPr>
+              <a:t>4.271 questões (63% do total)</a:t>
+            </a:r>
+            <a:r>
+              <a:t> por estarem fora da área de Computação, apresentarem </a:t>
+            </a:r>
+            <a:r>
+              <a:rPr b="1">
                 <a:solidFill>
-                  <a:srgbClr val="142B47"/>
+                  <a:srgbClr val="C24F80"/>
                 </a:solidFill>
-                <a:latin typeface="SF Pro Regular"/>
-                <a:ea typeface="SF Pro Regular"/>
-                <a:cs typeface="SF Pro Regular"/>
-                <a:sym typeface="SF Pro Regular"/>
-              </a:defRPr>
-            </a:pPr>
-            <a:r>
-              <a:t>Alternativa faltando ou questões grudadas</a:t>
-            </a:r>
-          </a:p>
-          <a:p>
-            <a:pPr marL="371475" indent="-371475">
-              <a:spcBef>
-                <a:spcPts val="600"/>
-              </a:spcBef>
-              <a:buSzPct val="100000"/>
-              <a:buChar char="•"/>
-              <a:defRPr sz="1300">
+                <a:latin typeface="Helvetica Neue"/>
+                <a:ea typeface="Helvetica Neue"/>
+                <a:cs typeface="Helvetica Neue"/>
+                <a:sym typeface="Helvetica Neue"/>
+              </a:rPr>
+              <a:t>problemas de conversão ou formatação</a:t>
+            </a:r>
+            <a:r>
+              <a:t>, estarem </a:t>
+            </a:r>
+            <a:r>
+              <a:rPr b="1">
                 <a:solidFill>
-                  <a:srgbClr val="142B47"/>
+                  <a:srgbClr val="C24F80"/>
                 </a:solidFill>
-                <a:latin typeface="SF Pro Regular"/>
-                <a:ea typeface="SF Pro Regular"/>
-                <a:cs typeface="SF Pro Regular"/>
-                <a:sym typeface="SF Pro Regular"/>
-              </a:defRPr>
-            </a:pPr>
-            <a:r>
-              <a:t>Sem gabarito ou anulada</a:t>
-            </a:r>
-          </a:p>
-          <a:p>
-            <a:pPr marL="371475" indent="-371475">
-              <a:spcBef>
-                <a:spcPts val="600"/>
-              </a:spcBef>
-              <a:buSzPct val="100000"/>
-              <a:buChar char="•"/>
-              <a:defRPr sz="1300">
+                <a:latin typeface="Helvetica Neue"/>
+                <a:ea typeface="Helvetica Neue"/>
+                <a:cs typeface="Helvetica Neue"/>
+                <a:sym typeface="Helvetica Neue"/>
+              </a:rPr>
+              <a:t>sem gabarito ou anuladas</a:t>
+            </a:r>
+            <a:r>
+              <a:t>, ou serem </a:t>
+            </a:r>
+            <a:r>
+              <a:rPr b="1">
                 <a:solidFill>
-                  <a:srgbClr val="142B47"/>
+                  <a:srgbClr val="C24F80"/>
                 </a:solidFill>
-                <a:latin typeface="SF Pro Regular"/>
-                <a:ea typeface="SF Pro Regular"/>
-                <a:cs typeface="SF Pro Regular"/>
-                <a:sym typeface="SF Pro Regular"/>
-              </a:defRPr>
-            </a:pPr>
-            <a:r>
-              <a:t>Repetida em outra prova</a:t>
-            </a:r>
-          </a:p>
-        </p:txBody>
-      </p:sp>
-      <p:sp>
-        <p:nvSpPr>
-          <p:cNvPr id="73" name="Text 4"/>
-          <p:cNvSpPr txBox="1"/>
-          <p:nvPr/>
-        </p:nvSpPr>
-        <p:spPr>
-          <a:xfrm>
-            <a:off x="5022505" y="1975484"/>
-            <a:ext cx="3474721" cy="901701"/>
-          </a:xfrm>
-          <a:prstGeom prst="rect">
-            <a:avLst/>
-          </a:prstGeom>
-          <a:ln w="12700">
-            <a:miter lim="400000"/>
-          </a:ln>
-          <a:extLst>
-            <a:ext uri="{C572A759-6A51-4108-AA02-DFA0A04FC94B}">
-              <ma14:wrappingTextBoxFlag xmlns:ma14="http://schemas.microsoft.com/office/mac/drawingml/2011/main" val="1"/>
-            </a:ext>
-          </a:extLst>
-        </p:spPr>
-        <p:txBody>
-          <a:bodyPr lIns="0" tIns="0" rIns="0" bIns="0" anchor="ctr">
-            <a:spAutoFit/>
-          </a:bodyPr>
-          <a:lstStyle>
-            <a:lvl1pPr algn="ctr">
-              <a:defRPr sz="6000">
+                <a:latin typeface="Helvetica Neue"/>
+                <a:ea typeface="Helvetica Neue"/>
+                <a:cs typeface="Helvetica Neue"/>
+                <a:sym typeface="Helvetica Neue"/>
+              </a:rPr>
+              <a:t>repetidas em outras provas</a:t>
+            </a:r>
+            <a:r>
+              <a:rPr>
                 <a:solidFill>
-                  <a:srgbClr val="142B47"/>
+                  <a:srgbClr val="C24F80"/>
                 </a:solidFill>
-                <a:latin typeface="SF Pro Bold"/>
-                <a:ea typeface="SF Pro Bold"/>
-                <a:cs typeface="SF Pro Bold"/>
-                <a:sym typeface="SF Pro Bold"/>
-              </a:defRPr>
-            </a:lvl1pPr>
-          </a:lstStyle>
-          <a:p>
-            <a:pPr/>
-            <a:r>
-              <a:t>4.271</a:t>
-            </a:r>
-          </a:p>
-        </p:txBody>
-      </p:sp>
-      <p:sp>
-        <p:nvSpPr>
-          <p:cNvPr id="74" name="Text 5"/>
-          <p:cNvSpPr txBox="1"/>
-          <p:nvPr/>
-        </p:nvSpPr>
-        <p:spPr>
-          <a:xfrm>
-            <a:off x="5022505" y="2910204"/>
-            <a:ext cx="3474721" cy="266701"/>
-          </a:xfrm>
-          <a:prstGeom prst="rect">
-            <a:avLst/>
-          </a:prstGeom>
-          <a:ln w="12700">
-            <a:miter lim="400000"/>
-          </a:ln>
-          <a:extLst>
-            <a:ext uri="{C572A759-6A51-4108-AA02-DFA0A04FC94B}">
-              <ma14:wrappingTextBoxFlag xmlns:ma14="http://schemas.microsoft.com/office/mac/drawingml/2011/main" val="1"/>
-            </a:ext>
-          </a:extLst>
-        </p:spPr>
-        <p:txBody>
-          <a:bodyPr lIns="0" tIns="0" rIns="0" bIns="0" anchor="ctr">
-            <a:spAutoFit/>
-          </a:bodyPr>
-          <a:lstStyle>
-            <a:lvl1pPr algn="ctr">
-              <a:defRPr>
-                <a:solidFill>
-                  <a:srgbClr val="4A6C93"/>
-                </a:solidFill>
-                <a:latin typeface="SF Pro Regular"/>
-                <a:ea typeface="SF Pro Regular"/>
-                <a:cs typeface="SF Pro Regular"/>
-                <a:sym typeface="SF Pro Regular"/>
-              </a:defRPr>
-            </a:lvl1pPr>
-          </a:lstStyle>
-          <a:p>
-            <a:pPr/>
-            <a:r>
-              <a:t>questões removidas</a:t>
-            </a:r>
-          </a:p>
-        </p:txBody>
-      </p:sp>
-      <p:sp>
-        <p:nvSpPr>
-          <p:cNvPr id="75" name="Text 6"/>
-          <p:cNvSpPr txBox="1"/>
-          <p:nvPr/>
-        </p:nvSpPr>
-        <p:spPr>
-          <a:xfrm>
-            <a:off x="5022505" y="3275965"/>
-            <a:ext cx="3474721" cy="266701"/>
-          </a:xfrm>
-          <a:prstGeom prst="rect">
-            <a:avLst/>
-          </a:prstGeom>
-          <a:ln w="12700">
-            <a:miter lim="400000"/>
-          </a:ln>
-          <a:extLst>
-            <a:ext uri="{C572A759-6A51-4108-AA02-DFA0A04FC94B}">
-              <ma14:wrappingTextBoxFlag xmlns:ma14="http://schemas.microsoft.com/office/mac/drawingml/2011/main" val="1"/>
-            </a:ext>
-          </a:extLst>
-        </p:spPr>
-        <p:txBody>
-          <a:bodyPr lIns="0" tIns="0" rIns="0" bIns="0" anchor="ctr">
-            <a:spAutoFit/>
-          </a:bodyPr>
-          <a:lstStyle>
-            <a:lvl1pPr algn="ctr">
-              <a:defRPr>
-                <a:solidFill>
-                  <a:srgbClr val="4A6C93"/>
-                </a:solidFill>
-                <a:latin typeface="SF Pro Regular"/>
-                <a:ea typeface="SF Pro Regular"/>
-                <a:cs typeface="SF Pro Regular"/>
-                <a:sym typeface="SF Pro Regular"/>
-              </a:defRPr>
-            </a:lvl1pPr>
-          </a:lstStyle>
-          <a:p>
-            <a:pPr/>
-            <a:r>
-              <a:t>63% do total extraído</a:t>
+              </a:rPr>
+              <a:t>.</a:t>
             </a:r>
           </a:p>
         </p:txBody>
@@ -14622,14 +13959,94 @@
       </p:grpSpPr>
       <p:sp>
         <p:nvSpPr>
-          <p:cNvPr id="77" name="Text 0"/>
+          <p:cNvPr id="71" name="Shape 2"/>
+          <p:cNvSpPr/>
+          <p:nvPr/>
+        </p:nvSpPr>
+        <p:spPr>
+          <a:xfrm>
+            <a:off x="5937245" y="1861507"/>
+            <a:ext cx="2573027" cy="1969128"/>
+          </a:xfrm>
+          <a:prstGeom prst="roundRect">
+            <a:avLst>
+              <a:gd name="adj" fmla="val 7500"/>
+            </a:avLst>
+          </a:prstGeom>
+          <a:solidFill>
+            <a:srgbClr val="142B47"/>
+          </a:solidFill>
+          <a:ln w="12700">
+            <a:solidFill>
+              <a:srgbClr val="142B47"/>
+            </a:solidFill>
+          </a:ln>
+        </p:spPr>
+        <p:txBody>
+          <a:bodyPr lIns="45718" tIns="45718" rIns="45718" bIns="45718"/>
+          <a:lstStyle/>
+          <a:p>
+            <a:pPr>
+              <a:defRPr>
+                <a:latin typeface="+mj-lt"/>
+                <a:ea typeface="+mj-ea"/>
+                <a:cs typeface="+mj-cs"/>
+                <a:sym typeface="Calibri"/>
+              </a:defRPr>
+            </a:pPr>
+          </a:p>
+        </p:txBody>
+      </p:sp>
+      <p:sp>
+        <p:nvSpPr>
+          <p:cNvPr id="72" name="Shape 2"/>
+          <p:cNvSpPr/>
+          <p:nvPr/>
+        </p:nvSpPr>
+        <p:spPr>
+          <a:xfrm>
+            <a:off x="3285486" y="1861507"/>
+            <a:ext cx="2573028" cy="1969128"/>
+          </a:xfrm>
+          <a:prstGeom prst="roundRect">
+            <a:avLst>
+              <a:gd name="adj" fmla="val 7500"/>
+            </a:avLst>
+          </a:prstGeom>
+          <a:solidFill>
+            <a:srgbClr val="142B47"/>
+          </a:solidFill>
+          <a:ln w="12700">
+            <a:solidFill>
+              <a:srgbClr val="142B47"/>
+            </a:solidFill>
+          </a:ln>
+        </p:spPr>
+        <p:txBody>
+          <a:bodyPr lIns="45718" tIns="45718" rIns="45718" bIns="45718"/>
+          <a:lstStyle/>
+          <a:p>
+            <a:pPr>
+              <a:defRPr>
+                <a:latin typeface="+mj-lt"/>
+                <a:ea typeface="+mj-ea"/>
+                <a:cs typeface="+mj-cs"/>
+                <a:sym typeface="Calibri"/>
+              </a:defRPr>
+            </a:pPr>
+          </a:p>
+        </p:txBody>
+      </p:sp>
+      <p:sp>
+        <p:nvSpPr>
+          <p:cNvPr id="73" name="Text 0"/>
           <p:cNvSpPr txBox="1"/>
           <p:nvPr/>
         </p:nvSpPr>
         <p:spPr>
           <a:xfrm>
-            <a:off x="457200" y="381000"/>
-            <a:ext cx="8229600" cy="609601"/>
+            <a:off x="457200" y="813271"/>
+            <a:ext cx="8229601" cy="762001"/>
           </a:xfrm>
           <a:prstGeom prst="rect">
             <a:avLst/>
@@ -14649,7 +14066,7 @@
           </a:bodyPr>
           <a:lstStyle>
             <a:lvl1pPr algn="ctr">
-              <a:defRPr sz="4000">
+              <a:defRPr sz="5000">
                 <a:solidFill>
                   <a:srgbClr val="142B47"/>
                 </a:solidFill>
@@ -14663,69 +14080,21 @@
           <a:p>
             <a:pPr/>
             <a:r>
-              <a:t>Como definimos a subárea</a:t>
-            </a:r>
-          </a:p>
-        </p:txBody>
-      </p:sp>
-      <p:sp>
-        <p:nvSpPr>
-          <p:cNvPr id="78" name="Text 1"/>
-          <p:cNvSpPr txBox="1"/>
-          <p:nvPr/>
-        </p:nvSpPr>
-        <p:spPr>
-          <a:xfrm>
-            <a:off x="457200" y="999489"/>
-            <a:ext cx="8229600" cy="241301"/>
-          </a:xfrm>
-          <a:prstGeom prst="rect">
-            <a:avLst/>
-          </a:prstGeom>
-          <a:ln w="12700">
-            <a:miter lim="400000"/>
-          </a:ln>
-          <a:extLst>
-            <a:ext uri="{C572A759-6A51-4108-AA02-DFA0A04FC94B}">
-              <ma14:wrappingTextBoxFlag xmlns:ma14="http://schemas.microsoft.com/office/mac/drawingml/2011/main" val="1"/>
-            </a:ext>
-          </a:extLst>
-        </p:spPr>
-        <p:txBody>
-          <a:bodyPr lIns="0" tIns="0" rIns="0" bIns="0" anchor="ctr">
-            <a:spAutoFit/>
-          </a:bodyPr>
-          <a:lstStyle>
-            <a:lvl1pPr algn="ctr">
-              <a:defRPr sz="1600">
-                <a:solidFill>
-                  <a:srgbClr val="4A6C93"/>
-                </a:solidFill>
-                <a:latin typeface="SF Pro Regular"/>
-                <a:ea typeface="SF Pro Regular"/>
-                <a:cs typeface="SF Pro Regular"/>
-                <a:sym typeface="SF Pro Regular"/>
-              </a:defRPr>
-            </a:lvl1pPr>
-          </a:lstStyle>
-          <a:p>
-            <a:pPr/>
-            <a:r>
-              <a:t>classificação automática, em duas etapas</a:t>
-            </a:r>
-          </a:p>
-        </p:txBody>
-      </p:sp>
-      <p:sp>
-        <p:nvSpPr>
-          <p:cNvPr id="79" name="Shape 2"/>
+              <a:t>Definição de subárea</a:t>
+            </a:r>
+          </a:p>
+        </p:txBody>
+      </p:sp>
+      <p:sp>
+        <p:nvSpPr>
+          <p:cNvPr id="74" name="Shape 2"/>
           <p:cNvSpPr/>
           <p:nvPr/>
         </p:nvSpPr>
         <p:spPr>
           <a:xfrm>
-            <a:off x="731519" y="1554480"/>
-            <a:ext cx="2377441" cy="1828801"/>
+            <a:off x="633728" y="1861507"/>
+            <a:ext cx="2573027" cy="1969128"/>
           </a:xfrm>
           <a:prstGeom prst="roundRect">
             <a:avLst>
@@ -14742,23 +14111,30 @@
           </a:ln>
         </p:spPr>
         <p:txBody>
-          <a:bodyPr lIns="45719" rIns="45719"/>
+          <a:bodyPr lIns="45718" tIns="45718" rIns="45718" bIns="45718"/>
           <a:lstStyle/>
           <a:p>
-            <a:pPr/>
-          </a:p>
-        </p:txBody>
-      </p:sp>
-      <p:sp>
-        <p:nvSpPr>
-          <p:cNvPr id="80" name="Text 3"/>
+            <a:pPr>
+              <a:defRPr>
+                <a:latin typeface="+mj-lt"/>
+                <a:ea typeface="+mj-ea"/>
+                <a:cs typeface="+mj-cs"/>
+                <a:sym typeface="Calibri"/>
+              </a:defRPr>
+            </a:pPr>
+          </a:p>
+        </p:txBody>
+      </p:sp>
+      <p:sp>
+        <p:nvSpPr>
+          <p:cNvPr id="75" name="Text 3"/>
           <p:cNvSpPr txBox="1"/>
           <p:nvPr/>
         </p:nvSpPr>
         <p:spPr>
           <a:xfrm>
-            <a:off x="822960" y="2182367"/>
-            <a:ext cx="2194561" cy="304801"/>
+            <a:off x="774067" y="2217105"/>
+            <a:ext cx="2292350" cy="381001"/>
           </a:xfrm>
           <a:prstGeom prst="rect">
             <a:avLst/>
@@ -14778,7 +14154,7 @@
           </a:bodyPr>
           <a:lstStyle>
             <a:lvl1pPr algn="ctr">
-              <a:defRPr sz="2000">
+              <a:defRPr sz="2500">
                 <a:solidFill>
                   <a:srgbClr val="FFFFFF"/>
                 </a:solidFill>
@@ -14799,14 +14175,14 @@
       </p:sp>
       <p:sp>
         <p:nvSpPr>
-          <p:cNvPr id="81" name="Text 4"/>
+          <p:cNvPr id="76" name="Text 4"/>
           <p:cNvSpPr txBox="1"/>
           <p:nvPr/>
         </p:nvSpPr>
         <p:spPr>
           <a:xfrm>
-            <a:off x="822960" y="2560320"/>
-            <a:ext cx="2194561" cy="381001"/>
+            <a:off x="822960" y="2747528"/>
+            <a:ext cx="2194562" cy="800101"/>
           </a:xfrm>
           <a:prstGeom prst="rect">
             <a:avLst/>
@@ -14826,7 +14202,7 @@
           </a:bodyPr>
           <a:lstStyle>
             <a:lvl1pPr algn="ctr">
-              <a:defRPr sz="1300">
+              <a:defRPr>
                 <a:solidFill>
                   <a:srgbClr val="B9D3EE"/>
                 </a:solidFill>
@@ -14840,54 +14216,21 @@
           <a:p>
             <a:pPr/>
             <a:r>
-              <a:t>lista de termos por subárea; o enunciado vale o dobro</a:t>
-            </a:r>
-          </a:p>
-        </p:txBody>
-      </p:sp>
-      <p:sp>
-        <p:nvSpPr>
-          <p:cNvPr id="82" name="Shape 5"/>
-          <p:cNvSpPr/>
-          <p:nvPr/>
-        </p:nvSpPr>
-        <p:spPr>
-          <a:xfrm>
-            <a:off x="3383279" y="1554480"/>
-            <a:ext cx="2377441" cy="1828801"/>
-          </a:xfrm>
-          <a:prstGeom prst="roundRect">
-            <a:avLst>
-              <a:gd name="adj" fmla="val 7500"/>
-            </a:avLst>
-          </a:prstGeom>
-          <a:solidFill>
-            <a:srgbClr val="142B47"/>
-          </a:solidFill>
-          <a:ln w="12700">
-            <a:solidFill>
-              <a:srgbClr val="142B47"/>
-            </a:solidFill>
-          </a:ln>
-        </p:spPr>
-        <p:txBody>
-          <a:bodyPr lIns="45719" rIns="45719"/>
-          <a:lstStyle/>
-          <a:p>
-            <a:pPr/>
-          </a:p>
-        </p:txBody>
-      </p:sp>
-      <p:sp>
-        <p:nvSpPr>
-          <p:cNvPr id="83" name="Text 6"/>
+              <a:t>lista de termos por subárea, o enunciado vale o dobro</a:t>
+            </a:r>
+          </a:p>
+        </p:txBody>
+      </p:sp>
+      <p:sp>
+        <p:nvSpPr>
+          <p:cNvPr id="77" name="Text 6"/>
           <p:cNvSpPr txBox="1"/>
           <p:nvPr/>
         </p:nvSpPr>
         <p:spPr>
           <a:xfrm>
-            <a:off x="3474720" y="2182367"/>
-            <a:ext cx="2194561" cy="304801"/>
+            <a:off x="3474719" y="2217105"/>
+            <a:ext cx="2194562" cy="381001"/>
           </a:xfrm>
           <a:prstGeom prst="rect">
             <a:avLst/>
@@ -14907,7 +14250,7 @@
           </a:bodyPr>
           <a:lstStyle>
             <a:lvl1pPr algn="ctr">
-              <a:defRPr sz="2000">
+              <a:defRPr sz="2500">
                 <a:solidFill>
                   <a:srgbClr val="FFFFFF"/>
                 </a:solidFill>
@@ -14928,14 +14271,14 @@
       </p:sp>
       <p:sp>
         <p:nvSpPr>
-          <p:cNvPr id="84" name="Text 7"/>
+          <p:cNvPr id="78" name="Text 7"/>
           <p:cNvSpPr txBox="1"/>
           <p:nvPr/>
         </p:nvSpPr>
         <p:spPr>
           <a:xfrm>
-            <a:off x="3474720" y="2560320"/>
-            <a:ext cx="2194561" cy="571501"/>
+            <a:off x="3474720" y="2747528"/>
+            <a:ext cx="2292355" cy="723901"/>
           </a:xfrm>
           <a:prstGeom prst="rect">
             <a:avLst/>
@@ -14955,7 +14298,7 @@
           </a:bodyPr>
           <a:lstStyle>
             <a:lvl1pPr algn="ctr">
-              <a:defRPr sz="1300">
+              <a:defRPr sz="1600">
                 <a:solidFill>
                   <a:srgbClr val="B9D3EE"/>
                 </a:solidFill>
@@ -14976,47 +14319,14 @@
       </p:sp>
       <p:sp>
         <p:nvSpPr>
-          <p:cNvPr id="85" name="Shape 8"/>
-          <p:cNvSpPr/>
-          <p:nvPr/>
-        </p:nvSpPr>
-        <p:spPr>
-          <a:xfrm>
-            <a:off x="6035040" y="1554480"/>
-            <a:ext cx="2377441" cy="1828801"/>
-          </a:xfrm>
-          <a:prstGeom prst="roundRect">
-            <a:avLst>
-              <a:gd name="adj" fmla="val 7500"/>
-            </a:avLst>
-          </a:prstGeom>
-          <a:solidFill>
-            <a:srgbClr val="142B47"/>
-          </a:solidFill>
-          <a:ln w="12700">
-            <a:solidFill>
-              <a:srgbClr val="142B47"/>
-            </a:solidFill>
-          </a:ln>
-        </p:spPr>
-        <p:txBody>
-          <a:bodyPr lIns="45719" rIns="45719"/>
-          <a:lstStyle/>
-          <a:p>
-            <a:pPr/>
-          </a:p>
-        </p:txBody>
-      </p:sp>
-      <p:sp>
-        <p:nvSpPr>
-          <p:cNvPr id="86" name="Text 9"/>
+          <p:cNvPr id="79" name="Text 9"/>
           <p:cNvSpPr txBox="1"/>
           <p:nvPr/>
         </p:nvSpPr>
         <p:spPr>
           <a:xfrm>
-            <a:off x="6126479" y="2182367"/>
-            <a:ext cx="2194561" cy="304801"/>
+            <a:off x="6126480" y="2217105"/>
+            <a:ext cx="2194562" cy="381001"/>
           </a:xfrm>
           <a:prstGeom prst="rect">
             <a:avLst/>
@@ -15036,7 +14346,7 @@
           </a:bodyPr>
           <a:lstStyle>
             <a:lvl1pPr algn="ctr">
-              <a:defRPr sz="2000">
+              <a:defRPr sz="2500">
                 <a:solidFill>
                   <a:srgbClr val="FFFFFF"/>
                 </a:solidFill>
@@ -15057,14 +14367,14 @@
       </p:sp>
       <p:sp>
         <p:nvSpPr>
-          <p:cNvPr id="87" name="Text 10"/>
+          <p:cNvPr id="80" name="Text 10"/>
           <p:cNvSpPr txBox="1"/>
           <p:nvPr/>
         </p:nvSpPr>
         <p:spPr>
           <a:xfrm>
-            <a:off x="6126479" y="2560320"/>
-            <a:ext cx="2194561" cy="571501"/>
+            <a:off x="6126479" y="2747528"/>
+            <a:ext cx="2194562" cy="800101"/>
           </a:xfrm>
           <a:prstGeom prst="rect">
             <a:avLst/>
@@ -15084,7 +14394,7 @@
           </a:bodyPr>
           <a:lstStyle>
             <a:lvl1pPr algn="ctr">
-              <a:defRPr sz="1300">
+              <a:defRPr>
                 <a:solidFill>
                   <a:srgbClr val="B9D3EE"/>
                 </a:solidFill>
@@ -15099,54 +14409,6 @@
             <a:pPr/>
             <a:r>
               <a:t>treinado nas questões confiáveis, decide as ambíguas</a:t>
-            </a:r>
-          </a:p>
-        </p:txBody>
-      </p:sp>
-      <p:sp>
-        <p:nvSpPr>
-          <p:cNvPr id="88" name="Text 11"/>
-          <p:cNvSpPr txBox="1"/>
-          <p:nvPr/>
-        </p:nvSpPr>
-        <p:spPr>
-          <a:xfrm>
-            <a:off x="457200" y="3909059"/>
-            <a:ext cx="8229600" cy="228601"/>
-          </a:xfrm>
-          <a:prstGeom prst="rect">
-            <a:avLst/>
-          </a:prstGeom>
-          <a:ln w="12700">
-            <a:miter lim="400000"/>
-          </a:ln>
-          <a:extLst>
-            <a:ext uri="{C572A759-6A51-4108-AA02-DFA0A04FC94B}">
-              <ma14:wrappingTextBoxFlag xmlns:ma14="http://schemas.microsoft.com/office/mac/drawingml/2011/main" val="1"/>
-            </a:ext>
-          </a:extLst>
-        </p:spPr>
-        <p:txBody>
-          <a:bodyPr lIns="0" tIns="0" rIns="0" bIns="0" anchor="ctr">
-            <a:spAutoFit/>
-          </a:bodyPr>
-          <a:lstStyle>
-            <a:lvl1pPr algn="ctr">
-              <a:defRPr sz="1500">
-                <a:solidFill>
-                  <a:srgbClr val="142B47"/>
-                </a:solidFill>
-                <a:latin typeface="SF Pro Bold"/>
-                <a:ea typeface="SF Pro Bold"/>
-                <a:cs typeface="SF Pro Bold"/>
-                <a:sym typeface="SF Pro Bold"/>
-              </a:defRPr>
-            </a:lvl1pPr>
-          </a:lstStyle>
-          <a:p>
-            <a:pPr/>
-            <a:r>
-              <a:t>Conferimos 100 questões sorteadas: 97 estavam na subárea certa</a:t>
             </a:r>
           </a:p>
         </p:txBody>
@@ -15186,14 +14448,14 @@
       </p:grpSpPr>
       <p:sp>
         <p:nvSpPr>
-          <p:cNvPr id="90" name="Text 0"/>
+          <p:cNvPr id="82" name="Text 0"/>
           <p:cNvSpPr txBox="1"/>
           <p:nvPr/>
         </p:nvSpPr>
         <p:spPr>
           <a:xfrm>
-            <a:off x="457200" y="592862"/>
-            <a:ext cx="8229600" cy="609601"/>
+            <a:off x="457200" y="446812"/>
+            <a:ext cx="8229600" cy="901701"/>
           </a:xfrm>
           <a:prstGeom prst="rect">
             <a:avLst/>
@@ -15213,7 +14475,7 @@
           </a:bodyPr>
           <a:lstStyle>
             <a:lvl1pPr algn="ctr">
-              <a:defRPr sz="4000">
+              <a:defRPr sz="6000">
                 <a:solidFill>
                   <a:srgbClr val="C24F80"/>
                 </a:solidFill>
@@ -15234,14 +14496,14 @@
       </p:sp>
       <p:sp>
         <p:nvSpPr>
-          <p:cNvPr id="91" name="Shape 2"/>
+          <p:cNvPr id="83" name="Shape 2"/>
           <p:cNvSpPr/>
           <p:nvPr/>
         </p:nvSpPr>
         <p:spPr>
           <a:xfrm>
-            <a:off x="2011679" y="1417319"/>
-            <a:ext cx="5120642" cy="3017522"/>
+            <a:off x="1539837" y="1425793"/>
+            <a:ext cx="6064326" cy="3372956"/>
           </a:xfrm>
           <a:prstGeom prst="roundRect">
             <a:avLst>
@@ -15258,23 +14520,30 @@
           </a:ln>
         </p:spPr>
         <p:txBody>
-          <a:bodyPr lIns="45719" rIns="45719"/>
+          <a:bodyPr lIns="45718" tIns="45718" rIns="45718" bIns="45718"/>
           <a:lstStyle/>
           <a:p>
-            <a:pPr/>
-          </a:p>
-        </p:txBody>
-      </p:sp>
-      <p:sp>
-        <p:nvSpPr>
-          <p:cNvPr id="92" name="Text 3"/>
+            <a:pPr>
+              <a:defRPr>
+                <a:latin typeface="+mj-lt"/>
+                <a:ea typeface="+mj-ea"/>
+                <a:cs typeface="+mj-cs"/>
+                <a:sym typeface="Calibri"/>
+              </a:defRPr>
+            </a:pPr>
+          </a:p>
+        </p:txBody>
+      </p:sp>
+      <p:sp>
+        <p:nvSpPr>
+          <p:cNvPr id="84" name="Text 3"/>
           <p:cNvSpPr txBox="1"/>
           <p:nvPr/>
         </p:nvSpPr>
         <p:spPr>
           <a:xfrm>
-            <a:off x="2194560" y="1527047"/>
-            <a:ext cx="4754880" cy="2311401"/>
+            <a:off x="1756616" y="1626370"/>
+            <a:ext cx="5630768" cy="2971801"/>
           </a:xfrm>
           <a:prstGeom prst="rect">
             <a:avLst/>
@@ -15295,7 +14564,7 @@
           <a:lstStyle/>
           <a:p>
             <a:pPr>
-              <a:defRPr sz="1200">
+              <a:defRPr sz="1500">
                 <a:solidFill>
                   <a:srgbClr val="E6F1FA"/>
                 </a:solidFill>
@@ -15311,7 +14580,7 @@
           </a:p>
           <a:p>
             <a:pPr>
-              <a:defRPr sz="1200">
+              <a:defRPr sz="1500">
                 <a:solidFill>
                   <a:srgbClr val="E6F1FA"/>
                 </a:solidFill>
@@ -15327,7 +14596,7 @@
           </a:p>
           <a:p>
             <a:pPr>
-              <a:defRPr sz="1200">
+              <a:defRPr sz="1500">
                 <a:solidFill>
                   <a:srgbClr val="E6F1FA"/>
                 </a:solidFill>
@@ -15343,7 +14612,7 @@
           </a:p>
           <a:p>
             <a:pPr>
-              <a:defRPr sz="1200">
+              <a:defRPr sz="1500">
                 <a:solidFill>
                   <a:srgbClr val="E6F1FA"/>
                 </a:solidFill>
@@ -15359,7 +14628,7 @@
           </a:p>
           <a:p>
             <a:pPr>
-              <a:defRPr sz="1200">
+              <a:defRPr sz="1500">
                 <a:solidFill>
                   <a:srgbClr val="E6F1FA"/>
                 </a:solidFill>
@@ -15375,7 +14644,7 @@
           </a:p>
           <a:p>
             <a:pPr>
-              <a:defRPr sz="1200">
+              <a:defRPr sz="1500">
                 <a:solidFill>
                   <a:srgbClr val="E6F1FA"/>
                 </a:solidFill>
@@ -15391,7 +14660,7 @@
           </a:p>
           <a:p>
             <a:pPr>
-              <a:defRPr sz="1200">
+              <a:defRPr sz="1500">
                 <a:solidFill>
                   <a:srgbClr val="E6F1FA"/>
                 </a:solidFill>
@@ -15407,7 +14676,7 @@
           </a:p>
           <a:p>
             <a:pPr>
-              <a:defRPr sz="1200">
+              <a:defRPr sz="1500">
                 <a:solidFill>
                   <a:srgbClr val="E6F1FA"/>
                 </a:solidFill>
@@ -15423,7 +14692,7 @@
           </a:p>
           <a:p>
             <a:pPr>
-              <a:defRPr sz="1200">
+              <a:defRPr sz="1500">
                 <a:solidFill>
                   <a:srgbClr val="E6F1FA"/>
                 </a:solidFill>
@@ -15439,7 +14708,7 @@
           </a:p>
           <a:p>
             <a:pPr>
-              <a:defRPr sz="1200">
+              <a:defRPr sz="1500">
                 <a:solidFill>
                   <a:srgbClr val="E6F1FA"/>
                 </a:solidFill>
@@ -15455,7 +14724,7 @@
           </a:p>
           <a:p>
             <a:pPr>
-              <a:defRPr sz="1200">
+              <a:defRPr sz="1500">
                 <a:solidFill>
                   <a:srgbClr val="E6F1FA"/>
                 </a:solidFill>
@@ -15471,7 +14740,7 @@
           </a:p>
           <a:p>
             <a:pPr>
-              <a:defRPr sz="1200">
+              <a:defRPr sz="1500">
                 <a:solidFill>
                   <a:srgbClr val="E6F1FA"/>
                 </a:solidFill>
@@ -15487,7 +14756,7 @@
           </a:p>
           <a:p>
             <a:pPr>
-              <a:defRPr sz="1200">
+              <a:defRPr sz="1500">
                 <a:solidFill>
                   <a:srgbClr val="E6F1FA"/>
                 </a:solidFill>
@@ -15538,13 +14807,13 @@
       </p:grpSpPr>
       <p:sp>
         <p:nvSpPr>
-          <p:cNvPr id="94" name="Text 0"/>
+          <p:cNvPr id="86" name="Text 0"/>
           <p:cNvSpPr txBox="1"/>
           <p:nvPr/>
         </p:nvSpPr>
         <p:spPr>
           <a:xfrm>
-            <a:off x="457200" y="660400"/>
+            <a:off x="457200" y="660399"/>
             <a:ext cx="8229600" cy="609601"/>
           </a:xfrm>
           <a:prstGeom prst="rect">
@@ -15586,13 +14855,13 @@
       </p:sp>
       <p:graphicFrame>
         <p:nvGraphicFramePr>
-          <p:cNvPr id="95" name="Table 0"/>
+          <p:cNvPr id="87" name="Table 0"/>
           <p:cNvGraphicFramePr/>
           <p:nvPr/>
         </p:nvGraphicFramePr>
         <p:xfrm>
           <a:off x="914400" y="1422400"/>
-          <a:ext cx="7315200" cy="2057400"/>
+          <a:ext cx="7315200" cy="2880360"/>
         </p:xfrm>
         <a:graphic xmlns:a="http://schemas.openxmlformats.org/drawingml/2006/main">
           <a:graphicData uri="http://schemas.openxmlformats.org/drawingml/2006/table">
@@ -17507,17 +16776,17 @@
         <a:solidFill>
           <a:srgbClr val="FFFFFF"/>
         </a:solidFill>
-        <a:ln w="12700" cap="flat">
+        <a:ln w="25400" cap="flat">
           <a:solidFill>
             <a:schemeClr val="accent1"/>
           </a:solidFill>
           <a:prstDash val="solid"/>
-          <a:miter lim="800000"/>
+          <a:round/>
         </a:ln>
         <a:effectLst/>
         <a:sp3d/>
       </a:spPr>
-      <a:bodyPr rot="0" spcFirstLastPara="1" vertOverflow="overflow" horzOverflow="overflow" vert="horz" wrap="square" lIns="45719" tIns="45719" rIns="45719" bIns="45719" numCol="1" spcCol="38100" rtlCol="0" anchor="ctr" upright="0">
+      <a:bodyPr rot="0" spcFirstLastPara="1" vertOverflow="overflow" horzOverflow="overflow" vert="horz" wrap="square" lIns="45718" tIns="45718" rIns="45718" bIns="45718" numCol="1" spcCol="38100" rtlCol="0" anchor="ctr" upright="0">
         <a:spAutoFit/>
       </a:bodyPr>
       <a:lstStyle>
@@ -17545,10 +16814,10 @@
             </a:solidFill>
             <a:effectLst/>
             <a:uFillTx/>
-            <a:latin typeface="+mj-lt"/>
-            <a:ea typeface="+mj-ea"/>
-            <a:cs typeface="+mj-cs"/>
-            <a:sym typeface="Calibri"/>
+            <a:latin typeface="+mn-lt"/>
+            <a:ea typeface="+mn-ea"/>
+            <a:cs typeface="+mn-cs"/>
+            <a:sym typeface="Helvetica"/>
           </a:defRPr>
         </a:defPPr>
         <a:lvl1pPr marL="0" marR="0" indent="0" algn="l" defTabSz="914400" rtl="0" fontAlgn="auto" latinLnBrk="1" hangingPunct="0">
@@ -17796,12 +17065,12 @@
     <a:lnDef>
       <a:spPr>
         <a:noFill/>
-        <a:ln w="12700" cap="flat">
+        <a:ln w="25400" cap="flat">
           <a:solidFill>
             <a:schemeClr val="accent1"/>
           </a:solidFill>
           <a:prstDash val="solid"/>
-          <a:miter lim="800000"/>
+          <a:round/>
         </a:ln>
         <a:effectLst/>
         <a:sp3d/>
@@ -18088,7 +17357,7 @@
         <a:effectLst/>
         <a:sp3d/>
       </a:spPr>
-      <a:bodyPr rot="0" spcFirstLastPara="1" vertOverflow="overflow" horzOverflow="overflow" vert="horz" wrap="square" lIns="45719" tIns="45719" rIns="45719" bIns="45719" numCol="1" spcCol="38100" rtlCol="0" anchor="t" upright="0">
+      <a:bodyPr rot="0" spcFirstLastPara="1" vertOverflow="overflow" horzOverflow="overflow" vert="horz" wrap="square" lIns="45718" tIns="45718" rIns="45718" bIns="45718" numCol="1" spcCol="38100" rtlCol="0" anchor="t" upright="0">
         <a:spAutoFit/>
       </a:bodyPr>
       <a:lstStyle>
@@ -18116,10 +17385,10 @@
             </a:solidFill>
             <a:effectLst/>
             <a:uFillTx/>
-            <a:latin typeface="+mj-lt"/>
-            <a:ea typeface="+mj-ea"/>
-            <a:cs typeface="+mj-cs"/>
-            <a:sym typeface="Calibri"/>
+            <a:latin typeface="+mn-lt"/>
+            <a:ea typeface="+mn-ea"/>
+            <a:cs typeface="+mn-cs"/>
+            <a:sym typeface="Helvetica"/>
           </a:defRPr>
         </a:defPPr>
         <a:lvl1pPr marL="0" marR="0" indent="0" algn="l" defTabSz="914400" rtl="0" fontAlgn="auto" latinLnBrk="1" hangingPunct="0">
@@ -18561,17 +17830,17 @@
         <a:solidFill>
           <a:srgbClr val="FFFFFF"/>
         </a:solidFill>
-        <a:ln w="12700" cap="flat">
+        <a:ln w="25400" cap="flat">
           <a:solidFill>
             <a:schemeClr val="accent1"/>
           </a:solidFill>
           <a:prstDash val="solid"/>
-          <a:miter lim="800000"/>
+          <a:round/>
         </a:ln>
         <a:effectLst/>
         <a:sp3d/>
       </a:spPr>
-      <a:bodyPr rot="0" spcFirstLastPara="1" vertOverflow="overflow" horzOverflow="overflow" vert="horz" wrap="square" lIns="45719" tIns="45719" rIns="45719" bIns="45719" numCol="1" spcCol="38100" rtlCol="0" anchor="ctr" upright="0">
+      <a:bodyPr rot="0" spcFirstLastPara="1" vertOverflow="overflow" horzOverflow="overflow" vert="horz" wrap="square" lIns="45718" tIns="45718" rIns="45718" bIns="45718" numCol="1" spcCol="38100" rtlCol="0" anchor="ctr" upright="0">
         <a:spAutoFit/>
       </a:bodyPr>
       <a:lstStyle>
@@ -18599,10 +17868,10 @@
             </a:solidFill>
             <a:effectLst/>
             <a:uFillTx/>
-            <a:latin typeface="+mj-lt"/>
-            <a:ea typeface="+mj-ea"/>
-            <a:cs typeface="+mj-cs"/>
-            <a:sym typeface="Calibri"/>
+            <a:latin typeface="+mn-lt"/>
+            <a:ea typeface="+mn-ea"/>
+            <a:cs typeface="+mn-cs"/>
+            <a:sym typeface="Helvetica"/>
           </a:defRPr>
         </a:defPPr>
         <a:lvl1pPr marL="0" marR="0" indent="0" algn="l" defTabSz="914400" rtl="0" fontAlgn="auto" latinLnBrk="1" hangingPunct="0">
@@ -18850,12 +18119,12 @@
     <a:lnDef>
       <a:spPr>
         <a:noFill/>
-        <a:ln w="12700" cap="flat">
+        <a:ln w="25400" cap="flat">
           <a:solidFill>
             <a:schemeClr val="accent1"/>
           </a:solidFill>
           <a:prstDash val="solid"/>
-          <a:miter lim="800000"/>
+          <a:round/>
         </a:ln>
         <a:effectLst/>
         <a:sp3d/>
@@ -19142,7 +18411,7 @@
         <a:effectLst/>
         <a:sp3d/>
       </a:spPr>
-      <a:bodyPr rot="0" spcFirstLastPara="1" vertOverflow="overflow" horzOverflow="overflow" vert="horz" wrap="square" lIns="45719" tIns="45719" rIns="45719" bIns="45719" numCol="1" spcCol="38100" rtlCol="0" anchor="t" upright="0">
+      <a:bodyPr rot="0" spcFirstLastPara="1" vertOverflow="overflow" horzOverflow="overflow" vert="horz" wrap="square" lIns="45718" tIns="45718" rIns="45718" bIns="45718" numCol="1" spcCol="38100" rtlCol="0" anchor="t" upright="0">
         <a:spAutoFit/>
       </a:bodyPr>
       <a:lstStyle>
@@ -19170,10 +18439,10 @@
             </a:solidFill>
             <a:effectLst/>
             <a:uFillTx/>
-            <a:latin typeface="+mj-lt"/>
-            <a:ea typeface="+mj-ea"/>
-            <a:cs typeface="+mj-cs"/>
-            <a:sym typeface="Calibri"/>
+            <a:latin typeface="+mn-lt"/>
+            <a:ea typeface="+mn-ea"/>
+            <a:cs typeface="+mn-cs"/>
+            <a:sym typeface="Helvetica"/>
           </a:defRPr>
         </a:defPPr>
         <a:lvl1pPr marL="0" marR="0" indent="0" algn="l" defTabSz="914400" rtl="0" fontAlgn="auto" latinLnBrk="1" hangingPunct="0">
